--- a/SmartFarm-Pitch.pptx
+++ b/SmartFarm-Pitch.pptx
@@ -486,6 +486,198 @@
 </file>
 
 <file path=ppt/notesSlides/notesSlide1.xml><?xml version="1.0" encoding="utf-8"?>
+<p:notes xmlns:a="http://schemas.openxmlformats.org/drawingml/2006/main" xmlns:r="http://schemas.openxmlformats.org/officeDocument/2006/relationships" xmlns:p="http://schemas.openxmlformats.org/presentationml/2006/main">
+  <p:cSld>
+    <p:spTree>
+      <p:nvGrpSpPr>
+        <p:cNvPr id="1" name=""/>
+        <p:cNvGrpSpPr/>
+        <p:nvPr/>
+      </p:nvGrpSpPr>
+      <p:grpSpPr/>
+      <p:sp>
+        <p:nvSpPr>
+          <p:cNvPr id="2" name="Slide Image Placeholder 1"/>
+          <p:cNvSpPr>
+            <a:spLocks noGrp="1"/>
+          </p:cNvSpPr>
+          <p:nvPr>
+            <p:ph type="sldImg" idx="2"/>
+          </p:nvPr>
+        </p:nvSpPr>
+        <p:spPr/>
+      </p:sp>
+      <p:sp>
+        <p:nvSpPr>
+          <p:cNvPr id="3" name="Text Placeholder 2"/>
+          <p:cNvSpPr>
+            <a:spLocks noGrp="1"/>
+          </p:cNvSpPr>
+          <p:nvPr>
+            <p:ph type="body" idx="3"/>
+          </p:nvPr>
+        </p:nvSpPr>
+        <p:spPr/>
+        <p:txBody>
+          <a:bodyPr/>
+          <a:p>
+            <a:endParaRPr lang="en-US"/>
+          </a:p>
+        </p:txBody>
+      </p:sp>
+    </p:spTree>
+  </p:cSld>
+  <p:clrMapOvr>
+    <a:masterClrMapping/>
+  </p:clrMapOvr>
+</p:notes>
+</file>
+
+<file path=ppt/notesSlides/notesSlide2.xml><?xml version="1.0" encoding="utf-8"?>
+<p:notes xmlns:a="http://schemas.openxmlformats.org/drawingml/2006/main" xmlns:r="http://schemas.openxmlformats.org/officeDocument/2006/relationships" xmlns:p="http://schemas.openxmlformats.org/presentationml/2006/main">
+  <p:cSld>
+    <p:spTree>
+      <p:nvGrpSpPr>
+        <p:cNvPr id="1" name=""/>
+        <p:cNvGrpSpPr/>
+        <p:nvPr/>
+      </p:nvGrpSpPr>
+      <p:grpSpPr/>
+      <p:sp>
+        <p:nvSpPr>
+          <p:cNvPr id="2" name="Slide Image Placeholder 1"/>
+          <p:cNvSpPr>
+            <a:spLocks noGrp="1"/>
+          </p:cNvSpPr>
+          <p:nvPr>
+            <p:ph type="sldImg" idx="2"/>
+          </p:nvPr>
+        </p:nvSpPr>
+        <p:spPr/>
+      </p:sp>
+      <p:sp>
+        <p:nvSpPr>
+          <p:cNvPr id="3" name="Text Placeholder 2"/>
+          <p:cNvSpPr>
+            <a:spLocks noGrp="1"/>
+          </p:cNvSpPr>
+          <p:nvPr>
+            <p:ph type="body" idx="3"/>
+          </p:nvPr>
+        </p:nvSpPr>
+        <p:spPr/>
+        <p:txBody>
+          <a:bodyPr/>
+          <a:p>
+            <a:endParaRPr lang="en-US"/>
+          </a:p>
+        </p:txBody>
+      </p:sp>
+    </p:spTree>
+  </p:cSld>
+  <p:clrMapOvr>
+    <a:masterClrMapping/>
+  </p:clrMapOvr>
+</p:notes>
+</file>
+
+<file path=ppt/notesSlides/notesSlide3.xml><?xml version="1.0" encoding="utf-8"?>
+<p:notes xmlns:a="http://schemas.openxmlformats.org/drawingml/2006/main" xmlns:r="http://schemas.openxmlformats.org/officeDocument/2006/relationships" xmlns:p="http://schemas.openxmlformats.org/presentationml/2006/main">
+  <p:cSld>
+    <p:spTree>
+      <p:nvGrpSpPr>
+        <p:cNvPr id="1" name=""/>
+        <p:cNvGrpSpPr/>
+        <p:nvPr/>
+      </p:nvGrpSpPr>
+      <p:grpSpPr/>
+      <p:sp>
+        <p:nvSpPr>
+          <p:cNvPr id="2" name="Slide Image Placeholder 1"/>
+          <p:cNvSpPr>
+            <a:spLocks noGrp="1"/>
+          </p:cNvSpPr>
+          <p:nvPr>
+            <p:ph type="sldImg" idx="2"/>
+          </p:nvPr>
+        </p:nvSpPr>
+        <p:spPr/>
+      </p:sp>
+      <p:sp>
+        <p:nvSpPr>
+          <p:cNvPr id="3" name="Text Placeholder 2"/>
+          <p:cNvSpPr>
+            <a:spLocks noGrp="1"/>
+          </p:cNvSpPr>
+          <p:nvPr>
+            <p:ph type="body" idx="3"/>
+          </p:nvPr>
+        </p:nvSpPr>
+        <p:spPr/>
+        <p:txBody>
+          <a:bodyPr/>
+          <a:p>
+            <a:endParaRPr lang="en-US"/>
+          </a:p>
+        </p:txBody>
+      </p:sp>
+    </p:spTree>
+  </p:cSld>
+  <p:clrMapOvr>
+    <a:masterClrMapping/>
+  </p:clrMapOvr>
+</p:notes>
+</file>
+
+<file path=ppt/notesSlides/notesSlide4.xml><?xml version="1.0" encoding="utf-8"?>
+<p:notes xmlns:a="http://schemas.openxmlformats.org/drawingml/2006/main" xmlns:r="http://schemas.openxmlformats.org/officeDocument/2006/relationships" xmlns:p="http://schemas.openxmlformats.org/presentationml/2006/main">
+  <p:cSld>
+    <p:spTree>
+      <p:nvGrpSpPr>
+        <p:cNvPr id="1" name=""/>
+        <p:cNvGrpSpPr/>
+        <p:nvPr/>
+      </p:nvGrpSpPr>
+      <p:grpSpPr/>
+      <p:sp>
+        <p:nvSpPr>
+          <p:cNvPr id="2" name="Slide Image Placeholder 1"/>
+          <p:cNvSpPr>
+            <a:spLocks noGrp="1"/>
+          </p:cNvSpPr>
+          <p:nvPr>
+            <p:ph type="sldImg" idx="2"/>
+          </p:nvPr>
+        </p:nvSpPr>
+        <p:spPr/>
+      </p:sp>
+      <p:sp>
+        <p:nvSpPr>
+          <p:cNvPr id="3" name="Text Placeholder 2"/>
+          <p:cNvSpPr>
+            <a:spLocks noGrp="1"/>
+          </p:cNvSpPr>
+          <p:nvPr>
+            <p:ph type="body" idx="3"/>
+          </p:nvPr>
+        </p:nvSpPr>
+        <p:spPr/>
+        <p:txBody>
+          <a:bodyPr/>
+          <a:p>
+            <a:endParaRPr lang="en-US"/>
+          </a:p>
+        </p:txBody>
+      </p:sp>
+    </p:spTree>
+  </p:cSld>
+  <p:clrMapOvr>
+    <a:masterClrMapping/>
+  </p:clrMapOvr>
+</p:notes>
+</file>
+
+<file path=ppt/notesSlides/notesSlide5.xml><?xml version="1.0" encoding="utf-8"?>
 <p:notes xmlns:a="http://schemas.openxmlformats.org/drawingml/2006/main" xmlns:r="http://schemas.openxmlformats.org/officeDocument/2006/relationships" xmlns:p="http://schemas.openxmlformats.org/presentationml/2006/main">
   <p:cSld>
     <p:spTree>
@@ -3603,151 +3795,152 @@
           </a:p>
         </p:txBody>
       </p:sp>
-      <p:sp>
-        <p:nvSpPr>
-          <p:cNvPr id="5" name="TextBox 4"/>
-          <p:cNvSpPr txBox="1"/>
-          <p:nvPr/>
-        </p:nvSpPr>
-        <p:spPr>
+      <p:grpSp>
+        <p:nvGrpSpPr>
+          <p:cNvPr id="8" name="Group 7"/>
+          <p:cNvGrpSpPr/>
+          <p:nvPr/>
+        </p:nvGrpSpPr>
+        <p:grpSpPr>
           <a:xfrm>
             <a:off x="548640" y="1828800"/>
-            <a:ext cx="3931920" cy="1920240"/>
-          </a:xfrm>
-          <a:prstGeom prst="rect">
-            <a:avLst/>
-          </a:prstGeom>
-          <a:noFill/>
-        </p:spPr>
-        <p:txBody>
-          <a:bodyPr wrap="square" lIns="0" tIns="0" rIns="0" bIns="0" anchor="t">
-            <a:noAutofit/>
-          </a:bodyPr>
-          <a:lstStyle/>
-          <a:p>
-            <a:pPr algn="ctr"/>
-            <a:r>
-              <a:rPr sz="11000" b="0">
+            <a:ext cx="3931920" cy="2835910"/>
+            <a:chOff x="864" y="2880"/>
+            <a:chExt cx="6192" cy="4466"/>
+          </a:xfrm>
+        </p:grpSpPr>
+        <p:sp>
+          <p:nvSpPr>
+            <p:cNvPr id="5" name="TextBox 4"/>
+            <p:cNvSpPr txBox="1"/>
+            <p:nvPr/>
+          </p:nvSpPr>
+          <p:spPr>
+            <a:xfrm>
+              <a:off x="864" y="2880"/>
+              <a:ext cx="6192" cy="3024"/>
+            </a:xfrm>
+            <a:prstGeom prst="rect">
+              <a:avLst/>
+            </a:prstGeom>
+            <a:noFill/>
+          </p:spPr>
+          <p:txBody>
+            <a:bodyPr wrap="square" lIns="0" tIns="0" rIns="0" bIns="0" anchor="t">
+              <a:noAutofit/>
+            </a:bodyPr>
+            <a:lstStyle/>
+            <a:p>
+              <a:pPr algn="ctr">
+                <a:lnSpc>
+                  <a:spcPct val="130000"/>
+                </a:lnSpc>
+              </a:pPr>
+              <a:r>
+                <a:rPr sz="11000" b="0">
+                  <a:solidFill>
+                    <a:srgbClr val="FFFFFF"/>
+                  </a:solidFill>
+                  <a:latin typeface="Calibri"/>
+                </a:rPr>
+                <a:t>🌱</a:t>
+              </a:r>
+              <a:endParaRPr sz="11000" b="0">
                 <a:solidFill>
                   <a:srgbClr val="FFFFFF"/>
                 </a:solidFill>
                 <a:latin typeface="Calibri"/>
-              </a:rPr>
-              <a:t>🌱</a:t>
-            </a:r>
-            <a:endParaRPr sz="11000" b="0">
-              <a:solidFill>
-                <a:srgbClr val="FFFFFF"/>
-              </a:solidFill>
-              <a:latin typeface="Calibri"/>
-            </a:endParaRPr>
-          </a:p>
-        </p:txBody>
-      </p:sp>
-      <p:sp>
-        <p:nvSpPr>
-          <p:cNvPr id="6" name="TextBox 5"/>
-          <p:cNvSpPr txBox="1"/>
-          <p:nvPr/>
-        </p:nvSpPr>
-        <p:spPr>
-          <a:xfrm>
-            <a:off x="548640" y="3840480"/>
-            <a:ext cx="3931920" cy="548640"/>
-          </a:xfrm>
-          <a:prstGeom prst="rect">
-            <a:avLst/>
-          </a:prstGeom>
-          <a:noFill/>
-        </p:spPr>
-        <p:txBody>
-          <a:bodyPr wrap="square" lIns="0" tIns="0" rIns="0" bIns="0" anchor="t">
-            <a:spAutoFit/>
-          </a:bodyPr>
-          <a:lstStyle/>
-          <a:p>
-            <a:pPr algn="ctr"/>
-            <a:r>
-              <a:rPr sz="3600" b="1">
+              </a:endParaRPr>
+            </a:p>
+          </p:txBody>
+        </p:sp>
+        <p:sp>
+          <p:nvSpPr>
+            <p:cNvPr id="6" name="TextBox 5"/>
+            <p:cNvSpPr txBox="1"/>
+            <p:nvPr/>
+          </p:nvSpPr>
+          <p:spPr>
+            <a:xfrm>
+              <a:off x="864" y="6048"/>
+              <a:ext cx="6192" cy="864"/>
+            </a:xfrm>
+            <a:prstGeom prst="rect">
+              <a:avLst/>
+            </a:prstGeom>
+            <a:noFill/>
+          </p:spPr>
+          <p:txBody>
+            <a:bodyPr wrap="square" lIns="0" tIns="0" rIns="0" bIns="0" anchor="t">
+              <a:spAutoFit/>
+            </a:bodyPr>
+            <a:lstStyle/>
+            <a:p>
+              <a:pPr algn="ctr"/>
+              <a:r>
+                <a:rPr sz="3600" b="1">
+                  <a:solidFill>
+                    <a:srgbClr val="FFFFFF"/>
+                  </a:solidFill>
+                  <a:latin typeface="Calibri"/>
+                </a:rPr>
+                <a:t>SmartFarm</a:t>
+              </a:r>
+              <a:endParaRPr sz="3600" b="1">
                 <a:solidFill>
                   <a:srgbClr val="FFFFFF"/>
                 </a:solidFill>
                 <a:latin typeface="Calibri"/>
-              </a:rPr>
-              <a:t>SmartFarm</a:t>
-            </a:r>
-            <a:endParaRPr sz="3600" b="1">
-              <a:solidFill>
-                <a:srgbClr val="FFFFFF"/>
-              </a:solidFill>
-              <a:latin typeface="Calibri"/>
-            </a:endParaRPr>
-          </a:p>
-        </p:txBody>
-      </p:sp>
-      <p:sp>
-        <p:nvSpPr>
-          <p:cNvPr id="7" name="TextBox 6"/>
-          <p:cNvSpPr txBox="1"/>
-          <p:nvPr/>
-        </p:nvSpPr>
-        <p:spPr>
-          <a:xfrm>
-            <a:off x="548640" y="4389120"/>
-            <a:ext cx="3931920" cy="215265"/>
-          </a:xfrm>
-          <a:prstGeom prst="rect">
-            <a:avLst/>
-          </a:prstGeom>
-          <a:noFill/>
-        </p:spPr>
-        <p:txBody>
-          <a:bodyPr wrap="square" lIns="0" tIns="0" rIns="0" bIns="0" anchor="t">
-            <a:spAutoFit/>
-          </a:bodyPr>
-          <a:lstStyle/>
-          <a:p>
-            <a:pPr algn="ctr"/>
-            <a:r>
-              <a:rPr lang="" altLang="en-US" sz="1400" b="0">
+              </a:endParaRPr>
+            </a:p>
+          </p:txBody>
+        </p:sp>
+        <p:sp>
+          <p:nvSpPr>
+            <p:cNvPr id="7" name="TextBox 6"/>
+            <p:cNvSpPr txBox="1"/>
+            <p:nvPr/>
+          </p:nvSpPr>
+          <p:spPr>
+            <a:xfrm>
+              <a:off x="2072" y="7056"/>
+              <a:ext cx="4174" cy="290"/>
+            </a:xfrm>
+            <a:prstGeom prst="rect">
+              <a:avLst/>
+            </a:prstGeom>
+            <a:noFill/>
+          </p:spPr>
+          <p:txBody>
+            <a:bodyPr wrap="square" lIns="0" tIns="0" rIns="0" bIns="0" anchor="t" anchorCtr="0">
+              <a:spAutoFit/>
+            </a:bodyPr>
+            <a:lstStyle/>
+            <a:p>
+              <a:pPr algn="ctr"/>
+              <a:r>
+                <a:rPr lang="en-US" altLang="en-US" sz="1200" b="0">
+                  <a:solidFill>
+                    <a:srgbClr val="FFFFFF"/>
+                  </a:solidFill>
+                  <a:uFillTx/>
+                  <a:latin typeface="Khmer OS Siemreap" panose="02000500000000020004" charset="0"/>
+                  <a:cs typeface="Khmer OS Siemreap" panose="02000500000000020004" charset="0"/>
+                </a:rPr>
+                <a:t>កសិកម្មឆ្លាតវៃ ងាយស្រួល</a:t>
+              </a:r>
+              <a:endParaRPr lang="en-US" altLang="en-US" sz="1200" b="0">
                 <a:solidFill>
                   <a:srgbClr val="FFFFFF"/>
                 </a:solidFill>
-                <a:latin typeface="Kohinoor Bangla Regular" panose="02000000000000000000" charset="0"/>
-                <a:cs typeface="Kohinoor Bangla Regular" panose="02000000000000000000" charset="0"/>
-              </a:rPr>
-              <a:t>កសិកម្មឆ្លាត</a:t>
-            </a:r>
-            <a:r>
-              <a:rPr lang="" altLang="en-US" sz="1400" b="0">
-                <a:solidFill>
-                  <a:srgbClr val="FFFFFF"/>
-                </a:solidFill>
-                <a:latin typeface="Al Nile Regular" panose="00000400000000000000" charset="0"/>
-                <a:cs typeface="Al Nile Regular" panose="00000400000000000000" charset="0"/>
-              </a:rPr>
-              <a:t>វ</a:t>
-            </a:r>
-            <a:r>
-              <a:rPr lang="" altLang="en-US" sz="1400" b="0">
-                <a:solidFill>
-                  <a:srgbClr val="FFFFFF"/>
-                </a:solidFill>
-                <a:latin typeface="Kohinoor Bangla Regular" panose="02000000000000000000" charset="0"/>
-                <a:cs typeface="Kohinoor Bangla Regular" panose="02000000000000000000" charset="0"/>
-              </a:rPr>
-              <a:t>ៃ ងាយស្រួល</a:t>
-            </a:r>
-            <a:endParaRPr lang="" altLang="en-US" sz="1400" b="0">
-              <a:solidFill>
-                <a:srgbClr val="FFFFFF"/>
-              </a:solidFill>
-              <a:latin typeface="Kohinoor Bangla Regular" panose="02000000000000000000" charset="0"/>
-              <a:cs typeface="Kohinoor Bangla Regular" panose="02000000000000000000" charset="0"/>
-            </a:endParaRPr>
-          </a:p>
-        </p:txBody>
-      </p:sp>
+                <a:uFillTx/>
+                <a:latin typeface="Khmer OS Siemreap" panose="02000500000000020004" charset="0"/>
+                <a:cs typeface="Khmer OS Siemreap" panose="02000500000000020004" charset="0"/>
+              </a:endParaRPr>
+            </a:p>
+          </p:txBody>
+        </p:sp>
+      </p:grpSp>
       <p:sp>
         <p:nvSpPr>
           <p:cNvPr id="9" name="TextBox 8"/>
@@ -3933,7 +4126,7 @@
         </p:nvSpPr>
         <p:spPr>
           <a:xfrm>
-            <a:off x="0" y="0"/>
+            <a:off x="-670560" y="0"/>
             <a:ext cx="12191695" cy="6858000"/>
           </a:xfrm>
           <a:prstGeom prst="rect">
@@ -4103,7 +4296,7 @@
         </p:nvSpPr>
         <p:spPr>
           <a:xfrm>
-            <a:off x="640080" y="1554480"/>
+            <a:off x="1907540" y="1390015"/>
             <a:ext cx="3611880" cy="4206240"/>
           </a:xfrm>
           <a:prstGeom prst="roundRect">
@@ -4149,7 +4342,7 @@
         </p:nvSpPr>
         <p:spPr>
           <a:xfrm>
-            <a:off x="640080" y="1554480"/>
+            <a:off x="1907540" y="1390015"/>
             <a:ext cx="3611880" cy="502920"/>
           </a:xfrm>
           <a:prstGeom prst="rect">
@@ -4193,7 +4386,7 @@
         </p:nvSpPr>
         <p:spPr>
           <a:xfrm>
-            <a:off x="640080" y="1664208"/>
+            <a:off x="1907540" y="1499743"/>
             <a:ext cx="3611880" cy="365760"/>
           </a:xfrm>
           <a:prstGeom prst="rect">
@@ -4234,7 +4427,7 @@
         </p:nvSpPr>
         <p:spPr>
           <a:xfrm>
-            <a:off x="914400" y="2331720"/>
+            <a:off x="2181860" y="2167255"/>
             <a:ext cx="3154680" cy="3291840"/>
           </a:xfrm>
           <a:prstGeom prst="rect">
@@ -4329,7 +4522,7 @@
         </p:nvSpPr>
         <p:spPr>
           <a:xfrm>
-            <a:off x="4389120" y="1554480"/>
+            <a:off x="6738620" y="1412875"/>
             <a:ext cx="3611880" cy="4206240"/>
           </a:xfrm>
           <a:prstGeom prst="roundRect">
@@ -4375,7 +4568,7 @@
         </p:nvSpPr>
         <p:spPr>
           <a:xfrm>
-            <a:off x="4389120" y="1554480"/>
+            <a:off x="6738620" y="1390015"/>
             <a:ext cx="3611880" cy="502920"/>
           </a:xfrm>
           <a:prstGeom prst="rect">
@@ -4419,7 +4612,7 @@
         </p:nvSpPr>
         <p:spPr>
           <a:xfrm>
-            <a:off x="4389120" y="1664208"/>
+            <a:off x="6738620" y="1499743"/>
             <a:ext cx="3611880" cy="365760"/>
           </a:xfrm>
           <a:prstGeom prst="rect">
@@ -4460,8 +4653,8 @@
         </p:nvSpPr>
         <p:spPr>
           <a:xfrm>
-            <a:off x="4663440" y="2331720"/>
-            <a:ext cx="3154680" cy="3291840"/>
+            <a:off x="7012940" y="2167255"/>
+            <a:ext cx="3154680" cy="845820"/>
           </a:xfrm>
           <a:prstGeom prst="rect">
             <a:avLst/>
@@ -4512,6 +4705,45 @@
           <a:p>
             <a:pPr algn="l"/>
             <a:r>
+              <a:rPr sz="1100">
+                <a:solidFill>
+                  <a:srgbClr val="3A423D"/>
+                </a:solidFill>
+                <a:latin typeface="Calibri"/>
+                <a:sym typeface="+mn-ea"/>
+              </a:rPr>
+              <a:t>•  </a:t>
+            </a:r>
+            <a:r>
+              <a:rPr lang="en-US" sz="1100">
+                <a:solidFill>
+                  <a:srgbClr val="3A423D"/>
+                </a:solidFill>
+                <a:latin typeface="Calibri"/>
+                <a:sym typeface="+mn-ea"/>
+              </a:rPr>
+              <a:t>P</a:t>
+            </a:r>
+            <a:r>
+              <a:rPr sz="1100">
+                <a:solidFill>
+                  <a:srgbClr val="3A423D"/>
+                </a:solidFill>
+                <a:latin typeface="Calibri"/>
+                <a:sym typeface="+mn-ea"/>
+              </a:rPr>
+              <a:t>hoto-based pest detail (30–50 entries)</a:t>
+            </a:r>
+            <a:endParaRPr sz="1100" b="0">
+              <a:solidFill>
+                <a:srgbClr val="3A423D"/>
+              </a:solidFill>
+              <a:latin typeface="Calibri"/>
+            </a:endParaRPr>
+          </a:p>
+          <a:p>
+            <a:pPr algn="l"/>
+            <a:r>
               <a:rPr sz="1100" b="0">
                 <a:solidFill>
                   <a:srgbClr val="3A423D"/>
@@ -4537,232 +4769,6 @@
                 <a:latin typeface="Calibri"/>
               </a:rPr>
               <a:t>•  Local notifications for activities</a:t>
-            </a:r>
-            <a:endParaRPr sz="1100" b="0">
-              <a:solidFill>
-                <a:srgbClr val="3A423D"/>
-              </a:solidFill>
-              <a:latin typeface="Calibri"/>
-            </a:endParaRPr>
-          </a:p>
-        </p:txBody>
-      </p:sp>
-      <p:sp>
-        <p:nvSpPr>
-          <p:cNvPr id="14" name="Rounded Rectangle 13"/>
-          <p:cNvSpPr/>
-          <p:nvPr/>
-        </p:nvSpPr>
-        <p:spPr>
-          <a:xfrm>
-            <a:off x="8138160" y="1554480"/>
-            <a:ext cx="3611880" cy="4206240"/>
-          </a:xfrm>
-          <a:prstGeom prst="roundRect">
-            <a:avLst/>
-          </a:prstGeom>
-          <a:solidFill>
-            <a:srgbClr val="FFFFFF"/>
-          </a:solidFill>
-          <a:ln w="9525">
-            <a:solidFill>
-              <a:srgbClr val="D8DBD9"/>
-            </a:solidFill>
-          </a:ln>
-          <a:effectLst/>
-        </p:spPr>
-        <p:style>
-          <a:lnRef idx="1">
-            <a:schemeClr val="accent1"/>
-          </a:lnRef>
-          <a:fillRef idx="3">
-            <a:schemeClr val="accent1"/>
-          </a:fillRef>
-          <a:effectRef idx="2">
-            <a:schemeClr val="accent1"/>
-          </a:effectRef>
-          <a:fontRef idx="minor">
-            <a:schemeClr val="lt1"/>
-          </a:fontRef>
-        </p:style>
-        <p:txBody>
-          <a:bodyPr rtlCol="0" anchor="ctr"/>
-          <a:lstStyle/>
-          <a:p>
-            <a:pPr algn="ctr"/>
-          </a:p>
-        </p:txBody>
-      </p:sp>
-      <p:sp>
-        <p:nvSpPr>
-          <p:cNvPr id="15" name="Rectangle 14"/>
-          <p:cNvSpPr/>
-          <p:nvPr/>
-        </p:nvSpPr>
-        <p:spPr>
-          <a:xfrm>
-            <a:off x="8138160" y="1554480"/>
-            <a:ext cx="3611880" cy="502920"/>
-          </a:xfrm>
-          <a:prstGeom prst="rect">
-            <a:avLst/>
-          </a:prstGeom>
-          <a:solidFill>
-            <a:srgbClr val="1F4D2E"/>
-          </a:solidFill>
-          <a:ln>
-            <a:noFill/>
-          </a:ln>
-          <a:effectLst/>
-        </p:spPr>
-        <p:style>
-          <a:lnRef idx="1">
-            <a:schemeClr val="accent1"/>
-          </a:lnRef>
-          <a:fillRef idx="3">
-            <a:schemeClr val="accent1"/>
-          </a:fillRef>
-          <a:effectRef idx="2">
-            <a:schemeClr val="accent1"/>
-          </a:effectRef>
-          <a:fontRef idx="minor">
-            <a:schemeClr val="lt1"/>
-          </a:fontRef>
-        </p:style>
-        <p:txBody>
-          <a:bodyPr rtlCol="0" anchor="ctr"/>
-          <a:lstStyle/>
-          <a:p>
-            <a:pPr algn="ctr"/>
-          </a:p>
-        </p:txBody>
-      </p:sp>
-      <p:sp>
-        <p:nvSpPr>
-          <p:cNvPr id="16" name="TextBox 15"/>
-          <p:cNvSpPr txBox="1"/>
-          <p:nvPr/>
-        </p:nvSpPr>
-        <p:spPr>
-          <a:xfrm>
-            <a:off x="8138160" y="1664208"/>
-            <a:ext cx="3611880" cy="365760"/>
-          </a:xfrm>
-          <a:prstGeom prst="rect">
-            <a:avLst/>
-          </a:prstGeom>
-          <a:noFill/>
-        </p:spPr>
-        <p:txBody>
-          <a:bodyPr wrap="square" lIns="0" tIns="0" rIns="0" bIns="0" anchor="t">
-            <a:spAutoFit/>
-          </a:bodyPr>
-          <a:lstStyle/>
-          <a:p>
-            <a:pPr algn="ctr"/>
-            <a:r>
-              <a:rPr sz="1400" b="1">
-                <a:solidFill>
-                  <a:srgbClr val="FFFFFF"/>
-                </a:solidFill>
-                <a:latin typeface="Calibri"/>
-              </a:rPr>
-              <a:t>6–12 months</a:t>
-            </a:r>
-            <a:endParaRPr sz="1400" b="1">
-              <a:solidFill>
-                <a:srgbClr val="FFFFFF"/>
-              </a:solidFill>
-              <a:latin typeface="Calibri"/>
-            </a:endParaRPr>
-          </a:p>
-        </p:txBody>
-      </p:sp>
-      <p:sp>
-        <p:nvSpPr>
-          <p:cNvPr id="17" name="TextBox 16"/>
-          <p:cNvSpPr txBox="1"/>
-          <p:nvPr/>
-        </p:nvSpPr>
-        <p:spPr>
-          <a:xfrm>
-            <a:off x="8412480" y="2331720"/>
-            <a:ext cx="3154680" cy="3291840"/>
-          </a:xfrm>
-          <a:prstGeom prst="rect">
-            <a:avLst/>
-          </a:prstGeom>
-          <a:noFill/>
-        </p:spPr>
-        <p:txBody>
-          <a:bodyPr wrap="square" lIns="0" tIns="0" rIns="0" bIns="0" anchor="t">
-            <a:spAutoFit/>
-          </a:bodyPr>
-          <a:lstStyle/>
-          <a:p>
-            <a:pPr algn="l"/>
-            <a:r>
-              <a:rPr sz="1100" b="0">
-                <a:solidFill>
-                  <a:srgbClr val="3A423D"/>
-                </a:solidFill>
-                <a:latin typeface="Calibri"/>
-              </a:rPr>
-              <a:t>•  Photo-based pest detail (30–50 entries)</a:t>
-            </a:r>
-            <a:endParaRPr sz="1100" b="0">
-              <a:solidFill>
-                <a:srgbClr val="3A423D"/>
-              </a:solidFill>
-              <a:latin typeface="Calibri"/>
-            </a:endParaRPr>
-          </a:p>
-          <a:p>
-            <a:pPr algn="l"/>
-            <a:r>
-              <a:rPr sz="1100" b="0">
-                <a:solidFill>
-                  <a:srgbClr val="3A423D"/>
-                </a:solidFill>
-                <a:latin typeface="Calibri"/>
-              </a:rPr>
-              <a:t>•  Voice notes for low-literacy users</a:t>
-            </a:r>
-            <a:endParaRPr sz="1100" b="0">
-              <a:solidFill>
-                <a:srgbClr val="3A423D"/>
-              </a:solidFill>
-              <a:latin typeface="Calibri"/>
-            </a:endParaRPr>
-          </a:p>
-          <a:p>
-            <a:pPr algn="l"/>
-            <a:r>
-              <a:rPr sz="1100" b="0">
-                <a:solidFill>
-                  <a:srgbClr val="3A423D"/>
-                </a:solidFill>
-                <a:latin typeface="Calibri"/>
-              </a:rPr>
-              <a:t>•  TestFlight pilot with real farmers</a:t>
-            </a:r>
-            <a:endParaRPr sz="1100" b="0">
-              <a:solidFill>
-                <a:srgbClr val="3A423D"/>
-              </a:solidFill>
-              <a:latin typeface="Calibri"/>
-            </a:endParaRPr>
-          </a:p>
-          <a:p>
-            <a:pPr algn="l"/>
-            <a:r>
-              <a:rPr sz="1100" b="0">
-                <a:solidFill>
-                  <a:srgbClr val="3A423D"/>
-                </a:solidFill>
-                <a:latin typeface="Calibri"/>
-              </a:rPr>
-              <a:t>•  Optional iCloud Drive backup</a:t>
             </a:r>
             <a:endParaRPr sz="1100" b="0">
               <a:solidFill>
@@ -4867,7 +4873,7 @@
         <p:spPr>
           <a:xfrm>
             <a:off x="548640" y="6446520"/>
-            <a:ext cx="5486400" cy="274320"/>
+            <a:ext cx="5486400" cy="138430"/>
           </a:xfrm>
           <a:prstGeom prst="rect">
             <a:avLst/>
@@ -4886,7 +4892,8 @@
                 <a:solidFill>
                   <a:srgbClr val="6B6E6A"/>
                 </a:solidFill>
-                <a:latin typeface="Calibri"/>
+                <a:latin typeface="Khmer OS Siemreap" panose="02000500000000020004" charset="0"/>
+                <a:cs typeface="Khmer OS Siemreap" panose="02000500000000020004" charset="0"/>
               </a:rPr>
               <a:t>SmartFarm — កសិកម្មឆ្លាតវៃ ងាយស្រួល</a:t>
             </a:r>
@@ -4894,7 +4901,8 @@
               <a:solidFill>
                 <a:srgbClr val="6B6E6A"/>
               </a:solidFill>
-              <a:latin typeface="Calibri"/>
+              <a:latin typeface="Khmer OS Siemreap" panose="02000500000000020004" charset="0"/>
+              <a:cs typeface="Khmer OS Siemreap" panose="02000500000000020004" charset="0"/>
             </a:endParaRPr>
           </a:p>
         </p:txBody>
@@ -5452,7 +5460,7 @@
         <p:spPr>
           <a:xfrm>
             <a:off x="4663440" y="2743200"/>
-            <a:ext cx="3154680" cy="1005840"/>
+            <a:ext cx="3154680" cy="338455"/>
           </a:xfrm>
           <a:prstGeom prst="rect">
             <a:avLst/>
@@ -5473,7 +5481,7 @@
                 </a:solidFill>
                 <a:latin typeface="Calibri"/>
               </a:rPr>
-              <a:t>Entry-level Android and older iPhones are common,</a:t>
+              <a:t>Entry-level older iPhones are common,</a:t>
             </a:r>
             <a:endParaRPr sz="1100" b="0">
               <a:solidFill>
@@ -5783,7 +5791,7 @@
         <p:spPr>
           <a:xfrm>
             <a:off x="868680" y="4754880"/>
-            <a:ext cx="10515600" cy="1280160"/>
+            <a:ext cx="10515600" cy="1107440"/>
           </a:xfrm>
           <a:prstGeom prst="rect">
             <a:avLst/>
@@ -5796,7 +5804,11 @@
           </a:bodyPr>
           <a:lstStyle/>
           <a:p>
-            <a:pPr algn="l"/>
+            <a:pPr indent="0" algn="l" fontAlgn="auto">
+              <a:lnSpc>
+                <a:spcPct val="200000"/>
+              </a:lnSpc>
+            </a:pPr>
             <a:r>
               <a:rPr sz="1200" b="0">
                 <a:solidFill>
@@ -5814,7 +5826,11 @@
             </a:endParaRPr>
           </a:p>
           <a:p>
-            <a:pPr algn="l"/>
+            <a:pPr indent="0" algn="l" fontAlgn="auto">
+              <a:lnSpc>
+                <a:spcPct val="200000"/>
+              </a:lnSpc>
+            </a:pPr>
             <a:r>
               <a:rPr sz="1200" b="0">
                 <a:solidFill>
@@ -5832,7 +5848,11 @@
             </a:endParaRPr>
           </a:p>
           <a:p>
-            <a:pPr algn="l"/>
+            <a:pPr indent="0" algn="l" fontAlgn="auto">
+              <a:lnSpc>
+                <a:spcPct val="200000"/>
+              </a:lnSpc>
+            </a:pPr>
             <a:r>
               <a:rPr sz="1200" b="0">
                 <a:solidFill>
@@ -5894,14 +5914,14 @@
       </p:sp>
       <p:sp>
         <p:nvSpPr>
-          <p:cNvPr id="86" name="TextBox 10"/>
-          <p:cNvSpPr txBox="1"/>
-          <p:nvPr/>
-        </p:nvSpPr>
-        <p:spPr>
-          <a:xfrm>
-            <a:off x="594360" y="6355080"/>
-            <a:ext cx="2743200" cy="153670"/>
+          <p:cNvPr id="52" name="TextBox 19"/>
+          <p:cNvSpPr txBox="1"/>
+          <p:nvPr/>
+        </p:nvSpPr>
+        <p:spPr>
+          <a:xfrm>
+            <a:off x="548640" y="6582410"/>
+            <a:ext cx="5486400" cy="138430"/>
           </a:xfrm>
           <a:prstGeom prst="rect">
             <a:avLst/>
@@ -5916,19 +5936,21 @@
           <a:p>
             <a:pPr algn="l"/>
             <a:r>
-              <a:rPr sz="1000" b="0">
-                <a:solidFill>
-                  <a:srgbClr val="B0B4B1"/>
-                </a:solidFill>
-                <a:latin typeface="Calibri"/>
-              </a:rPr>
-              <a:t>Presented by the SmartFarm team</a:t>
-            </a:r>
-            <a:endParaRPr sz="1000" b="0">
-              <a:solidFill>
-                <a:srgbClr val="B0B4B1"/>
-              </a:solidFill>
-              <a:latin typeface="Calibri"/>
+              <a:rPr sz="900" b="0">
+                <a:solidFill>
+                  <a:srgbClr val="6B6E6A"/>
+                </a:solidFill>
+                <a:latin typeface="Khmer OS Siemreap" panose="02000500000000020004" charset="0"/>
+                <a:cs typeface="Khmer OS Siemreap" panose="02000500000000020004" charset="0"/>
+              </a:rPr>
+              <a:t>SmartFarm — កសិកម្មឆ្លាតវៃ ងាយស្រួល</a:t>
+            </a:r>
+            <a:endParaRPr sz="900" b="0">
+              <a:solidFill>
+                <a:srgbClr val="6B6E6A"/>
+              </a:solidFill>
+              <a:latin typeface="Khmer OS Siemreap" panose="02000500000000020004" charset="0"/>
+              <a:cs typeface="Khmer OS Siemreap" panose="02000500000000020004" charset="0"/>
             </a:endParaRPr>
           </a:p>
         </p:txBody>
@@ -8068,14 +8090,14 @@
       </p:sp>
       <p:sp>
         <p:nvSpPr>
-          <p:cNvPr id="86" name="TextBox 10"/>
-          <p:cNvSpPr txBox="1"/>
-          <p:nvPr/>
-        </p:nvSpPr>
-        <p:spPr>
-          <a:xfrm>
-            <a:off x="594360" y="6567170"/>
-            <a:ext cx="2743200" cy="153670"/>
+          <p:cNvPr id="52" name="TextBox 19"/>
+          <p:cNvSpPr txBox="1"/>
+          <p:nvPr/>
+        </p:nvSpPr>
+        <p:spPr>
+          <a:xfrm>
+            <a:off x="548640" y="6582410"/>
+            <a:ext cx="5486400" cy="138430"/>
           </a:xfrm>
           <a:prstGeom prst="rect">
             <a:avLst/>
@@ -8090,19 +8112,21 @@
           <a:p>
             <a:pPr algn="l"/>
             <a:r>
-              <a:rPr sz="1000" b="0">
-                <a:solidFill>
-                  <a:srgbClr val="B0B4B1"/>
-                </a:solidFill>
-                <a:latin typeface="Calibri"/>
-              </a:rPr>
-              <a:t>Presented by the SmartFarm team</a:t>
-            </a:r>
-            <a:endParaRPr sz="1000" b="0">
-              <a:solidFill>
-                <a:srgbClr val="B0B4B1"/>
-              </a:solidFill>
-              <a:latin typeface="Calibri"/>
+              <a:rPr sz="900" b="0">
+                <a:solidFill>
+                  <a:srgbClr val="6B6E6A"/>
+                </a:solidFill>
+                <a:latin typeface="Khmer OS Siemreap" panose="02000500000000020004" charset="0"/>
+                <a:cs typeface="Khmer OS Siemreap" panose="02000500000000020004" charset="0"/>
+              </a:rPr>
+              <a:t>SmartFarm — កសិកម្មឆ្លាតវៃ ងាយស្រួល</a:t>
+            </a:r>
+            <a:endParaRPr sz="900" b="0">
+              <a:solidFill>
+                <a:srgbClr val="6B6E6A"/>
+              </a:solidFill>
+              <a:latin typeface="Khmer OS Siemreap" panose="02000500000000020004" charset="0"/>
+              <a:cs typeface="Khmer OS Siemreap" panose="02000500000000020004" charset="0"/>
             </a:endParaRPr>
           </a:p>
         </p:txBody>
@@ -8389,7 +8413,7 @@
         <p:spPr>
           <a:xfrm>
             <a:off x="548640" y="4937760"/>
-            <a:ext cx="11064240" cy="365760"/>
+            <a:ext cx="11064240" cy="184150"/>
           </a:xfrm>
           <a:prstGeom prst="rect">
             <a:avLst/>
@@ -8404,19 +8428,21 @@
           <a:p>
             <a:pPr algn="ctr"/>
             <a:r>
-              <a:rPr sz="1200" b="0">
+              <a:rPr sz="1200" b="1">
                 <a:solidFill>
                   <a:srgbClr val="FFFFFF"/>
                 </a:solidFill>
-                <a:latin typeface="Calibri"/>
+                <a:latin typeface="Khmer OS Siemreap" panose="02000500000000020004" charset="0"/>
+                <a:cs typeface="Khmer OS Siemreap" panose="02000500000000020004" charset="0"/>
               </a:rPr>
               <a:t>SmartFarm — កសិកម្មឆ្លាតវៃ ងាយស្រួល</a:t>
             </a:r>
-            <a:endParaRPr sz="1200" b="0">
+            <a:endParaRPr sz="1200" b="1">
               <a:solidFill>
                 <a:srgbClr val="FFFFFF"/>
               </a:solidFill>
-              <a:latin typeface="Calibri"/>
+              <a:latin typeface="Khmer OS Siemreap" panose="02000500000000020004" charset="0"/>
+              <a:cs typeface="Khmer OS Siemreap" panose="02000500000000020004" charset="0"/>
             </a:endParaRPr>
           </a:p>
         </p:txBody>
@@ -8707,17 +8733,17 @@
         </p:nvSpPr>
         <p:spPr>
           <a:xfrm>
-            <a:off x="1274445" y="1816735"/>
-            <a:ext cx="503555" cy="307340"/>
-          </a:xfrm>
-          <a:prstGeom prst="rect">
-            <a:avLst/>
-          </a:prstGeom>
-          <a:noFill/>
-        </p:spPr>
-        <p:txBody>
-          <a:bodyPr wrap="square" lIns="0" tIns="0" rIns="0" bIns="0" anchor="t">
-            <a:spAutoFit/>
+            <a:off x="1256030" y="1713865"/>
+            <a:ext cx="521970" cy="410210"/>
+          </a:xfrm>
+          <a:prstGeom prst="rect">
+            <a:avLst/>
+          </a:prstGeom>
+          <a:noFill/>
+        </p:spPr>
+        <p:txBody>
+          <a:bodyPr wrap="square" lIns="0" tIns="0" rIns="0" bIns="0" anchor="ctr" anchorCtr="0">
+            <a:noAutofit/>
           </a:bodyPr>
           <a:lstStyle/>
           <a:p>
@@ -8938,16 +8964,16 @@
         </p:nvSpPr>
         <p:spPr>
           <a:xfrm>
-            <a:off x="6812915" y="1816735"/>
-            <a:ext cx="455295" cy="273685"/>
-          </a:xfrm>
-          <a:prstGeom prst="rect">
-            <a:avLst/>
-          </a:prstGeom>
-          <a:noFill/>
-        </p:spPr>
-        <p:txBody>
-          <a:bodyPr wrap="square" lIns="0" tIns="0" rIns="0" bIns="0" anchor="t">
+            <a:off x="6812915" y="1677670"/>
+            <a:ext cx="455295" cy="412750"/>
+          </a:xfrm>
+          <a:prstGeom prst="rect">
+            <a:avLst/>
+          </a:prstGeom>
+          <a:noFill/>
+        </p:spPr>
+        <p:txBody>
+          <a:bodyPr wrap="square" lIns="0" tIns="0" rIns="0" bIns="0" anchor="ctr" anchorCtr="0">
             <a:noAutofit/>
           </a:bodyPr>
           <a:lstStyle/>
@@ -9394,47 +9420,6 @@
       </p:sp>
       <p:sp>
         <p:nvSpPr>
-          <p:cNvPr id="23" name="TextBox 22"/>
-          <p:cNvSpPr txBox="1"/>
-          <p:nvPr/>
-        </p:nvSpPr>
-        <p:spPr>
-          <a:xfrm>
-            <a:off x="6583680" y="4069080"/>
-            <a:ext cx="914400" cy="365760"/>
-          </a:xfrm>
-          <a:prstGeom prst="rect">
-            <a:avLst/>
-          </a:prstGeom>
-          <a:noFill/>
-        </p:spPr>
-        <p:txBody>
-          <a:bodyPr wrap="square" lIns="0" tIns="0" rIns="0" bIns="0" anchor="t">
-            <a:spAutoFit/>
-          </a:bodyPr>
-          <a:lstStyle/>
-          <a:p>
-            <a:pPr algn="l"/>
-            <a:r>
-              <a:rPr sz="2000" b="1">
-                <a:solidFill>
-                  <a:srgbClr val="2E6E43"/>
-                </a:solidFill>
-                <a:latin typeface="Calibri"/>
-              </a:rPr>
-              <a:t>[X]</a:t>
-            </a:r>
-            <a:endParaRPr sz="2000" b="1">
-              <a:solidFill>
-                <a:srgbClr val="2E6E43"/>
-              </a:solidFill>
-              <a:latin typeface="Calibri"/>
-            </a:endParaRPr>
-          </a:p>
-        </p:txBody>
-      </p:sp>
-      <p:sp>
-        <p:nvSpPr>
           <p:cNvPr id="24" name="TextBox 23"/>
           <p:cNvSpPr txBox="1"/>
           <p:nvPr/>
@@ -9574,16 +9559,38 @@
           </a:p>
         </p:txBody>
       </p:sp>
-      <p:sp>
-        <p:nvSpPr>
-          <p:cNvPr id="28" name="TextBox 10"/>
-          <p:cNvSpPr txBox="1"/>
-          <p:nvPr/>
-        </p:nvSpPr>
-        <p:spPr>
-          <a:xfrm>
-            <a:off x="548640" y="6359525"/>
-            <a:ext cx="2768600" cy="153670"/>
+      <p:pic>
+        <p:nvPicPr>
+          <p:cNvPr id="26" name="Picture 25"/>
+          <p:cNvPicPr/>
+          <p:nvPr/>
+        </p:nvPicPr>
+        <p:blipFill>
+          <a:blip r:embed="rId1"/>
+          <a:stretch>
+            <a:fillRect/>
+          </a:stretch>
+        </p:blipFill>
+        <p:spPr>
+          <a:xfrm>
+            <a:off x="6598285" y="3983355"/>
+            <a:ext cx="412115" cy="412115"/>
+          </a:xfrm>
+          <a:prstGeom prst="rect">
+            <a:avLst/>
+          </a:prstGeom>
+        </p:spPr>
+      </p:pic>
+      <p:sp>
+        <p:nvSpPr>
+          <p:cNvPr id="52" name="TextBox 19"/>
+          <p:cNvSpPr txBox="1"/>
+          <p:nvPr/>
+        </p:nvSpPr>
+        <p:spPr>
+          <a:xfrm>
+            <a:off x="586740" y="6582410"/>
+            <a:ext cx="5486400" cy="138430"/>
           </a:xfrm>
           <a:prstGeom prst="rect">
             <a:avLst/>
@@ -9598,19 +9605,21 @@
           <a:p>
             <a:pPr algn="l"/>
             <a:r>
-              <a:rPr sz="1000" b="0">
-                <a:solidFill>
-                  <a:srgbClr val="B0B4B1"/>
-                </a:solidFill>
-                <a:latin typeface="Calibri"/>
-              </a:rPr>
-              <a:t>Presented by the SmartFarm team</a:t>
-            </a:r>
-            <a:endParaRPr sz="1000" b="0">
-              <a:solidFill>
-                <a:srgbClr val="B0B4B1"/>
-              </a:solidFill>
-              <a:latin typeface="Calibri"/>
+              <a:rPr sz="900" b="0">
+                <a:solidFill>
+                  <a:srgbClr val="6B6E6A"/>
+                </a:solidFill>
+                <a:latin typeface="Khmer OS Siemreap" panose="02000500000000020004" charset="0"/>
+                <a:cs typeface="Khmer OS Siemreap" panose="02000500000000020004" charset="0"/>
+              </a:rPr>
+              <a:t>SmartFarm — កសិកម្មឆ្លាតវៃ ងាយស្រួល</a:t>
+            </a:r>
+            <a:endParaRPr sz="900" b="0">
+              <a:solidFill>
+                <a:srgbClr val="6B6E6A"/>
+              </a:solidFill>
+              <a:latin typeface="Khmer OS Siemreap" panose="02000500000000020004" charset="0"/>
+              <a:cs typeface="Khmer OS Siemreap" panose="02000500000000020004" charset="0"/>
             </a:endParaRPr>
           </a:p>
         </p:txBody>
@@ -10929,14 +10938,14 @@
       </p:sp>
       <p:sp>
         <p:nvSpPr>
-          <p:cNvPr id="30" name="TextBox 10"/>
-          <p:cNvSpPr txBox="1"/>
-          <p:nvPr/>
-        </p:nvSpPr>
-        <p:spPr>
-          <a:xfrm>
-            <a:off x="594360" y="6355080"/>
-            <a:ext cx="2743200" cy="153670"/>
+          <p:cNvPr id="52" name="TextBox 19"/>
+          <p:cNvSpPr txBox="1"/>
+          <p:nvPr/>
+        </p:nvSpPr>
+        <p:spPr>
+          <a:xfrm>
+            <a:off x="548640" y="6537960"/>
+            <a:ext cx="5486400" cy="138430"/>
           </a:xfrm>
           <a:prstGeom prst="rect">
             <a:avLst/>
@@ -10951,19 +10960,21 @@
           <a:p>
             <a:pPr algn="l"/>
             <a:r>
-              <a:rPr sz="1000" b="0">
-                <a:solidFill>
-                  <a:srgbClr val="B0B4B1"/>
-                </a:solidFill>
-                <a:latin typeface="Calibri"/>
-              </a:rPr>
-              <a:t>Presented by the SmartFarm team</a:t>
-            </a:r>
-            <a:endParaRPr sz="1000" b="0">
-              <a:solidFill>
-                <a:srgbClr val="B0B4B1"/>
-              </a:solidFill>
-              <a:latin typeface="Calibri"/>
+              <a:rPr sz="900" b="0">
+                <a:solidFill>
+                  <a:srgbClr val="6B6E6A"/>
+                </a:solidFill>
+                <a:latin typeface="Khmer OS Siemreap" panose="02000500000000020004" charset="0"/>
+                <a:cs typeface="Khmer OS Siemreap" panose="02000500000000020004" charset="0"/>
+              </a:rPr>
+              <a:t>SmartFarm — កសិកម្មឆ្លាតវៃ ងាយស្រួល</a:t>
+            </a:r>
+            <a:endParaRPr sz="900" b="0">
+              <a:solidFill>
+                <a:srgbClr val="6B6E6A"/>
+              </a:solidFill>
+              <a:latin typeface="Khmer OS Siemreap" panose="02000500000000020004" charset="0"/>
+              <a:cs typeface="Khmer OS Siemreap" panose="02000500000000020004" charset="0"/>
             </a:endParaRPr>
           </a:p>
         </p:txBody>
@@ -11953,14 +11964,14 @@
       </p:sp>
       <p:sp>
         <p:nvSpPr>
-          <p:cNvPr id="28" name="TextBox 10"/>
-          <p:cNvSpPr txBox="1"/>
-          <p:nvPr/>
-        </p:nvSpPr>
-        <p:spPr>
-          <a:xfrm>
-            <a:off x="548640" y="6359525"/>
-            <a:ext cx="2768600" cy="153670"/>
+          <p:cNvPr id="52" name="TextBox 19"/>
+          <p:cNvSpPr txBox="1"/>
+          <p:nvPr/>
+        </p:nvSpPr>
+        <p:spPr>
+          <a:xfrm>
+            <a:off x="548640" y="6582410"/>
+            <a:ext cx="5486400" cy="138430"/>
           </a:xfrm>
           <a:prstGeom prst="rect">
             <a:avLst/>
@@ -11975,19 +11986,21 @@
           <a:p>
             <a:pPr algn="l"/>
             <a:r>
-              <a:rPr sz="1000" b="0">
-                <a:solidFill>
-                  <a:srgbClr val="B0B4B1"/>
-                </a:solidFill>
-                <a:latin typeface="Calibri"/>
-              </a:rPr>
-              <a:t>Presented by the SmartFarm team</a:t>
-            </a:r>
-            <a:endParaRPr sz="1000" b="0">
-              <a:solidFill>
-                <a:srgbClr val="B0B4B1"/>
-              </a:solidFill>
-              <a:latin typeface="Calibri"/>
+              <a:rPr sz="900" b="0">
+                <a:solidFill>
+                  <a:srgbClr val="6B6E6A"/>
+                </a:solidFill>
+                <a:latin typeface="Khmer OS Siemreap" panose="02000500000000020004" charset="0"/>
+                <a:cs typeface="Khmer OS Siemreap" panose="02000500000000020004" charset="0"/>
+              </a:rPr>
+              <a:t>SmartFarm — កសិកម្មឆ្លាតវៃ ងាយស្រួល</a:t>
+            </a:r>
+            <a:endParaRPr sz="900" b="0">
+              <a:solidFill>
+                <a:srgbClr val="6B6E6A"/>
+              </a:solidFill>
+              <a:latin typeface="Khmer OS Siemreap" panose="02000500000000020004" charset="0"/>
+              <a:cs typeface="Khmer OS Siemreap" panose="02000500000000020004" charset="0"/>
             </a:endParaRPr>
           </a:p>
         </p:txBody>
@@ -12459,7 +12472,7 @@
         <p:spPr>
           <a:xfrm>
             <a:off x="3840480" y="3657600"/>
-            <a:ext cx="7772400" cy="2743200"/>
+            <a:ext cx="7772400" cy="1661795"/>
           </a:xfrm>
           <a:prstGeom prst="rect">
             <a:avLst/>
@@ -12472,7 +12485,11 @@
           </a:bodyPr>
           <a:lstStyle/>
           <a:p>
-            <a:pPr algn="l"/>
+            <a:pPr indent="0" algn="l" fontAlgn="auto">
+              <a:lnSpc>
+                <a:spcPct val="150000"/>
+              </a:lnSpc>
+            </a:pPr>
             <a:r>
               <a:rPr sz="1200" b="0">
                 <a:solidFill>
@@ -12490,7 +12507,11 @@
             </a:endParaRPr>
           </a:p>
           <a:p>
-            <a:pPr algn="l"/>
+            <a:pPr indent="0" algn="l" fontAlgn="auto">
+              <a:lnSpc>
+                <a:spcPct val="150000"/>
+              </a:lnSpc>
+            </a:pPr>
             <a:r>
               <a:rPr sz="1200" b="0">
                 <a:solidFill>
@@ -12508,7 +12529,11 @@
             </a:endParaRPr>
           </a:p>
           <a:p>
-            <a:pPr algn="l"/>
+            <a:pPr indent="0" algn="l" fontAlgn="auto">
+              <a:lnSpc>
+                <a:spcPct val="150000"/>
+              </a:lnSpc>
+            </a:pPr>
             <a:r>
               <a:rPr sz="1200" b="0">
                 <a:solidFill>
@@ -12516,17 +12541,32 @@
                 </a:solidFill>
                 <a:latin typeface="Calibri"/>
               </a:rPr>
-              <a:t>•  Categories: ជី, ពូជ, ការងារ, ឧបករណ៍, លក់</a:t>
+              <a:t>•  Categories: </a:t>
+            </a:r>
+            <a:r>
+              <a:rPr sz="1200" b="0">
+                <a:solidFill>
+                  <a:srgbClr val="3A423D"/>
+                </a:solidFill>
+                <a:latin typeface="Khmer OS Siemreap" panose="02000500000000020004" charset="0"/>
+                <a:cs typeface="Khmer OS Siemreap" panose="02000500000000020004" charset="0"/>
+              </a:rPr>
+              <a:t>ជី, ពូជ, ការងារ, ឧបករណ៍, លក់</a:t>
             </a:r>
             <a:endParaRPr sz="1200" b="0">
               <a:solidFill>
                 <a:srgbClr val="3A423D"/>
               </a:solidFill>
-              <a:latin typeface="Calibri"/>
-            </a:endParaRPr>
-          </a:p>
-          <a:p>
-            <a:pPr algn="l"/>
+              <a:latin typeface="Khmer OS Siemreap" panose="02000500000000020004" charset="0"/>
+              <a:cs typeface="Khmer OS Siemreap" panose="02000500000000020004" charset="0"/>
+            </a:endParaRPr>
+          </a:p>
+          <a:p>
+            <a:pPr indent="0" algn="l" fontAlgn="auto">
+              <a:lnSpc>
+                <a:spcPct val="150000"/>
+              </a:lnSpc>
+            </a:pPr>
             <a:r>
               <a:rPr sz="1200" b="0">
                 <a:solidFill>
@@ -12544,7 +12584,11 @@
             </a:endParaRPr>
           </a:p>
           <a:p>
-            <a:pPr algn="l"/>
+            <a:pPr indent="0" algn="l" fontAlgn="auto">
+              <a:lnSpc>
+                <a:spcPct val="150000"/>
+              </a:lnSpc>
+            </a:pPr>
             <a:r>
               <a:rPr sz="1200" b="0">
                 <a:solidFill>
@@ -12562,7 +12606,11 @@
             </a:endParaRPr>
           </a:p>
           <a:p>
-            <a:pPr algn="l"/>
+            <a:pPr indent="0" algn="l" fontAlgn="auto">
+              <a:lnSpc>
+                <a:spcPct val="150000"/>
+              </a:lnSpc>
+            </a:pPr>
             <a:r>
               <a:rPr sz="1200" b="0">
                 <a:solidFill>
@@ -12748,72 +12796,6 @@
           </a:p>
         </p:txBody>
       </p:sp>
-      <p:sp>
-        <p:nvSpPr>
-          <p:cNvPr id="59" name="TextBox 10"/>
-          <p:cNvSpPr txBox="1"/>
-          <p:nvPr/>
-        </p:nvSpPr>
-        <p:spPr>
-          <a:xfrm>
-            <a:off x="584200" y="6614795"/>
-            <a:ext cx="2768600" cy="153670"/>
-          </a:xfrm>
-          <a:prstGeom prst="rect">
-            <a:avLst/>
-          </a:prstGeom>
-          <a:noFill/>
-        </p:spPr>
-        <p:txBody>
-          <a:bodyPr wrap="square" lIns="0" tIns="0" rIns="0" bIns="0" anchor="t">
-            <a:spAutoFit/>
-          </a:bodyPr>
-          <a:lstStyle/>
-          <a:p>
-            <a:pPr algn="l"/>
-            <a:r>
-              <a:rPr sz="1000" b="0">
-                <a:solidFill>
-                  <a:srgbClr val="B0B4B1"/>
-                </a:solidFill>
-                <a:latin typeface="Calibri"/>
-              </a:rPr>
-              <a:t>Presented by the SmartFarm team</a:t>
-            </a:r>
-            <a:endParaRPr sz="1000" b="0">
-              <a:solidFill>
-                <a:srgbClr val="B0B4B1"/>
-              </a:solidFill>
-              <a:latin typeface="Calibri"/>
-            </a:endParaRPr>
-          </a:p>
-        </p:txBody>
-      </p:sp>
-      <p:pic>
-        <p:nvPicPr>
-          <p:cNvPr id="62" name="Picture 61"/>
-          <p:cNvPicPr>
-            <a:picLocks noChangeAspect="1"/>
-          </p:cNvPicPr>
-          <p:nvPr/>
-        </p:nvPicPr>
-        <p:blipFill>
-          <a:blip r:embed="rId1"/>
-          <a:srcRect l="114738" t="1509" r="-114738" b="-1509"/>
-          <a:stretch>
-            <a:fillRect/>
-          </a:stretch>
-        </p:blipFill>
-        <p:spPr>
-          <a:xfrm>
-            <a:off x="4460240" y="0"/>
-            <a:ext cx="3270250" cy="6858000"/>
-          </a:xfrm>
-          <a:prstGeom prst="rect">
-            <a:avLst/>
-          </a:prstGeom>
-        </p:spPr>
-      </p:pic>
       <p:pic>
         <p:nvPicPr>
           <p:cNvPr id="63" name="Picture 62"/>
@@ -12838,6 +12820,49 @@
           </a:prstGeom>
         </p:spPr>
       </p:pic>
+      <p:sp>
+        <p:nvSpPr>
+          <p:cNvPr id="6" name="TextBox 19"/>
+          <p:cNvSpPr txBox="1"/>
+          <p:nvPr/>
+        </p:nvSpPr>
+        <p:spPr>
+          <a:xfrm>
+            <a:off x="594360" y="6582410"/>
+            <a:ext cx="5486400" cy="138430"/>
+          </a:xfrm>
+          <a:prstGeom prst="rect">
+            <a:avLst/>
+          </a:prstGeom>
+          <a:noFill/>
+        </p:spPr>
+        <p:txBody>
+          <a:bodyPr wrap="square" lIns="0" tIns="0" rIns="0" bIns="0" anchor="t">
+            <a:spAutoFit/>
+          </a:bodyPr>
+          <a:lstStyle/>
+          <a:p>
+            <a:pPr algn="l"/>
+            <a:r>
+              <a:rPr sz="900" b="0">
+                <a:solidFill>
+                  <a:srgbClr val="6B6E6A"/>
+                </a:solidFill>
+                <a:latin typeface="Khmer OS Siemreap" panose="02000500000000020004" charset="0"/>
+                <a:cs typeface="Khmer OS Siemreap" panose="02000500000000020004" charset="0"/>
+              </a:rPr>
+              <a:t>SmartFarm — កសិកម្មឆ្លាតវៃ ងាយស្រួល</a:t>
+            </a:r>
+            <a:endParaRPr sz="900" b="0">
+              <a:solidFill>
+                <a:srgbClr val="6B6E6A"/>
+              </a:solidFill>
+              <a:latin typeface="Khmer OS Siemreap" panose="02000500000000020004" charset="0"/>
+              <a:cs typeface="Khmer OS Siemreap" panose="02000500000000020004" charset="0"/>
+            </a:endParaRPr>
+          </a:p>
+        </p:txBody>
+      </p:sp>
     </p:spTree>
   </p:cSld>
   <p:clrMapOvr>
@@ -13307,8 +13332,8 @@
         </p:nvSpPr>
         <p:spPr>
           <a:xfrm>
-            <a:off x="3840480" y="3657600"/>
-            <a:ext cx="7772400" cy="2286000"/>
+            <a:off x="3840480" y="3540760"/>
+            <a:ext cx="7772400" cy="1846580"/>
           </a:xfrm>
           <a:prstGeom prst="rect">
             <a:avLst/>
@@ -13321,7 +13346,11 @@
           </a:bodyPr>
           <a:lstStyle/>
           <a:p>
-            <a:pPr algn="l"/>
+            <a:pPr indent="0" algn="l" fontAlgn="auto">
+              <a:lnSpc>
+                <a:spcPct val="200000"/>
+              </a:lnSpc>
+            </a:pPr>
             <a:r>
               <a:rPr sz="1200" b="0">
                 <a:solidFill>
@@ -13339,7 +13368,11 @@
             </a:endParaRPr>
           </a:p>
           <a:p>
-            <a:pPr algn="l"/>
+            <a:pPr indent="0" algn="l" fontAlgn="auto">
+              <a:lnSpc>
+                <a:spcPct val="200000"/>
+              </a:lnSpc>
+            </a:pPr>
             <a:r>
               <a:rPr sz="1200" b="0">
                 <a:solidFill>
@@ -13347,17 +13380,32 @@
                 </a:solidFill>
                 <a:latin typeface="Calibri"/>
               </a:rPr>
-              <a:t>•  Activity types: ដំណាំ (Plant) · ថែទាំ (Tend) · ការពារ (Protect) · ប្រមូល (Harvest)</a:t>
+              <a:t>•  Activity types: </a:t>
+            </a:r>
+            <a:r>
+              <a:rPr sz="1200" b="0">
+                <a:solidFill>
+                  <a:srgbClr val="3A423D"/>
+                </a:solidFill>
+                <a:latin typeface="Khmer OS Siemreap" panose="02000500000000020004" charset="0"/>
+                <a:cs typeface="Khmer OS Siemreap" panose="02000500000000020004" charset="0"/>
+              </a:rPr>
+              <a:t>ដំណាំ (Plant) · ថែទាំ (Tend) · ការពារ (Protect) · ប្រមូល (Harvest)</a:t>
             </a:r>
             <a:endParaRPr sz="1200" b="0">
               <a:solidFill>
                 <a:srgbClr val="3A423D"/>
               </a:solidFill>
-              <a:latin typeface="Calibri"/>
-            </a:endParaRPr>
-          </a:p>
-          <a:p>
-            <a:pPr algn="l"/>
+              <a:latin typeface="Khmer OS Siemreap" panose="02000500000000020004" charset="0"/>
+              <a:cs typeface="Khmer OS Siemreap" panose="02000500000000020004" charset="0"/>
+            </a:endParaRPr>
+          </a:p>
+          <a:p>
+            <a:pPr indent="0" algn="l" fontAlgn="auto">
+              <a:lnSpc>
+                <a:spcPct val="200000"/>
+              </a:lnSpc>
+            </a:pPr>
             <a:r>
               <a:rPr sz="1200" b="0">
                 <a:solidFill>
@@ -13375,7 +13423,11 @@
             </a:endParaRPr>
           </a:p>
           <a:p>
-            <a:pPr algn="l"/>
+            <a:pPr indent="0" algn="l" fontAlgn="auto">
+              <a:lnSpc>
+                <a:spcPct val="200000"/>
+              </a:lnSpc>
+            </a:pPr>
             <a:r>
               <a:rPr sz="1200" b="0">
                 <a:solidFill>
@@ -13393,7 +13445,11 @@
             </a:endParaRPr>
           </a:p>
           <a:p>
-            <a:pPr algn="l"/>
+            <a:pPr indent="0" algn="l" fontAlgn="auto">
+              <a:lnSpc>
+                <a:spcPct val="200000"/>
+              </a:lnSpc>
+            </a:pPr>
             <a:r>
               <a:rPr sz="1200" b="0">
                 <a:solidFill>
@@ -13579,47 +13635,6 @@
           </a:p>
         </p:txBody>
       </p:sp>
-      <p:sp>
-        <p:nvSpPr>
-          <p:cNvPr id="86" name="TextBox 10"/>
-          <p:cNvSpPr txBox="1"/>
-          <p:nvPr/>
-        </p:nvSpPr>
-        <p:spPr>
-          <a:xfrm>
-            <a:off x="594360" y="6355080"/>
-            <a:ext cx="2743200" cy="153670"/>
-          </a:xfrm>
-          <a:prstGeom prst="rect">
-            <a:avLst/>
-          </a:prstGeom>
-          <a:noFill/>
-        </p:spPr>
-        <p:txBody>
-          <a:bodyPr wrap="square" lIns="0" tIns="0" rIns="0" bIns="0" anchor="t">
-            <a:spAutoFit/>
-          </a:bodyPr>
-          <a:lstStyle/>
-          <a:p>
-            <a:pPr algn="l"/>
-            <a:r>
-              <a:rPr sz="1000" b="0">
-                <a:solidFill>
-                  <a:srgbClr val="B0B4B1"/>
-                </a:solidFill>
-                <a:latin typeface="Calibri"/>
-              </a:rPr>
-              <a:t>Presented by the SmartFarm team</a:t>
-            </a:r>
-            <a:endParaRPr sz="1000" b="0">
-              <a:solidFill>
-                <a:srgbClr val="B0B4B1"/>
-              </a:solidFill>
-              <a:latin typeface="Calibri"/>
-            </a:endParaRPr>
-          </a:p>
-        </p:txBody>
-      </p:sp>
       <p:pic>
         <p:nvPicPr>
           <p:cNvPr id="87" name="Picture 86"/>
@@ -13644,6 +13659,49 @@
           </a:prstGeom>
         </p:spPr>
       </p:pic>
+      <p:sp>
+        <p:nvSpPr>
+          <p:cNvPr id="52" name="TextBox 19"/>
+          <p:cNvSpPr txBox="1"/>
+          <p:nvPr/>
+        </p:nvSpPr>
+        <p:spPr>
+          <a:xfrm>
+            <a:off x="548640" y="6582410"/>
+            <a:ext cx="5486400" cy="138430"/>
+          </a:xfrm>
+          <a:prstGeom prst="rect">
+            <a:avLst/>
+          </a:prstGeom>
+          <a:noFill/>
+        </p:spPr>
+        <p:txBody>
+          <a:bodyPr wrap="square" lIns="0" tIns="0" rIns="0" bIns="0" anchor="t">
+            <a:spAutoFit/>
+          </a:bodyPr>
+          <a:lstStyle/>
+          <a:p>
+            <a:pPr algn="l"/>
+            <a:r>
+              <a:rPr sz="900" b="0">
+                <a:solidFill>
+                  <a:srgbClr val="6B6E6A"/>
+                </a:solidFill>
+                <a:latin typeface="Khmer OS Siemreap" panose="02000500000000020004" charset="0"/>
+                <a:cs typeface="Khmer OS Siemreap" panose="02000500000000020004" charset="0"/>
+              </a:rPr>
+              <a:t>SmartFarm — កសិកម្មឆ្លាតវៃ ងាយស្រួល</a:t>
+            </a:r>
+            <a:endParaRPr sz="900" b="0">
+              <a:solidFill>
+                <a:srgbClr val="6B6E6A"/>
+              </a:solidFill>
+              <a:latin typeface="Khmer OS Siemreap" panose="02000500000000020004" charset="0"/>
+              <a:cs typeface="Khmer OS Siemreap" panose="02000500000000020004" charset="0"/>
+            </a:endParaRPr>
+          </a:p>
+        </p:txBody>
+      </p:sp>
     </p:spTree>
   </p:cSld>
   <p:clrMapOvr>
@@ -13982,7 +14040,7 @@
         <p:spPr>
           <a:xfrm>
             <a:off x="3840480" y="3657600"/>
-            <a:ext cx="7772400" cy="2286000"/>
+            <a:ext cx="7772400" cy="1661795"/>
           </a:xfrm>
           <a:prstGeom prst="rect">
             <a:avLst/>
@@ -13995,7 +14053,11 @@
           </a:bodyPr>
           <a:lstStyle/>
           <a:p>
-            <a:pPr algn="l"/>
+            <a:pPr indent="0" algn="l" fontAlgn="auto">
+              <a:lnSpc>
+                <a:spcPct val="150000"/>
+              </a:lnSpc>
+            </a:pPr>
             <a:r>
               <a:rPr sz="1200" b="0">
                 <a:solidFill>
@@ -14013,7 +14075,11 @@
             </a:endParaRPr>
           </a:p>
           <a:p>
-            <a:pPr algn="l"/>
+            <a:pPr indent="0" algn="l" fontAlgn="auto">
+              <a:lnSpc>
+                <a:spcPct val="150000"/>
+              </a:lnSpc>
+            </a:pPr>
             <a:r>
               <a:rPr sz="1200" b="0">
                 <a:solidFill>
@@ -14031,7 +14097,11 @@
             </a:endParaRPr>
           </a:p>
           <a:p>
-            <a:pPr algn="l"/>
+            <a:pPr indent="0" algn="l" fontAlgn="auto">
+              <a:lnSpc>
+                <a:spcPct val="150000"/>
+              </a:lnSpc>
+            </a:pPr>
             <a:r>
               <a:rPr sz="1200" b="0">
                 <a:solidFill>
@@ -14039,17 +14109,32 @@
                 </a:solidFill>
                 <a:latin typeface="Calibri"/>
               </a:rPr>
-              <a:t>•  Category filter: សត្វល្អិត (Insects), ផ្សិត (Fungal), បាក់តេរី (Bacterial)</a:t>
+              <a:t>•  Category filter: </a:t>
+            </a:r>
+            <a:r>
+              <a:rPr sz="1200" b="0">
+                <a:solidFill>
+                  <a:srgbClr val="3A423D"/>
+                </a:solidFill>
+                <a:latin typeface="Khmer OS Siemreap" panose="02000500000000020004" charset="0"/>
+                <a:cs typeface="Khmer OS Siemreap" panose="02000500000000020004" charset="0"/>
+              </a:rPr>
+              <a:t>សត្វល្អិត (Insects), ផ្សិត (Fungal), បាក់តេរី (Bacterial)</a:t>
             </a:r>
             <a:endParaRPr sz="1200" b="0">
               <a:solidFill>
                 <a:srgbClr val="3A423D"/>
               </a:solidFill>
-              <a:latin typeface="Calibri"/>
-            </a:endParaRPr>
-          </a:p>
-          <a:p>
-            <a:pPr algn="l"/>
+              <a:latin typeface="Khmer OS Siemreap" panose="02000500000000020004" charset="0"/>
+              <a:cs typeface="Khmer OS Siemreap" panose="02000500000000020004" charset="0"/>
+            </a:endParaRPr>
+          </a:p>
+          <a:p>
+            <a:pPr indent="0" algn="l" fontAlgn="auto">
+              <a:lnSpc>
+                <a:spcPct val="150000"/>
+              </a:lnSpc>
+            </a:pPr>
             <a:r>
               <a:rPr sz="1200" b="0">
                 <a:solidFill>
@@ -14067,7 +14152,11 @@
             </a:endParaRPr>
           </a:p>
           <a:p>
-            <a:pPr algn="l"/>
+            <a:pPr indent="0" algn="l" fontAlgn="auto">
+              <a:lnSpc>
+                <a:spcPct val="150000"/>
+              </a:lnSpc>
+            </a:pPr>
             <a:r>
               <a:rPr sz="1200" b="0">
                 <a:solidFill>
@@ -14075,17 +14164,32 @@
                 </a:solidFill>
                 <a:latin typeface="Calibri"/>
               </a:rPr>
-              <a:t>      រោគសញ្ញា (Symptoms) · វិធីព្យាបាល (Treatment) · វិធីការពារ (Prevention)</a:t>
+              <a:t>      </a:t>
+            </a:r>
+            <a:r>
+              <a:rPr sz="1200" b="0">
+                <a:solidFill>
+                  <a:srgbClr val="3A423D"/>
+                </a:solidFill>
+                <a:latin typeface="Khmer OS Siemreap" panose="02000500000000020004" charset="0"/>
+                <a:cs typeface="Khmer OS Siemreap" panose="02000500000000020004" charset="0"/>
+              </a:rPr>
+              <a:t>រោគសញ្ញា (Symptoms) · វិធីព្យាបាល (Treatment) · វិធីការពារ (Prevention)</a:t>
             </a:r>
             <a:endParaRPr sz="1200" b="0">
               <a:solidFill>
                 <a:srgbClr val="3A423D"/>
               </a:solidFill>
-              <a:latin typeface="Calibri"/>
-            </a:endParaRPr>
-          </a:p>
-          <a:p>
-            <a:pPr algn="l"/>
+              <a:latin typeface="Khmer OS Siemreap" panose="02000500000000020004" charset="0"/>
+              <a:cs typeface="Khmer OS Siemreap" panose="02000500000000020004" charset="0"/>
+            </a:endParaRPr>
+          </a:p>
+          <a:p>
+            <a:pPr indent="0" algn="l" fontAlgn="auto">
+              <a:lnSpc>
+                <a:spcPct val="150000"/>
+              </a:lnSpc>
+            </a:pPr>
             <a:r>
               <a:rPr sz="1200" b="0">
                 <a:solidFill>
@@ -14297,14 +14401,14 @@
       </p:pic>
       <p:sp>
         <p:nvSpPr>
-          <p:cNvPr id="86" name="TextBox 10"/>
-          <p:cNvSpPr txBox="1"/>
-          <p:nvPr/>
-        </p:nvSpPr>
-        <p:spPr>
-          <a:xfrm>
-            <a:off x="594360" y="6355080"/>
-            <a:ext cx="2743200" cy="153670"/>
+          <p:cNvPr id="52" name="TextBox 19"/>
+          <p:cNvSpPr txBox="1"/>
+          <p:nvPr/>
+        </p:nvSpPr>
+        <p:spPr>
+          <a:xfrm>
+            <a:off x="548640" y="6582410"/>
+            <a:ext cx="5486400" cy="138430"/>
           </a:xfrm>
           <a:prstGeom prst="rect">
             <a:avLst/>
@@ -14319,19 +14423,21 @@
           <a:p>
             <a:pPr algn="l"/>
             <a:r>
-              <a:rPr sz="1000" b="0">
-                <a:solidFill>
-                  <a:srgbClr val="B0B4B1"/>
-                </a:solidFill>
-                <a:latin typeface="Calibri"/>
-              </a:rPr>
-              <a:t>Presented by the SmartFarm team</a:t>
-            </a:r>
-            <a:endParaRPr sz="1000" b="0">
-              <a:solidFill>
-                <a:srgbClr val="B0B4B1"/>
-              </a:solidFill>
-              <a:latin typeface="Calibri"/>
+              <a:rPr sz="900" b="0">
+                <a:solidFill>
+                  <a:srgbClr val="6B6E6A"/>
+                </a:solidFill>
+                <a:latin typeface="Khmer OS Siemreap" panose="02000500000000020004" charset="0"/>
+                <a:cs typeface="Khmer OS Siemreap" panose="02000500000000020004" charset="0"/>
+              </a:rPr>
+              <a:t>SmartFarm — កសិកម្មឆ្លាតវៃ ងាយស្រួល</a:t>
+            </a:r>
+            <a:endParaRPr sz="900" b="0">
+              <a:solidFill>
+                <a:srgbClr val="6B6E6A"/>
+              </a:solidFill>
+              <a:latin typeface="Khmer OS Siemreap" panose="02000500000000020004" charset="0"/>
+              <a:cs typeface="Khmer OS Siemreap" panose="02000500000000020004" charset="0"/>
             </a:endParaRPr>
           </a:p>
         </p:txBody>
@@ -14850,7 +14956,7 @@
         <p:spPr>
           <a:xfrm>
             <a:off x="3840480" y="3657600"/>
-            <a:ext cx="7772400" cy="2286000"/>
+            <a:ext cx="7772400" cy="1792605"/>
           </a:xfrm>
           <a:prstGeom prst="rect">
             <a:avLst/>
@@ -14859,11 +14965,15 @@
         </p:spPr>
         <p:txBody>
           <a:bodyPr wrap="square" lIns="0" tIns="0" rIns="0" bIns="0" anchor="t">
-            <a:spAutoFit/>
-          </a:bodyPr>
-          <a:lstStyle/>
-          <a:p>
-            <a:pPr algn="l"/>
+            <a:noAutofit/>
+          </a:bodyPr>
+          <a:lstStyle/>
+          <a:p>
+            <a:pPr indent="0" algn="l" fontAlgn="auto">
+              <a:lnSpc>
+                <a:spcPct val="150000"/>
+              </a:lnSpc>
+            </a:pPr>
             <a:r>
               <a:rPr sz="1200" b="0">
                 <a:solidFill>
@@ -14881,7 +14991,11 @@
             </a:endParaRPr>
           </a:p>
           <a:p>
-            <a:pPr algn="l"/>
+            <a:pPr indent="0" algn="l" fontAlgn="auto">
+              <a:lnSpc>
+                <a:spcPct val="150000"/>
+              </a:lnSpc>
+            </a:pPr>
             <a:r>
               <a:rPr sz="1200" b="0">
                 <a:solidFill>
@@ -14899,7 +15013,11 @@
             </a:endParaRPr>
           </a:p>
           <a:p>
-            <a:pPr algn="l"/>
+            <a:pPr indent="0" algn="l" fontAlgn="auto">
+              <a:lnSpc>
+                <a:spcPct val="150000"/>
+              </a:lnSpc>
+            </a:pPr>
             <a:r>
               <a:rPr sz="1200" b="0">
                 <a:solidFill>
@@ -14917,7 +15035,11 @@
             </a:endParaRPr>
           </a:p>
           <a:p>
-            <a:pPr algn="l"/>
+            <a:pPr indent="0" algn="l" fontAlgn="auto">
+              <a:lnSpc>
+                <a:spcPct val="150000"/>
+              </a:lnSpc>
+            </a:pPr>
             <a:r>
               <a:rPr sz="1200" b="0">
                 <a:solidFill>
@@ -14935,7 +15057,11 @@
             </a:endParaRPr>
           </a:p>
           <a:p>
-            <a:pPr algn="l"/>
+            <a:pPr indent="0" algn="l" fontAlgn="auto">
+              <a:lnSpc>
+                <a:spcPct val="150000"/>
+              </a:lnSpc>
+            </a:pPr>
             <a:r>
               <a:rPr sz="1200" b="0">
                 <a:solidFill>
@@ -14953,7 +15079,11 @@
             </a:endParaRPr>
           </a:p>
           <a:p>
-            <a:pPr algn="l"/>
+            <a:pPr indent="0" algn="l" fontAlgn="auto">
+              <a:lnSpc>
+                <a:spcPct val="150000"/>
+              </a:lnSpc>
+            </a:pPr>
             <a:r>
               <a:rPr sz="1200" b="0">
                 <a:solidFill>
@@ -15165,14 +15295,14 @@
       </p:pic>
       <p:sp>
         <p:nvSpPr>
-          <p:cNvPr id="86" name="TextBox 10"/>
-          <p:cNvSpPr txBox="1"/>
-          <p:nvPr/>
-        </p:nvSpPr>
-        <p:spPr>
-          <a:xfrm>
-            <a:off x="594360" y="6355080"/>
-            <a:ext cx="2743200" cy="153670"/>
+          <p:cNvPr id="6" name="TextBox 19"/>
+          <p:cNvSpPr txBox="1"/>
+          <p:nvPr/>
+        </p:nvSpPr>
+        <p:spPr>
+          <a:xfrm>
+            <a:off x="548640" y="6582410"/>
+            <a:ext cx="5486400" cy="138430"/>
           </a:xfrm>
           <a:prstGeom prst="rect">
             <a:avLst/>
@@ -15187,19 +15317,21 @@
           <a:p>
             <a:pPr algn="l"/>
             <a:r>
-              <a:rPr sz="1000" b="0">
-                <a:solidFill>
-                  <a:srgbClr val="B0B4B1"/>
-                </a:solidFill>
-                <a:latin typeface="Calibri"/>
-              </a:rPr>
-              <a:t>Presented by the SmartFarm team</a:t>
-            </a:r>
-            <a:endParaRPr sz="1000" b="0">
-              <a:solidFill>
-                <a:srgbClr val="B0B4B1"/>
-              </a:solidFill>
-              <a:latin typeface="Calibri"/>
+              <a:rPr sz="900" b="0">
+                <a:solidFill>
+                  <a:srgbClr val="6B6E6A"/>
+                </a:solidFill>
+                <a:latin typeface="Khmer OS Siemreap" panose="02000500000000020004" charset="0"/>
+                <a:cs typeface="Khmer OS Siemreap" panose="02000500000000020004" charset="0"/>
+              </a:rPr>
+              <a:t>SmartFarm — កសិកម្មឆ្លាតវៃ ងាយស្រួល</a:t>
+            </a:r>
+            <a:endParaRPr sz="900" b="0">
+              <a:solidFill>
+                <a:srgbClr val="6B6E6A"/>
+              </a:solidFill>
+              <a:latin typeface="Khmer OS Siemreap" panose="02000500000000020004" charset="0"/>
+              <a:cs typeface="Khmer OS Siemreap" panose="02000500000000020004" charset="0"/>
             </a:endParaRPr>
           </a:p>
         </p:txBody>
@@ -16377,14 +16509,14 @@
       </p:sp>
       <p:sp>
         <p:nvSpPr>
-          <p:cNvPr id="86" name="TextBox 10"/>
-          <p:cNvSpPr txBox="1"/>
-          <p:nvPr/>
-        </p:nvSpPr>
-        <p:spPr>
-          <a:xfrm>
-            <a:off x="594360" y="6355080"/>
-            <a:ext cx="2743200" cy="153670"/>
+          <p:cNvPr id="52" name="TextBox 19"/>
+          <p:cNvSpPr txBox="1"/>
+          <p:nvPr/>
+        </p:nvSpPr>
+        <p:spPr>
+          <a:xfrm>
+            <a:off x="548640" y="6582410"/>
+            <a:ext cx="5486400" cy="138430"/>
           </a:xfrm>
           <a:prstGeom prst="rect">
             <a:avLst/>
@@ -16399,19 +16531,21 @@
           <a:p>
             <a:pPr algn="l"/>
             <a:r>
-              <a:rPr sz="1000" b="0">
-                <a:solidFill>
-                  <a:srgbClr val="B0B4B1"/>
-                </a:solidFill>
-                <a:latin typeface="Calibri"/>
-              </a:rPr>
-              <a:t>Presented by the SmartFarm team</a:t>
-            </a:r>
-            <a:endParaRPr sz="1000" b="0">
-              <a:solidFill>
-                <a:srgbClr val="B0B4B1"/>
-              </a:solidFill>
-              <a:latin typeface="Calibri"/>
+              <a:rPr sz="900" b="0">
+                <a:solidFill>
+                  <a:srgbClr val="6B6E6A"/>
+                </a:solidFill>
+                <a:latin typeface="Khmer OS Siemreap" panose="02000500000000020004" charset="0"/>
+                <a:cs typeface="Khmer OS Siemreap" panose="02000500000000020004" charset="0"/>
+              </a:rPr>
+              <a:t>SmartFarm — កសិកម្មឆ្លាតវៃ ងាយស្រួល</a:t>
+            </a:r>
+            <a:endParaRPr sz="900" b="0">
+              <a:solidFill>
+                <a:srgbClr val="6B6E6A"/>
+              </a:solidFill>
+              <a:latin typeface="Khmer OS Siemreap" panose="02000500000000020004" charset="0"/>
+              <a:cs typeface="Khmer OS Siemreap" panose="02000500000000020004" charset="0"/>
             </a:endParaRPr>
           </a:p>
         </p:txBody>

--- a/SmartFarm-Pitch.pptx
+++ b/SmartFarm-Pitch.pptx
@@ -14,7 +14,6 @@
     <p:sldId id="259" r:id="rId7"/>
     <p:sldId id="260" r:id="rId8"/>
     <p:sldId id="261" r:id="rId9"/>
-    <p:sldId id="262" r:id="rId10"/>
     <p:sldId id="263" r:id="rId11"/>
     <p:sldId id="264" r:id="rId12"/>
     <p:sldId id="265" r:id="rId13"/>
@@ -4048,7 +4047,7 @@
                 </a:solidFill>
                 <a:latin typeface="Calibri"/>
               </a:rPr>
-              <a:t>Identify pests. All in Khmer. All offline.</a:t>
+              <a:t>All in Khmer. All offline.</a:t>
             </a:r>
             <a:endParaRPr sz="1400" b="0">
               <a:solidFill>
@@ -4126,7 +4125,7 @@
         </p:nvSpPr>
         <p:spPr>
           <a:xfrm>
-            <a:off x="-670560" y="0"/>
+            <a:off x="0" y="0"/>
             <a:ext cx="12191695" cy="6858000"/>
           </a:xfrm>
           <a:prstGeom prst="rect">
@@ -4236,7 +4235,7 @@
                 </a:solidFill>
                 <a:latin typeface="Calibri"/>
               </a:rPr>
-              <a:t>STATUS &amp; TECH STACK</a:t>
+              <a:t>THE OPPORTUNITY</a:t>
             </a:r>
             <a:endParaRPr sz="1100" b="1">
               <a:solidFill>
@@ -4277,7 +4276,7 @@
                 </a:solidFill>
                 <a:latin typeface="Calibri"/>
               </a:rPr>
-              <a:t>Working demo today, native iOS tomorrow</a:t>
+              <a:t>A real audience, a real product, a clear path</a:t>
             </a:r>
             <a:endParaRPr sz="2800" b="1">
               <a:solidFill>
@@ -4296,8 +4295,8 @@
         </p:nvSpPr>
         <p:spPr>
           <a:xfrm>
-            <a:off x="1907540" y="1390015"/>
-            <a:ext cx="3611880" cy="4206240"/>
+            <a:off x="640080" y="1645920"/>
+            <a:ext cx="3611880" cy="2194560"/>
           </a:xfrm>
           <a:prstGeom prst="roundRect">
             <a:avLst/>
@@ -4336,45 +4335,42 @@
       </p:sp>
       <p:sp>
         <p:nvSpPr>
-          <p:cNvPr id="7" name="Rectangle 6"/>
-          <p:cNvSpPr/>
-          <p:nvPr/>
-        </p:nvSpPr>
-        <p:spPr>
-          <a:xfrm>
-            <a:off x="1907540" y="1390015"/>
-            <a:ext cx="3611880" cy="502920"/>
-          </a:xfrm>
-          <a:prstGeom prst="rect">
-            <a:avLst/>
-          </a:prstGeom>
-          <a:solidFill>
-            <a:srgbClr val="2E6E43"/>
-          </a:solidFill>
-          <a:ln>
-            <a:noFill/>
-          </a:ln>
-          <a:effectLst/>
-        </p:spPr>
-        <p:style>
-          <a:lnRef idx="1">
-            <a:schemeClr val="accent1"/>
-          </a:lnRef>
-          <a:fillRef idx="3">
-            <a:schemeClr val="accent1"/>
-          </a:fillRef>
-          <a:effectRef idx="2">
-            <a:schemeClr val="accent1"/>
-          </a:effectRef>
-          <a:fontRef idx="minor">
-            <a:schemeClr val="lt1"/>
-          </a:fontRef>
-        </p:style>
-        <p:txBody>
-          <a:bodyPr rtlCol="0" anchor="ctr"/>
-          <a:lstStyle/>
-          <a:p>
-            <a:pPr algn="ctr"/>
+          <p:cNvPr id="7" name="TextBox 6"/>
+          <p:cNvSpPr txBox="1"/>
+          <p:nvPr/>
+        </p:nvSpPr>
+        <p:spPr>
+          <a:xfrm>
+            <a:off x="914400" y="1828800"/>
+            <a:ext cx="3611880" cy="457200"/>
+          </a:xfrm>
+          <a:prstGeom prst="rect">
+            <a:avLst/>
+          </a:prstGeom>
+          <a:noFill/>
+        </p:spPr>
+        <p:txBody>
+          <a:bodyPr wrap="square" lIns="0" tIns="0" rIns="0" bIns="0" anchor="t">
+            <a:spAutoFit/>
+          </a:bodyPr>
+          <a:lstStyle/>
+          <a:p>
+            <a:pPr algn="l"/>
+            <a:r>
+              <a:rPr sz="2200" b="1">
+                <a:solidFill>
+                  <a:srgbClr val="1F4D2E"/>
+                </a:solidFill>
+                <a:latin typeface="Calibri"/>
+              </a:rPr>
+              <a:t>Cambodia</a:t>
+            </a:r>
+            <a:endParaRPr sz="2200" b="1">
+              <a:solidFill>
+                <a:srgbClr val="1F4D2E"/>
+              </a:solidFill>
+              <a:latin typeface="Calibri"/>
+            </a:endParaRPr>
           </a:p>
         </p:txBody>
       </p:sp>
@@ -4386,7 +4382,7 @@
         </p:nvSpPr>
         <p:spPr>
           <a:xfrm>
-            <a:off x="1907540" y="1499743"/>
+            <a:off x="914400" y="2331720"/>
             <a:ext cx="3611880" cy="365760"/>
           </a:xfrm>
           <a:prstGeom prst="rect">
@@ -4400,19 +4396,19 @@
           </a:bodyPr>
           <a:lstStyle/>
           <a:p>
-            <a:pPr algn="ctr"/>
-            <a:r>
-              <a:rPr sz="1400" b="1">
-                <a:solidFill>
-                  <a:srgbClr val="FFFFFF"/>
-                </a:solidFill>
-                <a:latin typeface="Calibri"/>
-              </a:rPr>
-              <a:t>Today</a:t>
-            </a:r>
-            <a:endParaRPr sz="1400" b="1">
-              <a:solidFill>
-                <a:srgbClr val="FFFFFF"/>
+            <a:pPr algn="l"/>
+            <a:r>
+              <a:rPr sz="1200" b="1">
+                <a:solidFill>
+                  <a:srgbClr val="8B5A2B"/>
+                </a:solidFill>
+                <a:latin typeface="Calibri"/>
+              </a:rPr>
+              <a:t>agriculture-led economy</a:t>
+            </a:r>
+            <a:endParaRPr sz="1200" b="1">
+              <a:solidFill>
+                <a:srgbClr val="8B5A2B"/>
               </a:solidFill>
               <a:latin typeface="Calibri"/>
             </a:endParaRPr>
@@ -4427,8 +4423,8 @@
         </p:nvSpPr>
         <p:spPr>
           <a:xfrm>
-            <a:off x="2181860" y="2167255"/>
-            <a:ext cx="3154680" cy="3291840"/>
+            <a:off x="914400" y="2743200"/>
+            <a:ext cx="3154680" cy="1005840"/>
           </a:xfrm>
           <a:prstGeom prst="rect">
             <a:avLst/>
@@ -4445,15 +4441,15 @@
             <a:r>
               <a:rPr sz="1100" b="0">
                 <a:solidFill>
-                  <a:srgbClr val="3A423D"/>
-                </a:solidFill>
-                <a:latin typeface="Calibri"/>
-              </a:rPr>
-              <a:t>•  Working React + Vite demo</a:t>
+                  <a:srgbClr val="6B6E6A"/>
+                </a:solidFill>
+                <a:latin typeface="Calibri"/>
+              </a:rPr>
+              <a:t>Small farmers form the backbone of rural livelihoods.</a:t>
             </a:r>
             <a:endParaRPr sz="1100" b="0">
               <a:solidFill>
-                <a:srgbClr val="3A423D"/>
+                <a:srgbClr val="6B6E6A"/>
               </a:solidFill>
               <a:latin typeface="Calibri"/>
             </a:endParaRPr>
@@ -4463,51 +4459,15 @@
             <a:r>
               <a:rPr sz="1100" b="0">
                 <a:solidFill>
-                  <a:srgbClr val="3A423D"/>
-                </a:solidFill>
-                <a:latin typeface="Calibri"/>
-              </a:rPr>
-              <a:t>•  Khmer UI, KHR/USD, theme toggle</a:t>
+                  <a:srgbClr val="6B6E6A"/>
+                </a:solidFill>
+                <a:latin typeface="Calibri"/>
+              </a:rPr>
+              <a:t>Few have any digital tool today.</a:t>
             </a:r>
             <a:endParaRPr sz="1100" b="0">
               <a:solidFill>
-                <a:srgbClr val="3A423D"/>
-              </a:solidFill>
-              <a:latin typeface="Calibri"/>
-            </a:endParaRPr>
-          </a:p>
-          <a:p>
-            <a:pPr algn="l"/>
-            <a:r>
-              <a:rPr sz="1100" b="0">
-                <a:solidFill>
-                  <a:srgbClr val="3A423D"/>
-                </a:solidFill>
-                <a:latin typeface="Calibri"/>
-              </a:rPr>
-              <a:t>•  All four modules functional</a:t>
-            </a:r>
-            <a:endParaRPr sz="1100" b="0">
-              <a:solidFill>
-                <a:srgbClr val="3A423D"/>
-              </a:solidFill>
-              <a:latin typeface="Calibri"/>
-            </a:endParaRPr>
-          </a:p>
-          <a:p>
-            <a:pPr algn="l"/>
-            <a:r>
-              <a:rPr sz="1100" b="0">
-                <a:solidFill>
-                  <a:srgbClr val="3A423D"/>
-                </a:solidFill>
-                <a:latin typeface="Calibri"/>
-              </a:rPr>
-              <a:t>•  CSV export + JSON backup live</a:t>
-            </a:r>
-            <a:endParaRPr sz="1100" b="0">
-              <a:solidFill>
-                <a:srgbClr val="3A423D"/>
+                <a:srgbClr val="6B6E6A"/>
               </a:solidFill>
               <a:latin typeface="Calibri"/>
             </a:endParaRPr>
@@ -4522,8 +4482,8 @@
         </p:nvSpPr>
         <p:spPr>
           <a:xfrm>
-            <a:off x="6738620" y="1412875"/>
-            <a:ext cx="3611880" cy="4206240"/>
+            <a:off x="4389120" y="1645920"/>
+            <a:ext cx="3611880" cy="2194560"/>
           </a:xfrm>
           <a:prstGeom prst="roundRect">
             <a:avLst/>
@@ -4562,20 +4522,348 @@
       </p:sp>
       <p:sp>
         <p:nvSpPr>
-          <p:cNvPr id="11" name="Rectangle 10"/>
+          <p:cNvPr id="11" name="TextBox 10"/>
+          <p:cNvSpPr txBox="1"/>
+          <p:nvPr/>
+        </p:nvSpPr>
+        <p:spPr>
+          <a:xfrm>
+            <a:off x="4663440" y="1828800"/>
+            <a:ext cx="3611880" cy="457200"/>
+          </a:xfrm>
+          <a:prstGeom prst="rect">
+            <a:avLst/>
+          </a:prstGeom>
+          <a:noFill/>
+        </p:spPr>
+        <p:txBody>
+          <a:bodyPr wrap="square" lIns="0" tIns="0" rIns="0" bIns="0" anchor="t">
+            <a:spAutoFit/>
+          </a:bodyPr>
+          <a:lstStyle/>
+          <a:p>
+            <a:pPr algn="l"/>
+            <a:r>
+              <a:rPr sz="2200" b="1">
+                <a:solidFill>
+                  <a:srgbClr val="1F4D2E"/>
+                </a:solidFill>
+                <a:latin typeface="Calibri"/>
+              </a:rPr>
+              <a:t>Smartphones</a:t>
+            </a:r>
+            <a:endParaRPr sz="2200" b="1">
+              <a:solidFill>
+                <a:srgbClr val="1F4D2E"/>
+              </a:solidFill>
+              <a:latin typeface="Calibri"/>
+            </a:endParaRPr>
+          </a:p>
+        </p:txBody>
+      </p:sp>
+      <p:sp>
+        <p:nvSpPr>
+          <p:cNvPr id="12" name="TextBox 11"/>
+          <p:cNvSpPr txBox="1"/>
+          <p:nvPr/>
+        </p:nvSpPr>
+        <p:spPr>
+          <a:xfrm>
+            <a:off x="4663440" y="2331720"/>
+            <a:ext cx="3611880" cy="365760"/>
+          </a:xfrm>
+          <a:prstGeom prst="rect">
+            <a:avLst/>
+          </a:prstGeom>
+          <a:noFill/>
+        </p:spPr>
+        <p:txBody>
+          <a:bodyPr wrap="square" lIns="0" tIns="0" rIns="0" bIns="0" anchor="t">
+            <a:spAutoFit/>
+          </a:bodyPr>
+          <a:lstStyle/>
+          <a:p>
+            <a:pPr algn="l"/>
+            <a:r>
+              <a:rPr sz="1200" b="1">
+                <a:solidFill>
+                  <a:srgbClr val="8B5A2B"/>
+                </a:solidFill>
+                <a:latin typeface="Calibri"/>
+              </a:rPr>
+              <a:t>wide &amp; growing reach</a:t>
+            </a:r>
+            <a:endParaRPr sz="1200" b="1">
+              <a:solidFill>
+                <a:srgbClr val="8B5A2B"/>
+              </a:solidFill>
+              <a:latin typeface="Calibri"/>
+            </a:endParaRPr>
+          </a:p>
+        </p:txBody>
+      </p:sp>
+      <p:sp>
+        <p:nvSpPr>
+          <p:cNvPr id="13" name="TextBox 12"/>
+          <p:cNvSpPr txBox="1"/>
+          <p:nvPr/>
+        </p:nvSpPr>
+        <p:spPr>
+          <a:xfrm>
+            <a:off x="4663440" y="2743200"/>
+            <a:ext cx="3154680" cy="338455"/>
+          </a:xfrm>
+          <a:prstGeom prst="rect">
+            <a:avLst/>
+          </a:prstGeom>
+          <a:noFill/>
+        </p:spPr>
+        <p:txBody>
+          <a:bodyPr wrap="square" lIns="0" tIns="0" rIns="0" bIns="0" anchor="t">
+            <a:spAutoFit/>
+          </a:bodyPr>
+          <a:lstStyle/>
+          <a:p>
+            <a:pPr algn="l"/>
+            <a:r>
+              <a:rPr sz="1100" b="0">
+                <a:solidFill>
+                  <a:srgbClr val="6B6E6A"/>
+                </a:solidFill>
+                <a:latin typeface="Calibri"/>
+              </a:rPr>
+              <a:t>Entry-level older iPhones are common,</a:t>
+            </a:r>
+            <a:endParaRPr sz="1100" b="0">
+              <a:solidFill>
+                <a:srgbClr val="6B6E6A"/>
+              </a:solidFill>
+              <a:latin typeface="Calibri"/>
+            </a:endParaRPr>
+          </a:p>
+          <a:p>
+            <a:pPr algn="l"/>
+            <a:r>
+              <a:rPr sz="1100" b="0">
+                <a:solidFill>
+                  <a:srgbClr val="6B6E6A"/>
+                </a:solidFill>
+                <a:latin typeface="Calibri"/>
+              </a:rPr>
+              <a:t>even in rural districts.</a:t>
+            </a:r>
+            <a:endParaRPr sz="1100" b="0">
+              <a:solidFill>
+                <a:srgbClr val="6B6E6A"/>
+              </a:solidFill>
+              <a:latin typeface="Calibri"/>
+            </a:endParaRPr>
+          </a:p>
+        </p:txBody>
+      </p:sp>
+      <p:sp>
+        <p:nvSpPr>
+          <p:cNvPr id="14" name="Rounded Rectangle 13"/>
           <p:cNvSpPr/>
           <p:nvPr/>
         </p:nvSpPr>
         <p:spPr>
           <a:xfrm>
-            <a:off x="6738620" y="1390015"/>
-            <a:ext cx="3611880" cy="502920"/>
-          </a:xfrm>
-          <a:prstGeom prst="rect">
+            <a:off x="8138160" y="1645920"/>
+            <a:ext cx="3611880" cy="2194560"/>
+          </a:xfrm>
+          <a:prstGeom prst="roundRect">
             <a:avLst/>
           </a:prstGeom>
           <a:solidFill>
-            <a:srgbClr val="8B5A2B"/>
+            <a:srgbClr val="FFFFFF"/>
+          </a:solidFill>
+          <a:ln w="9525">
+            <a:solidFill>
+              <a:srgbClr val="D8DBD9"/>
+            </a:solidFill>
+          </a:ln>
+          <a:effectLst/>
+        </p:spPr>
+        <p:style>
+          <a:lnRef idx="1">
+            <a:schemeClr val="accent1"/>
+          </a:lnRef>
+          <a:fillRef idx="3">
+            <a:schemeClr val="accent1"/>
+          </a:fillRef>
+          <a:effectRef idx="2">
+            <a:schemeClr val="accent1"/>
+          </a:effectRef>
+          <a:fontRef idx="minor">
+            <a:schemeClr val="lt1"/>
+          </a:fontRef>
+        </p:style>
+        <p:txBody>
+          <a:bodyPr rtlCol="0" anchor="ctr"/>
+          <a:lstStyle/>
+          <a:p>
+            <a:pPr algn="ctr"/>
+          </a:p>
+        </p:txBody>
+      </p:sp>
+      <p:sp>
+        <p:nvSpPr>
+          <p:cNvPr id="15" name="TextBox 14"/>
+          <p:cNvSpPr txBox="1"/>
+          <p:nvPr/>
+        </p:nvSpPr>
+        <p:spPr>
+          <a:xfrm>
+            <a:off x="8412480" y="1828800"/>
+            <a:ext cx="3611880" cy="457200"/>
+          </a:xfrm>
+          <a:prstGeom prst="rect">
+            <a:avLst/>
+          </a:prstGeom>
+          <a:noFill/>
+        </p:spPr>
+        <p:txBody>
+          <a:bodyPr wrap="square" lIns="0" tIns="0" rIns="0" bIns="0" anchor="t">
+            <a:spAutoFit/>
+          </a:bodyPr>
+          <a:lstStyle/>
+          <a:p>
+            <a:pPr algn="l"/>
+            <a:r>
+              <a:rPr sz="2200" b="1">
+                <a:solidFill>
+                  <a:srgbClr val="1F4D2E"/>
+                </a:solidFill>
+                <a:latin typeface="Calibri"/>
+              </a:rPr>
+              <a:t>Connectivity</a:t>
+            </a:r>
+            <a:endParaRPr sz="2200" b="1">
+              <a:solidFill>
+                <a:srgbClr val="1F4D2E"/>
+              </a:solidFill>
+              <a:latin typeface="Calibri"/>
+            </a:endParaRPr>
+          </a:p>
+        </p:txBody>
+      </p:sp>
+      <p:sp>
+        <p:nvSpPr>
+          <p:cNvPr id="16" name="TextBox 15"/>
+          <p:cNvSpPr txBox="1"/>
+          <p:nvPr/>
+        </p:nvSpPr>
+        <p:spPr>
+          <a:xfrm>
+            <a:off x="8412480" y="2331720"/>
+            <a:ext cx="3611880" cy="365760"/>
+          </a:xfrm>
+          <a:prstGeom prst="rect">
+            <a:avLst/>
+          </a:prstGeom>
+          <a:noFill/>
+        </p:spPr>
+        <p:txBody>
+          <a:bodyPr wrap="square" lIns="0" tIns="0" rIns="0" bIns="0" anchor="t">
+            <a:spAutoFit/>
+          </a:bodyPr>
+          <a:lstStyle/>
+          <a:p>
+            <a:pPr algn="l"/>
+            <a:r>
+              <a:rPr sz="1200" b="1">
+                <a:solidFill>
+                  <a:srgbClr val="8B5A2B"/>
+                </a:solidFill>
+                <a:latin typeface="Calibri"/>
+              </a:rPr>
+              <a:t>still the blocker</a:t>
+            </a:r>
+            <a:endParaRPr sz="1200" b="1">
+              <a:solidFill>
+                <a:srgbClr val="8B5A2B"/>
+              </a:solidFill>
+              <a:latin typeface="Calibri"/>
+            </a:endParaRPr>
+          </a:p>
+        </p:txBody>
+      </p:sp>
+      <p:sp>
+        <p:nvSpPr>
+          <p:cNvPr id="17" name="TextBox 16"/>
+          <p:cNvSpPr txBox="1"/>
+          <p:nvPr/>
+        </p:nvSpPr>
+        <p:spPr>
+          <a:xfrm>
+            <a:off x="8412480" y="2743200"/>
+            <a:ext cx="3154680" cy="1005840"/>
+          </a:xfrm>
+          <a:prstGeom prst="rect">
+            <a:avLst/>
+          </a:prstGeom>
+          <a:noFill/>
+        </p:spPr>
+        <p:txBody>
+          <a:bodyPr wrap="square" lIns="0" tIns="0" rIns="0" bIns="0" anchor="t">
+            <a:spAutoFit/>
+          </a:bodyPr>
+          <a:lstStyle/>
+          <a:p>
+            <a:pPr algn="l"/>
+            <a:r>
+              <a:rPr sz="1100" b="0">
+                <a:solidFill>
+                  <a:srgbClr val="6B6E6A"/>
+                </a:solidFill>
+                <a:latin typeface="Calibri"/>
+              </a:rPr>
+              <a:t>Network coverage is uneven; data is costly.</a:t>
+            </a:r>
+            <a:endParaRPr sz="1100" b="0">
+              <a:solidFill>
+                <a:srgbClr val="6B6E6A"/>
+              </a:solidFill>
+              <a:latin typeface="Calibri"/>
+            </a:endParaRPr>
+          </a:p>
+          <a:p>
+            <a:pPr algn="l"/>
+            <a:r>
+              <a:rPr sz="1100" b="0">
+                <a:solidFill>
+                  <a:srgbClr val="6B6E6A"/>
+                </a:solidFill>
+                <a:latin typeface="Calibri"/>
+              </a:rPr>
+              <a:t>Offline-first is the unlock.</a:t>
+            </a:r>
+            <a:endParaRPr sz="1100" b="0">
+              <a:solidFill>
+                <a:srgbClr val="6B6E6A"/>
+              </a:solidFill>
+              <a:latin typeface="Calibri"/>
+            </a:endParaRPr>
+          </a:p>
+        </p:txBody>
+      </p:sp>
+      <p:sp>
+        <p:nvSpPr>
+          <p:cNvPr id="18" name="Rounded Rectangle 17"/>
+          <p:cNvSpPr/>
+          <p:nvPr/>
+        </p:nvSpPr>
+        <p:spPr>
+          <a:xfrm>
+            <a:off x="640080" y="4206240"/>
+            <a:ext cx="10881360" cy="1828800"/>
+          </a:xfrm>
+          <a:prstGeom prst="roundRect">
+            <a:avLst/>
+          </a:prstGeom>
+          <a:solidFill>
+            <a:srgbClr val="E8F3EB"/>
           </a:solidFill>
           <a:ln>
             <a:noFill/>
@@ -4606,14 +4894,14 @@
       </p:sp>
       <p:sp>
         <p:nvSpPr>
-          <p:cNvPr id="12" name="TextBox 11"/>
+          <p:cNvPr id="19" name="TextBox 18"/>
           <p:cNvSpPr txBox="1"/>
           <p:nvPr/>
         </p:nvSpPr>
         <p:spPr>
           <a:xfrm>
-            <a:off x="6738620" y="1499743"/>
-            <a:ext cx="3611880" cy="365760"/>
+            <a:off x="868680" y="4389120"/>
+            <a:ext cx="10515600" cy="365760"/>
           </a:xfrm>
           <a:prstGeom prst="rect">
             <a:avLst/>
@@ -4626,35 +4914,35 @@
           </a:bodyPr>
           <a:lstStyle/>
           <a:p>
-            <a:pPr algn="ctr"/>
-            <a:r>
-              <a:rPr sz="1400" b="1">
-                <a:solidFill>
-                  <a:srgbClr val="FFFFFF"/>
-                </a:solidFill>
-                <a:latin typeface="Calibri"/>
-              </a:rPr>
-              <a:t>Next 3 months</a:t>
-            </a:r>
-            <a:endParaRPr sz="1400" b="1">
-              <a:solidFill>
-                <a:srgbClr val="FFFFFF"/>
-              </a:solidFill>
-              <a:latin typeface="Calibri"/>
-            </a:endParaRPr>
-          </a:p>
-        </p:txBody>
-      </p:sp>
-      <p:sp>
-        <p:nvSpPr>
-          <p:cNvPr id="13" name="TextBox 12"/>
+            <a:pPr algn="l"/>
+            <a:r>
+              <a:rPr sz="1200" b="1">
+                <a:solidFill>
+                  <a:srgbClr val="1F4D2E"/>
+                </a:solidFill>
+                <a:latin typeface="Calibri"/>
+              </a:rPr>
+              <a:t>What we have right now</a:t>
+            </a:r>
+            <a:endParaRPr sz="1200" b="1">
+              <a:solidFill>
+                <a:srgbClr val="1F4D2E"/>
+              </a:solidFill>
+              <a:latin typeface="Calibri"/>
+            </a:endParaRPr>
+          </a:p>
+        </p:txBody>
+      </p:sp>
+      <p:sp>
+        <p:nvSpPr>
+          <p:cNvPr id="20" name="TextBox 19"/>
           <p:cNvSpPr txBox="1"/>
           <p:nvPr/>
         </p:nvSpPr>
         <p:spPr>
           <a:xfrm>
-            <a:off x="7012940" y="2167255"/>
-            <a:ext cx="3154680" cy="845820"/>
+            <a:off x="868680" y="4754880"/>
+            <a:ext cx="10515600" cy="1107440"/>
           </a:xfrm>
           <a:prstGeom prst="rect">
             <a:avLst/>
@@ -4667,17 +4955,21 @@
           </a:bodyPr>
           <a:lstStyle/>
           <a:p>
-            <a:pPr algn="l"/>
-            <a:r>
-              <a:rPr sz="1100" b="0">
+            <a:pPr indent="0" algn="l" fontAlgn="auto">
+              <a:lnSpc>
+                <a:spcPct val="200000"/>
+              </a:lnSpc>
+            </a:pPr>
+            <a:r>
+              <a:rPr sz="1200" b="0">
                 <a:solidFill>
                   <a:srgbClr val="3A423D"/>
                 </a:solidFill>
                 <a:latin typeface="Calibri"/>
               </a:rPr>
-              <a:t>•  Native iOS port (Swift / SwiftUI)</a:t>
-            </a:r>
-            <a:endParaRPr sz="1100" b="0">
+              <a:t>•  A working app, not a deck — every feature on the previous slides is built and runs offline today.</a:t>
+            </a:r>
+            <a:endParaRPr sz="1200" b="0">
               <a:solidFill>
                 <a:srgbClr val="3A423D"/>
               </a:solidFill>
@@ -4685,17 +4977,21 @@
             </a:endParaRPr>
           </a:p>
           <a:p>
-            <a:pPr algn="l"/>
-            <a:r>
-              <a:rPr sz="1100" b="0">
+            <a:pPr indent="0" algn="l" fontAlgn="auto">
+              <a:lnSpc>
+                <a:spcPct val="200000"/>
+              </a:lnSpc>
+            </a:pPr>
+            <a:r>
+              <a:rPr sz="1200" b="0">
                 <a:solidFill>
                   <a:srgbClr val="3A423D"/>
                 </a:solidFill>
                 <a:latin typeface="Calibri"/>
               </a:rPr>
-              <a:t>•  iOS 13+ deployment target</a:t>
-            </a:r>
-            <a:endParaRPr sz="1100" b="0">
+              <a:t>•  Khmer UX validated against the real domain (categories, activity types).</a:t>
+            </a:r>
+            <a:endParaRPr sz="1200" b="0">
               <a:solidFill>
                 <a:srgbClr val="3A423D"/>
               </a:solidFill>
@@ -4703,136 +4999,39 @@
             </a:endParaRPr>
           </a:p>
           <a:p>
-            <a:pPr algn="l"/>
-            <a:r>
-              <a:rPr sz="1100">
+            <a:pPr indent="0" algn="l" fontAlgn="auto">
+              <a:lnSpc>
+                <a:spcPct val="200000"/>
+              </a:lnSpc>
+            </a:pPr>
+            <a:r>
+              <a:rPr sz="1200" b="0">
                 <a:solidFill>
                   <a:srgbClr val="3A423D"/>
                 </a:solidFill>
                 <a:latin typeface="Calibri"/>
-                <a:sym typeface="+mn-ea"/>
-              </a:rPr>
-              <a:t>•  </a:t>
-            </a:r>
-            <a:r>
-              <a:rPr lang="en-US" sz="1100">
-                <a:solidFill>
-                  <a:srgbClr val="3A423D"/>
-                </a:solidFill>
-                <a:latin typeface="Calibri"/>
-                <a:sym typeface="+mn-ea"/>
-              </a:rPr>
-              <a:t>P</a:t>
-            </a:r>
-            <a:r>
-              <a:rPr sz="1100">
-                <a:solidFill>
-                  <a:srgbClr val="3A423D"/>
-                </a:solidFill>
-                <a:latin typeface="Calibri"/>
-                <a:sym typeface="+mn-ea"/>
-              </a:rPr>
-              <a:t>hoto-based pest detail (30–50 entries)</a:t>
-            </a:r>
-            <a:endParaRPr sz="1100" b="0">
+              </a:rPr>
+              <a:t>•  A clear, conservative roadmap to a native iOS app supporting devices farmers actually own.</a:t>
+            </a:r>
+            <a:endParaRPr sz="1200" b="0">
               <a:solidFill>
                 <a:srgbClr val="3A423D"/>
               </a:solidFill>
               <a:latin typeface="Calibri"/>
             </a:endParaRPr>
           </a:p>
-          <a:p>
-            <a:pPr algn="l"/>
-            <a:r>
-              <a:rPr sz="1100" b="0">
-                <a:solidFill>
-                  <a:srgbClr val="3A423D"/>
-                </a:solidFill>
-                <a:latin typeface="Calibri"/>
-              </a:rPr>
-              <a:t>•  CoreData persistence</a:t>
-            </a:r>
-            <a:endParaRPr sz="1100" b="0">
-              <a:solidFill>
-                <a:srgbClr val="3A423D"/>
-              </a:solidFill>
-              <a:latin typeface="Calibri"/>
-            </a:endParaRPr>
-          </a:p>
-          <a:p>
-            <a:pPr algn="l"/>
-            <a:r>
-              <a:rPr sz="1100" b="0">
-                <a:solidFill>
-                  <a:srgbClr val="3A423D"/>
-                </a:solidFill>
-                <a:latin typeface="Calibri"/>
-              </a:rPr>
-              <a:t>•  Local notifications for activities</a:t>
-            </a:r>
-            <a:endParaRPr sz="1100" b="0">
-              <a:solidFill>
-                <a:srgbClr val="3A423D"/>
-              </a:solidFill>
-              <a:latin typeface="Calibri"/>
-            </a:endParaRPr>
-          </a:p>
-        </p:txBody>
-      </p:sp>
-      <p:sp>
-        <p:nvSpPr>
-          <p:cNvPr id="18" name="Rounded Rectangle 17"/>
-          <p:cNvSpPr/>
-          <p:nvPr/>
-        </p:nvSpPr>
-        <p:spPr>
-          <a:xfrm>
-            <a:off x="640080" y="5943600"/>
-            <a:ext cx="10881360" cy="457200"/>
-          </a:xfrm>
-          <a:prstGeom prst="roundRect">
-            <a:avLst/>
-          </a:prstGeom>
-          <a:solidFill>
-            <a:srgbClr val="EEF0EE"/>
-          </a:solidFill>
-          <a:ln>
-            <a:noFill/>
-          </a:ln>
-          <a:effectLst/>
-        </p:spPr>
-        <p:style>
-          <a:lnRef idx="1">
-            <a:schemeClr val="accent1"/>
-          </a:lnRef>
-          <a:fillRef idx="3">
-            <a:schemeClr val="accent1"/>
-          </a:fillRef>
-          <a:effectRef idx="2">
-            <a:schemeClr val="accent1"/>
-          </a:effectRef>
-          <a:fontRef idx="minor">
-            <a:schemeClr val="lt1"/>
-          </a:fontRef>
-        </p:style>
-        <p:txBody>
-          <a:bodyPr rtlCol="0" anchor="ctr"/>
-          <a:lstStyle/>
-          <a:p>
-            <a:pPr algn="ctr"/>
-          </a:p>
-        </p:txBody>
-      </p:sp>
-      <p:sp>
-        <p:nvSpPr>
-          <p:cNvPr id="19" name="TextBox 18"/>
+        </p:txBody>
+      </p:sp>
+      <p:sp>
+        <p:nvSpPr>
+          <p:cNvPr id="22" name="TextBox 21"/>
           <p:cNvSpPr txBox="1"/>
           <p:nvPr/>
         </p:nvSpPr>
         <p:spPr>
           <a:xfrm>
-            <a:off x="640080" y="5989320"/>
-            <a:ext cx="10881360" cy="365760"/>
+            <a:off x="10698480" y="6446520"/>
+            <a:ext cx="1005840" cy="274320"/>
           </a:xfrm>
           <a:prstGeom prst="rect">
             <a:avLst/>
@@ -4845,34 +5044,34 @@
           </a:bodyPr>
           <a:lstStyle/>
           <a:p>
-            <a:pPr algn="ctr"/>
-            <a:r>
-              <a:rPr sz="1100" b="1">
-                <a:solidFill>
-                  <a:srgbClr val="3A423D"/>
-                </a:solidFill>
-                <a:latin typeface="Calibri"/>
-              </a:rPr>
-              <a:t>Stack:  React 18  ·  Vite  ·  localStorage   →   SwiftUI  ·  CoreData  ·  iOS 13+</a:t>
-            </a:r>
-            <a:endParaRPr sz="1100" b="1">
-              <a:solidFill>
-                <a:srgbClr val="3A423D"/>
-              </a:solidFill>
-              <a:latin typeface="Calibri"/>
-            </a:endParaRPr>
-          </a:p>
-        </p:txBody>
-      </p:sp>
-      <p:sp>
-        <p:nvSpPr>
-          <p:cNvPr id="20" name="TextBox 19"/>
+            <a:pPr algn="r"/>
+            <a:r>
+              <a:rPr sz="900" b="0">
+                <a:solidFill>
+                  <a:srgbClr val="6B6E6A"/>
+                </a:solidFill>
+                <a:latin typeface="Calibri"/>
+              </a:rPr>
+              <a:t>10 / 15</a:t>
+            </a:r>
+            <a:endParaRPr sz="900" b="0">
+              <a:solidFill>
+                <a:srgbClr val="6B6E6A"/>
+              </a:solidFill>
+              <a:latin typeface="Calibri"/>
+            </a:endParaRPr>
+          </a:p>
+        </p:txBody>
+      </p:sp>
+      <p:sp>
+        <p:nvSpPr>
+          <p:cNvPr id="52" name="TextBox 19"/>
           <p:cNvSpPr txBox="1"/>
           <p:nvPr/>
         </p:nvSpPr>
         <p:spPr>
           <a:xfrm>
-            <a:off x="548640" y="6446520"/>
+            <a:off x="548640" y="6582410"/>
             <a:ext cx="5486400" cy="138430"/>
           </a:xfrm>
           <a:prstGeom prst="rect">
@@ -4903,47 +5102,6 @@
               </a:solidFill>
               <a:latin typeface="Khmer OS Siemreap" panose="02000500000000020004" charset="0"/>
               <a:cs typeface="Khmer OS Siemreap" panose="02000500000000020004" charset="0"/>
-            </a:endParaRPr>
-          </a:p>
-        </p:txBody>
-      </p:sp>
-      <p:sp>
-        <p:nvSpPr>
-          <p:cNvPr id="21" name="TextBox 20"/>
-          <p:cNvSpPr txBox="1"/>
-          <p:nvPr/>
-        </p:nvSpPr>
-        <p:spPr>
-          <a:xfrm>
-            <a:off x="10698480" y="6446520"/>
-            <a:ext cx="1005840" cy="274320"/>
-          </a:xfrm>
-          <a:prstGeom prst="rect">
-            <a:avLst/>
-          </a:prstGeom>
-          <a:noFill/>
-        </p:spPr>
-        <p:txBody>
-          <a:bodyPr wrap="square" lIns="0" tIns="0" rIns="0" bIns="0" anchor="t">
-            <a:spAutoFit/>
-          </a:bodyPr>
-          <a:lstStyle/>
-          <a:p>
-            <a:pPr algn="r"/>
-            <a:r>
-              <a:rPr sz="900" b="0">
-                <a:solidFill>
-                  <a:srgbClr val="6B6E6A"/>
-                </a:solidFill>
-                <a:latin typeface="Calibri"/>
-              </a:rPr>
-              <a:t>10 / 16</a:t>
-            </a:r>
-            <a:endParaRPr sz="900" b="0">
-              <a:solidFill>
-                <a:srgbClr val="6B6E6A"/>
-              </a:solidFill>
-              <a:latin typeface="Calibri"/>
             </a:endParaRPr>
           </a:p>
         </p:txBody>
@@ -5084,7 +5242,7 @@
                 </a:solidFill>
                 <a:latin typeface="Calibri"/>
               </a:rPr>
-              <a:t>THE OPPORTUNITY</a:t>
+              <a:t>COMPETITIVE LANDSCAPE</a:t>
             </a:r>
             <a:endParaRPr sz="1100" b="1">
               <a:solidFill>
@@ -5125,7 +5283,7 @@
                 </a:solidFill>
                 <a:latin typeface="Calibri"/>
               </a:rPr>
-              <a:t>A real audience, a real product, a clear path</a:t>
+              <a:t>Why farmers will pick SmartFarm over what they have today</a:t>
             </a:r>
             <a:endParaRPr sz="2800" b="1">
               <a:solidFill>
@@ -5138,47 +5296,42 @@
       </p:sp>
       <p:sp>
         <p:nvSpPr>
-          <p:cNvPr id="6" name="Rounded Rectangle 5"/>
-          <p:cNvSpPr/>
-          <p:nvPr/>
-        </p:nvSpPr>
-        <p:spPr>
-          <a:xfrm>
-            <a:off x="640080" y="1645920"/>
-            <a:ext cx="3611880" cy="2194560"/>
-          </a:xfrm>
-          <a:prstGeom prst="roundRect">
-            <a:avLst/>
-          </a:prstGeom>
-          <a:solidFill>
-            <a:srgbClr val="FFFFFF"/>
-          </a:solidFill>
-          <a:ln w="9525">
-            <a:solidFill>
-              <a:srgbClr val="D8DBD9"/>
-            </a:solidFill>
-          </a:ln>
-          <a:effectLst/>
-        </p:spPr>
-        <p:style>
-          <a:lnRef idx="1">
-            <a:schemeClr val="accent1"/>
-          </a:lnRef>
-          <a:fillRef idx="3">
-            <a:schemeClr val="accent1"/>
-          </a:fillRef>
-          <a:effectRef idx="2">
-            <a:schemeClr val="accent1"/>
-          </a:effectRef>
-          <a:fontRef idx="minor">
-            <a:schemeClr val="lt1"/>
-          </a:fontRef>
-        </p:style>
-        <p:txBody>
-          <a:bodyPr rtlCol="0" anchor="ctr"/>
-          <a:lstStyle/>
-          <a:p>
-            <a:pPr algn="ctr"/>
+          <p:cNvPr id="6" name="TextBox 5"/>
+          <p:cNvSpPr txBox="1"/>
+          <p:nvPr/>
+        </p:nvSpPr>
+        <p:spPr>
+          <a:xfrm>
+            <a:off x="640080" y="1554480"/>
+            <a:ext cx="3657600" cy="411480"/>
+          </a:xfrm>
+          <a:prstGeom prst="rect">
+            <a:avLst/>
+          </a:prstGeom>
+          <a:noFill/>
+        </p:spPr>
+        <p:txBody>
+          <a:bodyPr wrap="square" lIns="0" tIns="0" rIns="0" bIns="0" anchor="ctr">
+            <a:spAutoFit/>
+          </a:bodyPr>
+          <a:lstStyle/>
+          <a:p>
+            <a:pPr algn="l"/>
+            <a:r>
+              <a:rPr sz="1100" b="1">
+                <a:solidFill>
+                  <a:srgbClr val="3A423D"/>
+                </a:solidFill>
+                <a:latin typeface="Calibri"/>
+              </a:rPr>
+              <a:t>Feature</a:t>
+            </a:r>
+            <a:endParaRPr sz="1100" b="1">
+              <a:solidFill>
+                <a:srgbClr val="3A423D"/>
+              </a:solidFill>
+              <a:latin typeface="Calibri"/>
+            </a:endParaRPr>
           </a:p>
         </p:txBody>
       </p:sp>
@@ -5190,8 +5343,8 @@
         </p:nvSpPr>
         <p:spPr>
           <a:xfrm>
-            <a:off x="914400" y="1828800"/>
-            <a:ext cx="3611880" cy="457200"/>
+            <a:off x="4297680" y="1591056"/>
+            <a:ext cx="2331720" cy="201168"/>
           </a:xfrm>
           <a:prstGeom prst="rect">
             <a:avLst/>
@@ -5204,19 +5357,19 @@
           </a:bodyPr>
           <a:lstStyle/>
           <a:p>
-            <a:pPr algn="l"/>
-            <a:r>
-              <a:rPr sz="2200" b="1">
-                <a:solidFill>
-                  <a:srgbClr val="1F4D2E"/>
-                </a:solidFill>
-                <a:latin typeface="Calibri"/>
-              </a:rPr>
-              <a:t>Cambodia</a:t>
-            </a:r>
-            <a:endParaRPr sz="2200" b="1">
-              <a:solidFill>
-                <a:srgbClr val="1F4D2E"/>
+            <a:pPr algn="ctr"/>
+            <a:r>
+              <a:rPr sz="1100" b="1">
+                <a:solidFill>
+                  <a:srgbClr val="6B6E6A"/>
+                </a:solidFill>
+                <a:latin typeface="Calibri"/>
+              </a:rPr>
+              <a:t>Paper notebook</a:t>
+            </a:r>
+            <a:endParaRPr sz="1100" b="1">
+              <a:solidFill>
+                <a:srgbClr val="6B6E6A"/>
               </a:solidFill>
               <a:latin typeface="Calibri"/>
             </a:endParaRPr>
@@ -5231,8 +5384,8 @@
         </p:nvSpPr>
         <p:spPr>
           <a:xfrm>
-            <a:off x="914400" y="2331720"/>
-            <a:ext cx="3611880" cy="365760"/>
+            <a:off x="4297680" y="1773936"/>
+            <a:ext cx="2331720" cy="164592"/>
           </a:xfrm>
           <a:prstGeom prst="rect">
             <a:avLst/>
@@ -5245,19 +5398,19 @@
           </a:bodyPr>
           <a:lstStyle/>
           <a:p>
-            <a:pPr algn="l"/>
-            <a:r>
-              <a:rPr sz="1200" b="1">
-                <a:solidFill>
-                  <a:srgbClr val="8B5A2B"/>
-                </a:solidFill>
-                <a:latin typeface="Calibri"/>
-              </a:rPr>
-              <a:t>agriculture-led economy</a:t>
-            </a:r>
-            <a:endParaRPr sz="1200" b="1">
-              <a:solidFill>
-                <a:srgbClr val="8B5A2B"/>
+            <a:pPr algn="ctr"/>
+            <a:r>
+              <a:rPr sz="800" b="0">
+                <a:solidFill>
+                  <a:srgbClr val="B0B4B1"/>
+                </a:solidFill>
+                <a:latin typeface="Calibri"/>
+              </a:rPr>
+              <a:t>(today)</a:t>
+            </a:r>
+            <a:endParaRPr sz="800" b="0">
+              <a:solidFill>
+                <a:srgbClr val="B0B4B1"/>
               </a:solidFill>
               <a:latin typeface="Calibri"/>
             </a:endParaRPr>
@@ -5272,8 +5425,8 @@
         </p:nvSpPr>
         <p:spPr>
           <a:xfrm>
-            <a:off x="914400" y="2743200"/>
-            <a:ext cx="3154680" cy="1005840"/>
+            <a:off x="6629400" y="1591056"/>
+            <a:ext cx="2331720" cy="201168"/>
           </a:xfrm>
           <a:prstGeom prst="rect">
             <a:avLst/>
@@ -5286,99 +5439,35 @@
           </a:bodyPr>
           <a:lstStyle/>
           <a:p>
-            <a:pPr algn="l"/>
-            <a:r>
-              <a:rPr sz="1100" b="0">
-                <a:solidFill>
-                  <a:srgbClr val="6B6E6A"/>
-                </a:solidFill>
-                <a:latin typeface="Calibri"/>
-              </a:rPr>
-              <a:t>Small farmers form the backbone of rural livelihoods.</a:t>
-            </a:r>
-            <a:endParaRPr sz="1100" b="0">
-              <a:solidFill>
-                <a:srgbClr val="6B6E6A"/>
-              </a:solidFill>
-              <a:latin typeface="Calibri"/>
-            </a:endParaRPr>
-          </a:p>
-          <a:p>
-            <a:pPr algn="l"/>
-            <a:r>
-              <a:rPr sz="1100" b="0">
-                <a:solidFill>
-                  <a:srgbClr val="6B6E6A"/>
-                </a:solidFill>
-                <a:latin typeface="Calibri"/>
-              </a:rPr>
-              <a:t>Few have any digital tool today.</a:t>
-            </a:r>
-            <a:endParaRPr sz="1100" b="0">
-              <a:solidFill>
-                <a:srgbClr val="6B6E6A"/>
-              </a:solidFill>
-              <a:latin typeface="Calibri"/>
-            </a:endParaRPr>
-          </a:p>
-        </p:txBody>
-      </p:sp>
-      <p:sp>
-        <p:nvSpPr>
-          <p:cNvPr id="10" name="Rounded Rectangle 9"/>
-          <p:cNvSpPr/>
-          <p:nvPr/>
-        </p:nvSpPr>
-        <p:spPr>
-          <a:xfrm>
-            <a:off x="4389120" y="1645920"/>
-            <a:ext cx="3611880" cy="2194560"/>
-          </a:xfrm>
-          <a:prstGeom prst="roundRect">
-            <a:avLst/>
-          </a:prstGeom>
-          <a:solidFill>
-            <a:srgbClr val="FFFFFF"/>
-          </a:solidFill>
-          <a:ln w="9525">
-            <a:solidFill>
-              <a:srgbClr val="D8DBD9"/>
-            </a:solidFill>
-          </a:ln>
-          <a:effectLst/>
-        </p:spPr>
-        <p:style>
-          <a:lnRef idx="1">
-            <a:schemeClr val="accent1"/>
-          </a:lnRef>
-          <a:fillRef idx="3">
-            <a:schemeClr val="accent1"/>
-          </a:fillRef>
-          <a:effectRef idx="2">
-            <a:schemeClr val="accent1"/>
-          </a:effectRef>
-          <a:fontRef idx="minor">
-            <a:schemeClr val="lt1"/>
-          </a:fontRef>
-        </p:style>
-        <p:txBody>
-          <a:bodyPr rtlCol="0" anchor="ctr"/>
-          <a:lstStyle/>
-          <a:p>
             <a:pPr algn="ctr"/>
-          </a:p>
-        </p:txBody>
-      </p:sp>
-      <p:sp>
-        <p:nvSpPr>
-          <p:cNvPr id="11" name="TextBox 10"/>
+            <a:r>
+              <a:rPr sz="1100" b="1">
+                <a:solidFill>
+                  <a:srgbClr val="8B5A2B"/>
+                </a:solidFill>
+                <a:latin typeface="Calibri"/>
+              </a:rPr>
+              <a:t>Cloud farming app</a:t>
+            </a:r>
+            <a:endParaRPr sz="1100" b="1">
+              <a:solidFill>
+                <a:srgbClr val="8B5A2B"/>
+              </a:solidFill>
+              <a:latin typeface="Calibri"/>
+            </a:endParaRPr>
+          </a:p>
+        </p:txBody>
+      </p:sp>
+      <p:sp>
+        <p:nvSpPr>
+          <p:cNvPr id="10" name="TextBox 9"/>
           <p:cNvSpPr txBox="1"/>
           <p:nvPr/>
         </p:nvSpPr>
         <p:spPr>
           <a:xfrm>
-            <a:off x="4663440" y="1828800"/>
-            <a:ext cx="3611880" cy="457200"/>
+            <a:off x="6629400" y="1773936"/>
+            <a:ext cx="2331720" cy="164592"/>
           </a:xfrm>
           <a:prstGeom prst="rect">
             <a:avLst/>
@@ -5391,322 +5480,35 @@
           </a:bodyPr>
           <a:lstStyle/>
           <a:p>
-            <a:pPr algn="l"/>
-            <a:r>
-              <a:rPr sz="2200" b="1">
-                <a:solidFill>
-                  <a:srgbClr val="1F4D2E"/>
-                </a:solidFill>
-                <a:latin typeface="Calibri"/>
-              </a:rPr>
-              <a:t>Smartphones</a:t>
-            </a:r>
-            <a:endParaRPr sz="2200" b="1">
-              <a:solidFill>
-                <a:srgbClr val="1F4D2E"/>
-              </a:solidFill>
-              <a:latin typeface="Calibri"/>
-            </a:endParaRPr>
-          </a:p>
-        </p:txBody>
-      </p:sp>
-      <p:sp>
-        <p:nvSpPr>
-          <p:cNvPr id="12" name="TextBox 11"/>
-          <p:cNvSpPr txBox="1"/>
-          <p:nvPr/>
-        </p:nvSpPr>
-        <p:spPr>
-          <a:xfrm>
-            <a:off x="4663440" y="2331720"/>
-            <a:ext cx="3611880" cy="365760"/>
-          </a:xfrm>
-          <a:prstGeom prst="rect">
-            <a:avLst/>
-          </a:prstGeom>
-          <a:noFill/>
-        </p:spPr>
-        <p:txBody>
-          <a:bodyPr wrap="square" lIns="0" tIns="0" rIns="0" bIns="0" anchor="t">
-            <a:spAutoFit/>
-          </a:bodyPr>
-          <a:lstStyle/>
-          <a:p>
-            <a:pPr algn="l"/>
-            <a:r>
-              <a:rPr sz="1200" b="1">
-                <a:solidFill>
-                  <a:srgbClr val="8B5A2B"/>
-                </a:solidFill>
-                <a:latin typeface="Calibri"/>
-              </a:rPr>
-              <a:t>wide &amp; growing reach</a:t>
-            </a:r>
-            <a:endParaRPr sz="1200" b="1">
-              <a:solidFill>
-                <a:srgbClr val="8B5A2B"/>
-              </a:solidFill>
-              <a:latin typeface="Calibri"/>
-            </a:endParaRPr>
-          </a:p>
-        </p:txBody>
-      </p:sp>
-      <p:sp>
-        <p:nvSpPr>
-          <p:cNvPr id="13" name="TextBox 12"/>
-          <p:cNvSpPr txBox="1"/>
-          <p:nvPr/>
-        </p:nvSpPr>
-        <p:spPr>
-          <a:xfrm>
-            <a:off x="4663440" y="2743200"/>
-            <a:ext cx="3154680" cy="338455"/>
-          </a:xfrm>
-          <a:prstGeom prst="rect">
-            <a:avLst/>
-          </a:prstGeom>
-          <a:noFill/>
-        </p:spPr>
-        <p:txBody>
-          <a:bodyPr wrap="square" lIns="0" tIns="0" rIns="0" bIns="0" anchor="t">
-            <a:spAutoFit/>
-          </a:bodyPr>
-          <a:lstStyle/>
-          <a:p>
-            <a:pPr algn="l"/>
-            <a:r>
-              <a:rPr sz="1100" b="0">
-                <a:solidFill>
-                  <a:srgbClr val="6B6E6A"/>
-                </a:solidFill>
-                <a:latin typeface="Calibri"/>
-              </a:rPr>
-              <a:t>Entry-level older iPhones are common,</a:t>
-            </a:r>
-            <a:endParaRPr sz="1100" b="0">
-              <a:solidFill>
-                <a:srgbClr val="6B6E6A"/>
-              </a:solidFill>
-              <a:latin typeface="Calibri"/>
-            </a:endParaRPr>
-          </a:p>
-          <a:p>
-            <a:pPr algn="l"/>
-            <a:r>
-              <a:rPr sz="1100" b="0">
-                <a:solidFill>
-                  <a:srgbClr val="6B6E6A"/>
-                </a:solidFill>
-                <a:latin typeface="Calibri"/>
-              </a:rPr>
-              <a:t>even in rural districts.</a:t>
-            </a:r>
-            <a:endParaRPr sz="1100" b="0">
-              <a:solidFill>
-                <a:srgbClr val="6B6E6A"/>
-              </a:solidFill>
-              <a:latin typeface="Calibri"/>
-            </a:endParaRPr>
-          </a:p>
-        </p:txBody>
-      </p:sp>
-      <p:sp>
-        <p:nvSpPr>
-          <p:cNvPr id="14" name="Rounded Rectangle 13"/>
+            <a:pPr algn="ctr"/>
+            <a:r>
+              <a:rPr sz="800" b="0">
+                <a:solidFill>
+                  <a:srgbClr val="B0B4B1"/>
+                </a:solidFill>
+                <a:latin typeface="Calibri"/>
+              </a:rPr>
+              <a:t>e.g. Plantix</a:t>
+            </a:r>
+            <a:endParaRPr sz="800" b="0">
+              <a:solidFill>
+                <a:srgbClr val="B0B4B1"/>
+              </a:solidFill>
+              <a:latin typeface="Calibri"/>
+            </a:endParaRPr>
+          </a:p>
+        </p:txBody>
+      </p:sp>
+      <p:sp>
+        <p:nvSpPr>
+          <p:cNvPr id="11" name="Rounded Rectangle 10"/>
           <p:cNvSpPr/>
           <p:nvPr/>
         </p:nvSpPr>
         <p:spPr>
           <a:xfrm>
-            <a:off x="8138160" y="1645920"/>
-            <a:ext cx="3611880" cy="2194560"/>
-          </a:xfrm>
-          <a:prstGeom prst="roundRect">
-            <a:avLst/>
-          </a:prstGeom>
-          <a:solidFill>
-            <a:srgbClr val="FFFFFF"/>
-          </a:solidFill>
-          <a:ln w="9525">
-            <a:solidFill>
-              <a:srgbClr val="D8DBD9"/>
-            </a:solidFill>
-          </a:ln>
-          <a:effectLst/>
-        </p:spPr>
-        <p:style>
-          <a:lnRef idx="1">
-            <a:schemeClr val="accent1"/>
-          </a:lnRef>
-          <a:fillRef idx="3">
-            <a:schemeClr val="accent1"/>
-          </a:fillRef>
-          <a:effectRef idx="2">
-            <a:schemeClr val="accent1"/>
-          </a:effectRef>
-          <a:fontRef idx="minor">
-            <a:schemeClr val="lt1"/>
-          </a:fontRef>
-        </p:style>
-        <p:txBody>
-          <a:bodyPr rtlCol="0" anchor="ctr"/>
-          <a:lstStyle/>
-          <a:p>
-            <a:pPr algn="ctr"/>
-          </a:p>
-        </p:txBody>
-      </p:sp>
-      <p:sp>
-        <p:nvSpPr>
-          <p:cNvPr id="15" name="TextBox 14"/>
-          <p:cNvSpPr txBox="1"/>
-          <p:nvPr/>
-        </p:nvSpPr>
-        <p:spPr>
-          <a:xfrm>
-            <a:off x="8412480" y="1828800"/>
-            <a:ext cx="3611880" cy="457200"/>
-          </a:xfrm>
-          <a:prstGeom prst="rect">
-            <a:avLst/>
-          </a:prstGeom>
-          <a:noFill/>
-        </p:spPr>
-        <p:txBody>
-          <a:bodyPr wrap="square" lIns="0" tIns="0" rIns="0" bIns="0" anchor="t">
-            <a:spAutoFit/>
-          </a:bodyPr>
-          <a:lstStyle/>
-          <a:p>
-            <a:pPr algn="l"/>
-            <a:r>
-              <a:rPr sz="2200" b="1">
-                <a:solidFill>
-                  <a:srgbClr val="1F4D2E"/>
-                </a:solidFill>
-                <a:latin typeface="Calibri"/>
-              </a:rPr>
-              <a:t>Connectivity</a:t>
-            </a:r>
-            <a:endParaRPr sz="2200" b="1">
-              <a:solidFill>
-                <a:srgbClr val="1F4D2E"/>
-              </a:solidFill>
-              <a:latin typeface="Calibri"/>
-            </a:endParaRPr>
-          </a:p>
-        </p:txBody>
-      </p:sp>
-      <p:sp>
-        <p:nvSpPr>
-          <p:cNvPr id="16" name="TextBox 15"/>
-          <p:cNvSpPr txBox="1"/>
-          <p:nvPr/>
-        </p:nvSpPr>
-        <p:spPr>
-          <a:xfrm>
-            <a:off x="8412480" y="2331720"/>
-            <a:ext cx="3611880" cy="365760"/>
-          </a:xfrm>
-          <a:prstGeom prst="rect">
-            <a:avLst/>
-          </a:prstGeom>
-          <a:noFill/>
-        </p:spPr>
-        <p:txBody>
-          <a:bodyPr wrap="square" lIns="0" tIns="0" rIns="0" bIns="0" anchor="t">
-            <a:spAutoFit/>
-          </a:bodyPr>
-          <a:lstStyle/>
-          <a:p>
-            <a:pPr algn="l"/>
-            <a:r>
-              <a:rPr sz="1200" b="1">
-                <a:solidFill>
-                  <a:srgbClr val="8B5A2B"/>
-                </a:solidFill>
-                <a:latin typeface="Calibri"/>
-              </a:rPr>
-              <a:t>still the blocker</a:t>
-            </a:r>
-            <a:endParaRPr sz="1200" b="1">
-              <a:solidFill>
-                <a:srgbClr val="8B5A2B"/>
-              </a:solidFill>
-              <a:latin typeface="Calibri"/>
-            </a:endParaRPr>
-          </a:p>
-        </p:txBody>
-      </p:sp>
-      <p:sp>
-        <p:nvSpPr>
-          <p:cNvPr id="17" name="TextBox 16"/>
-          <p:cNvSpPr txBox="1"/>
-          <p:nvPr/>
-        </p:nvSpPr>
-        <p:spPr>
-          <a:xfrm>
-            <a:off x="8412480" y="2743200"/>
-            <a:ext cx="3154680" cy="1005840"/>
-          </a:xfrm>
-          <a:prstGeom prst="rect">
-            <a:avLst/>
-          </a:prstGeom>
-          <a:noFill/>
-        </p:spPr>
-        <p:txBody>
-          <a:bodyPr wrap="square" lIns="0" tIns="0" rIns="0" bIns="0" anchor="t">
-            <a:spAutoFit/>
-          </a:bodyPr>
-          <a:lstStyle/>
-          <a:p>
-            <a:pPr algn="l"/>
-            <a:r>
-              <a:rPr sz="1100" b="0">
-                <a:solidFill>
-                  <a:srgbClr val="6B6E6A"/>
-                </a:solidFill>
-                <a:latin typeface="Calibri"/>
-              </a:rPr>
-              <a:t>Network coverage is uneven; data is costly.</a:t>
-            </a:r>
-            <a:endParaRPr sz="1100" b="0">
-              <a:solidFill>
-                <a:srgbClr val="6B6E6A"/>
-              </a:solidFill>
-              <a:latin typeface="Calibri"/>
-            </a:endParaRPr>
-          </a:p>
-          <a:p>
-            <a:pPr algn="l"/>
-            <a:r>
-              <a:rPr sz="1100" b="0">
-                <a:solidFill>
-                  <a:srgbClr val="6B6E6A"/>
-                </a:solidFill>
-                <a:latin typeface="Calibri"/>
-              </a:rPr>
-              <a:t>Offline-first is the unlock.</a:t>
-            </a:r>
-            <a:endParaRPr sz="1100" b="0">
-              <a:solidFill>
-                <a:srgbClr val="6B6E6A"/>
-              </a:solidFill>
-              <a:latin typeface="Calibri"/>
-            </a:endParaRPr>
-          </a:p>
-        </p:txBody>
-      </p:sp>
-      <p:sp>
-        <p:nvSpPr>
-          <p:cNvPr id="18" name="Rounded Rectangle 17"/>
-          <p:cNvSpPr/>
-          <p:nvPr/>
-        </p:nvSpPr>
-        <p:spPr>
-          <a:xfrm>
-            <a:off x="640080" y="4206240"/>
-            <a:ext cx="10881360" cy="1828800"/>
+            <a:off x="8961120" y="1554480"/>
+            <a:ext cx="2331720" cy="411480"/>
           </a:xfrm>
           <a:prstGeom prst="roundRect">
             <a:avLst/>
@@ -5743,14 +5545,1505 @@
       </p:sp>
       <p:sp>
         <p:nvSpPr>
+          <p:cNvPr id="12" name="TextBox 11"/>
+          <p:cNvSpPr txBox="1"/>
+          <p:nvPr/>
+        </p:nvSpPr>
+        <p:spPr>
+          <a:xfrm>
+            <a:off x="8961120" y="1591056"/>
+            <a:ext cx="2331720" cy="201168"/>
+          </a:xfrm>
+          <a:prstGeom prst="rect">
+            <a:avLst/>
+          </a:prstGeom>
+          <a:noFill/>
+        </p:spPr>
+        <p:txBody>
+          <a:bodyPr wrap="square" lIns="0" tIns="0" rIns="0" bIns="0" anchor="t">
+            <a:spAutoFit/>
+          </a:bodyPr>
+          <a:lstStyle/>
+          <a:p>
+            <a:pPr algn="ctr"/>
+            <a:r>
+              <a:rPr sz="1100" b="1">
+                <a:solidFill>
+                  <a:srgbClr val="1F4D2E"/>
+                </a:solidFill>
+                <a:latin typeface="Calibri"/>
+              </a:rPr>
+              <a:t>SmartFarm</a:t>
+            </a:r>
+            <a:endParaRPr sz="1100" b="1">
+              <a:solidFill>
+                <a:srgbClr val="1F4D2E"/>
+              </a:solidFill>
+              <a:latin typeface="Calibri"/>
+            </a:endParaRPr>
+          </a:p>
+        </p:txBody>
+      </p:sp>
+      <p:sp>
+        <p:nvSpPr>
+          <p:cNvPr id="13" name="TextBox 12"/>
+          <p:cNvSpPr txBox="1"/>
+          <p:nvPr/>
+        </p:nvSpPr>
+        <p:spPr>
+          <a:xfrm>
+            <a:off x="8961120" y="1773936"/>
+            <a:ext cx="2331720" cy="164592"/>
+          </a:xfrm>
+          <a:prstGeom prst="rect">
+            <a:avLst/>
+          </a:prstGeom>
+          <a:noFill/>
+        </p:spPr>
+        <p:txBody>
+          <a:bodyPr wrap="square" lIns="0" tIns="0" rIns="0" bIns="0" anchor="t">
+            <a:spAutoFit/>
+          </a:bodyPr>
+          <a:lstStyle/>
+          <a:p>
+            <a:pPr algn="ctr"/>
+            <a:r>
+              <a:rPr sz="800" b="0">
+                <a:solidFill>
+                  <a:srgbClr val="B0B4B1"/>
+                </a:solidFill>
+                <a:latin typeface="Calibri"/>
+              </a:rPr>
+              <a:t>(us)</a:t>
+            </a:r>
+            <a:endParaRPr sz="800" b="0">
+              <a:solidFill>
+                <a:srgbClr val="B0B4B1"/>
+              </a:solidFill>
+              <a:latin typeface="Calibri"/>
+            </a:endParaRPr>
+          </a:p>
+        </p:txBody>
+      </p:sp>
+      <p:sp>
+        <p:nvSpPr>
+          <p:cNvPr id="14" name="Rectangle 13"/>
+          <p:cNvSpPr/>
+          <p:nvPr/>
+        </p:nvSpPr>
+        <p:spPr>
+          <a:xfrm>
+            <a:off x="640080" y="2011680"/>
+            <a:ext cx="10652760" cy="411480"/>
+          </a:xfrm>
+          <a:prstGeom prst="rect">
+            <a:avLst/>
+          </a:prstGeom>
+          <a:solidFill>
+            <a:srgbClr val="EEF0EE"/>
+          </a:solidFill>
+          <a:ln>
+            <a:noFill/>
+          </a:ln>
+          <a:effectLst/>
+        </p:spPr>
+        <p:style>
+          <a:lnRef idx="1">
+            <a:schemeClr val="accent1"/>
+          </a:lnRef>
+          <a:fillRef idx="3">
+            <a:schemeClr val="accent1"/>
+          </a:fillRef>
+          <a:effectRef idx="2">
+            <a:schemeClr val="accent1"/>
+          </a:effectRef>
+          <a:fontRef idx="minor">
+            <a:schemeClr val="lt1"/>
+          </a:fontRef>
+        </p:style>
+        <p:txBody>
+          <a:bodyPr rtlCol="0" anchor="ctr"/>
+          <a:lstStyle/>
+          <a:p>
+            <a:pPr algn="ctr"/>
+          </a:p>
+        </p:txBody>
+      </p:sp>
+      <p:sp>
+        <p:nvSpPr>
+          <p:cNvPr id="15" name="TextBox 14"/>
+          <p:cNvSpPr txBox="1"/>
+          <p:nvPr/>
+        </p:nvSpPr>
+        <p:spPr>
+          <a:xfrm>
+            <a:off x="777240" y="2011680"/>
+            <a:ext cx="3657600" cy="411480"/>
+          </a:xfrm>
+          <a:prstGeom prst="rect">
+            <a:avLst/>
+          </a:prstGeom>
+          <a:noFill/>
+        </p:spPr>
+        <p:txBody>
+          <a:bodyPr wrap="square" lIns="0" tIns="0" rIns="0" bIns="0" anchor="ctr">
+            <a:spAutoFit/>
+          </a:bodyPr>
+          <a:lstStyle/>
+          <a:p>
+            <a:pPr algn="l"/>
+            <a:r>
+              <a:rPr sz="1000" b="0">
+                <a:solidFill>
+                  <a:srgbClr val="3A423D"/>
+                </a:solidFill>
+                <a:latin typeface="Calibri"/>
+              </a:rPr>
+              <a:t>Works fully offline</a:t>
+            </a:r>
+            <a:endParaRPr sz="1000" b="0">
+              <a:solidFill>
+                <a:srgbClr val="3A423D"/>
+              </a:solidFill>
+              <a:latin typeface="Calibri"/>
+            </a:endParaRPr>
+          </a:p>
+        </p:txBody>
+      </p:sp>
+      <p:sp>
+        <p:nvSpPr>
+          <p:cNvPr id="16" name="TextBox 15"/>
+          <p:cNvSpPr txBox="1"/>
+          <p:nvPr/>
+        </p:nvSpPr>
+        <p:spPr>
+          <a:xfrm>
+            <a:off x="4297680" y="2011680"/>
+            <a:ext cx="2331720" cy="411480"/>
+          </a:xfrm>
+          <a:prstGeom prst="rect">
+            <a:avLst/>
+          </a:prstGeom>
+          <a:noFill/>
+        </p:spPr>
+        <p:txBody>
+          <a:bodyPr wrap="square" lIns="0" tIns="0" rIns="0" bIns="0" anchor="ctr">
+            <a:spAutoFit/>
+          </a:bodyPr>
+          <a:lstStyle/>
+          <a:p>
+            <a:pPr algn="ctr"/>
+            <a:r>
+              <a:rPr sz="1800" b="1">
+                <a:solidFill>
+                  <a:srgbClr val="2E6E43"/>
+                </a:solidFill>
+                <a:latin typeface="Calibri"/>
+              </a:rPr>
+              <a:t>✓</a:t>
+            </a:r>
+            <a:endParaRPr sz="1800" b="1">
+              <a:solidFill>
+                <a:srgbClr val="2E6E43"/>
+              </a:solidFill>
+              <a:latin typeface="Calibri"/>
+            </a:endParaRPr>
+          </a:p>
+        </p:txBody>
+      </p:sp>
+      <p:sp>
+        <p:nvSpPr>
+          <p:cNvPr id="17" name="TextBox 16"/>
+          <p:cNvSpPr txBox="1"/>
+          <p:nvPr/>
+        </p:nvSpPr>
+        <p:spPr>
+          <a:xfrm>
+            <a:off x="6629400" y="2011680"/>
+            <a:ext cx="2331720" cy="411480"/>
+          </a:xfrm>
+          <a:prstGeom prst="rect">
+            <a:avLst/>
+          </a:prstGeom>
+          <a:noFill/>
+        </p:spPr>
+        <p:txBody>
+          <a:bodyPr wrap="square" lIns="0" tIns="0" rIns="0" bIns="0" anchor="ctr">
+            <a:spAutoFit/>
+          </a:bodyPr>
+          <a:lstStyle/>
+          <a:p>
+            <a:pPr algn="ctr"/>
+            <a:r>
+              <a:rPr sz="1800" b="1">
+                <a:solidFill>
+                  <a:srgbClr val="B0382A"/>
+                </a:solidFill>
+                <a:latin typeface="Calibri"/>
+              </a:rPr>
+              <a:t>✗</a:t>
+            </a:r>
+            <a:endParaRPr sz="1800" b="1">
+              <a:solidFill>
+                <a:srgbClr val="B0382A"/>
+              </a:solidFill>
+              <a:latin typeface="Calibri"/>
+            </a:endParaRPr>
+          </a:p>
+        </p:txBody>
+      </p:sp>
+      <p:sp>
+        <p:nvSpPr>
+          <p:cNvPr id="18" name="TextBox 17"/>
+          <p:cNvSpPr txBox="1"/>
+          <p:nvPr/>
+        </p:nvSpPr>
+        <p:spPr>
+          <a:xfrm>
+            <a:off x="8961120" y="2011680"/>
+            <a:ext cx="2331720" cy="411480"/>
+          </a:xfrm>
+          <a:prstGeom prst="rect">
+            <a:avLst/>
+          </a:prstGeom>
+          <a:noFill/>
+        </p:spPr>
+        <p:txBody>
+          <a:bodyPr wrap="square" lIns="0" tIns="0" rIns="0" bIns="0" anchor="ctr">
+            <a:spAutoFit/>
+          </a:bodyPr>
+          <a:lstStyle/>
+          <a:p>
+            <a:pPr algn="ctr"/>
+            <a:r>
+              <a:rPr sz="1800" b="1">
+                <a:solidFill>
+                  <a:srgbClr val="2E6E43"/>
+                </a:solidFill>
+                <a:latin typeface="Calibri"/>
+              </a:rPr>
+              <a:t>✓</a:t>
+            </a:r>
+            <a:endParaRPr sz="1800" b="1">
+              <a:solidFill>
+                <a:srgbClr val="2E6E43"/>
+              </a:solidFill>
+              <a:latin typeface="Calibri"/>
+            </a:endParaRPr>
+          </a:p>
+        </p:txBody>
+      </p:sp>
+      <p:sp>
+        <p:nvSpPr>
           <p:cNvPr id="19" name="TextBox 18"/>
           <p:cNvSpPr txBox="1"/>
           <p:nvPr/>
         </p:nvSpPr>
         <p:spPr>
           <a:xfrm>
-            <a:off x="868680" y="4389120"/>
-            <a:ext cx="10515600" cy="365760"/>
+            <a:off x="777240" y="2423160"/>
+            <a:ext cx="3657600" cy="411480"/>
+          </a:xfrm>
+          <a:prstGeom prst="rect">
+            <a:avLst/>
+          </a:prstGeom>
+          <a:noFill/>
+        </p:spPr>
+        <p:txBody>
+          <a:bodyPr wrap="square" lIns="0" tIns="0" rIns="0" bIns="0" anchor="ctr">
+            <a:spAutoFit/>
+          </a:bodyPr>
+          <a:lstStyle/>
+          <a:p>
+            <a:pPr algn="l"/>
+            <a:r>
+              <a:rPr sz="1000" b="0">
+                <a:solidFill>
+                  <a:srgbClr val="3A423D"/>
+                </a:solidFill>
+                <a:latin typeface="Calibri"/>
+              </a:rPr>
+              <a:t>Khmer-first interface</a:t>
+            </a:r>
+            <a:endParaRPr sz="1000" b="0">
+              <a:solidFill>
+                <a:srgbClr val="3A423D"/>
+              </a:solidFill>
+              <a:latin typeface="Calibri"/>
+            </a:endParaRPr>
+          </a:p>
+        </p:txBody>
+      </p:sp>
+      <p:sp>
+        <p:nvSpPr>
+          <p:cNvPr id="20" name="TextBox 19"/>
+          <p:cNvSpPr txBox="1"/>
+          <p:nvPr/>
+        </p:nvSpPr>
+        <p:spPr>
+          <a:xfrm>
+            <a:off x="4297680" y="2423160"/>
+            <a:ext cx="2331720" cy="411480"/>
+          </a:xfrm>
+          <a:prstGeom prst="rect">
+            <a:avLst/>
+          </a:prstGeom>
+          <a:noFill/>
+        </p:spPr>
+        <p:txBody>
+          <a:bodyPr wrap="square" lIns="0" tIns="0" rIns="0" bIns="0" anchor="ctr">
+            <a:spAutoFit/>
+          </a:bodyPr>
+          <a:lstStyle/>
+          <a:p>
+            <a:pPr algn="ctr"/>
+            <a:r>
+              <a:rPr sz="1800" b="1">
+                <a:solidFill>
+                  <a:srgbClr val="2E6E43"/>
+                </a:solidFill>
+                <a:latin typeface="Calibri"/>
+              </a:rPr>
+              <a:t>✓</a:t>
+            </a:r>
+            <a:endParaRPr sz="1800" b="1">
+              <a:solidFill>
+                <a:srgbClr val="2E6E43"/>
+              </a:solidFill>
+              <a:latin typeface="Calibri"/>
+            </a:endParaRPr>
+          </a:p>
+        </p:txBody>
+      </p:sp>
+      <p:sp>
+        <p:nvSpPr>
+          <p:cNvPr id="21" name="TextBox 20"/>
+          <p:cNvSpPr txBox="1"/>
+          <p:nvPr/>
+        </p:nvSpPr>
+        <p:spPr>
+          <a:xfrm>
+            <a:off x="6629400" y="2423160"/>
+            <a:ext cx="2331720" cy="411480"/>
+          </a:xfrm>
+          <a:prstGeom prst="rect">
+            <a:avLst/>
+          </a:prstGeom>
+          <a:noFill/>
+        </p:spPr>
+        <p:txBody>
+          <a:bodyPr wrap="square" lIns="0" tIns="0" rIns="0" bIns="0" anchor="ctr">
+            <a:spAutoFit/>
+          </a:bodyPr>
+          <a:lstStyle/>
+          <a:p>
+            <a:pPr algn="ctr"/>
+            <a:r>
+              <a:rPr sz="1800" b="1">
+                <a:solidFill>
+                  <a:srgbClr val="B0382A"/>
+                </a:solidFill>
+                <a:latin typeface="Calibri"/>
+              </a:rPr>
+              <a:t>✗</a:t>
+            </a:r>
+            <a:endParaRPr sz="1800" b="1">
+              <a:solidFill>
+                <a:srgbClr val="B0382A"/>
+              </a:solidFill>
+              <a:latin typeface="Calibri"/>
+            </a:endParaRPr>
+          </a:p>
+        </p:txBody>
+      </p:sp>
+      <p:sp>
+        <p:nvSpPr>
+          <p:cNvPr id="22" name="TextBox 21"/>
+          <p:cNvSpPr txBox="1"/>
+          <p:nvPr/>
+        </p:nvSpPr>
+        <p:spPr>
+          <a:xfrm>
+            <a:off x="8961120" y="2423160"/>
+            <a:ext cx="2331720" cy="411480"/>
+          </a:xfrm>
+          <a:prstGeom prst="rect">
+            <a:avLst/>
+          </a:prstGeom>
+          <a:noFill/>
+        </p:spPr>
+        <p:txBody>
+          <a:bodyPr wrap="square" lIns="0" tIns="0" rIns="0" bIns="0" anchor="ctr">
+            <a:spAutoFit/>
+          </a:bodyPr>
+          <a:lstStyle/>
+          <a:p>
+            <a:pPr algn="ctr"/>
+            <a:r>
+              <a:rPr sz="1800" b="1">
+                <a:solidFill>
+                  <a:srgbClr val="2E6E43"/>
+                </a:solidFill>
+                <a:latin typeface="Calibri"/>
+              </a:rPr>
+              <a:t>✓</a:t>
+            </a:r>
+            <a:endParaRPr sz="1800" b="1">
+              <a:solidFill>
+                <a:srgbClr val="2E6E43"/>
+              </a:solidFill>
+              <a:latin typeface="Calibri"/>
+            </a:endParaRPr>
+          </a:p>
+        </p:txBody>
+      </p:sp>
+      <p:sp>
+        <p:nvSpPr>
+          <p:cNvPr id="23" name="Rectangle 22"/>
+          <p:cNvSpPr/>
+          <p:nvPr/>
+        </p:nvSpPr>
+        <p:spPr>
+          <a:xfrm>
+            <a:off x="640080" y="2834640"/>
+            <a:ext cx="10652760" cy="411480"/>
+          </a:xfrm>
+          <a:prstGeom prst="rect">
+            <a:avLst/>
+          </a:prstGeom>
+          <a:solidFill>
+            <a:srgbClr val="EEF0EE"/>
+          </a:solidFill>
+          <a:ln>
+            <a:noFill/>
+          </a:ln>
+          <a:effectLst/>
+        </p:spPr>
+        <p:style>
+          <a:lnRef idx="1">
+            <a:schemeClr val="accent1"/>
+          </a:lnRef>
+          <a:fillRef idx="3">
+            <a:schemeClr val="accent1"/>
+          </a:fillRef>
+          <a:effectRef idx="2">
+            <a:schemeClr val="accent1"/>
+          </a:effectRef>
+          <a:fontRef idx="minor">
+            <a:schemeClr val="lt1"/>
+          </a:fontRef>
+        </p:style>
+        <p:txBody>
+          <a:bodyPr rtlCol="0" anchor="ctr"/>
+          <a:lstStyle/>
+          <a:p>
+            <a:pPr algn="ctr"/>
+          </a:p>
+        </p:txBody>
+      </p:sp>
+      <p:sp>
+        <p:nvSpPr>
+          <p:cNvPr id="24" name="TextBox 23"/>
+          <p:cNvSpPr txBox="1"/>
+          <p:nvPr/>
+        </p:nvSpPr>
+        <p:spPr>
+          <a:xfrm>
+            <a:off x="777240" y="2834640"/>
+            <a:ext cx="3657600" cy="411480"/>
+          </a:xfrm>
+          <a:prstGeom prst="rect">
+            <a:avLst/>
+          </a:prstGeom>
+          <a:noFill/>
+        </p:spPr>
+        <p:txBody>
+          <a:bodyPr wrap="square" lIns="0" tIns="0" rIns="0" bIns="0" anchor="ctr">
+            <a:spAutoFit/>
+          </a:bodyPr>
+          <a:lstStyle/>
+          <a:p>
+            <a:pPr algn="l"/>
+            <a:r>
+              <a:rPr sz="1000" b="0">
+                <a:solidFill>
+                  <a:srgbClr val="3A423D"/>
+                </a:solidFill>
+                <a:latin typeface="Calibri"/>
+              </a:rPr>
+              <a:t>Searchable records</a:t>
+            </a:r>
+            <a:endParaRPr sz="1000" b="0">
+              <a:solidFill>
+                <a:srgbClr val="3A423D"/>
+              </a:solidFill>
+              <a:latin typeface="Calibri"/>
+            </a:endParaRPr>
+          </a:p>
+        </p:txBody>
+      </p:sp>
+      <p:sp>
+        <p:nvSpPr>
+          <p:cNvPr id="25" name="TextBox 24"/>
+          <p:cNvSpPr txBox="1"/>
+          <p:nvPr/>
+        </p:nvSpPr>
+        <p:spPr>
+          <a:xfrm>
+            <a:off x="4297680" y="2834640"/>
+            <a:ext cx="2331720" cy="411480"/>
+          </a:xfrm>
+          <a:prstGeom prst="rect">
+            <a:avLst/>
+          </a:prstGeom>
+          <a:noFill/>
+        </p:spPr>
+        <p:txBody>
+          <a:bodyPr wrap="square" lIns="0" tIns="0" rIns="0" bIns="0" anchor="ctr">
+            <a:spAutoFit/>
+          </a:bodyPr>
+          <a:lstStyle/>
+          <a:p>
+            <a:pPr algn="ctr"/>
+            <a:r>
+              <a:rPr sz="1800" b="1">
+                <a:solidFill>
+                  <a:srgbClr val="B0382A"/>
+                </a:solidFill>
+                <a:latin typeface="Calibri"/>
+              </a:rPr>
+              <a:t>✗</a:t>
+            </a:r>
+            <a:endParaRPr sz="1800" b="1">
+              <a:solidFill>
+                <a:srgbClr val="B0382A"/>
+              </a:solidFill>
+              <a:latin typeface="Calibri"/>
+            </a:endParaRPr>
+          </a:p>
+        </p:txBody>
+      </p:sp>
+      <p:sp>
+        <p:nvSpPr>
+          <p:cNvPr id="26" name="TextBox 25"/>
+          <p:cNvSpPr txBox="1"/>
+          <p:nvPr/>
+        </p:nvSpPr>
+        <p:spPr>
+          <a:xfrm>
+            <a:off x="6629400" y="2834640"/>
+            <a:ext cx="2331720" cy="411480"/>
+          </a:xfrm>
+          <a:prstGeom prst="rect">
+            <a:avLst/>
+          </a:prstGeom>
+          <a:noFill/>
+        </p:spPr>
+        <p:txBody>
+          <a:bodyPr wrap="square" lIns="0" tIns="0" rIns="0" bIns="0" anchor="ctr">
+            <a:spAutoFit/>
+          </a:bodyPr>
+          <a:lstStyle/>
+          <a:p>
+            <a:pPr algn="ctr"/>
+            <a:r>
+              <a:rPr sz="1800" b="1">
+                <a:solidFill>
+                  <a:srgbClr val="2E6E43"/>
+                </a:solidFill>
+                <a:latin typeface="Calibri"/>
+              </a:rPr>
+              <a:t>✓</a:t>
+            </a:r>
+            <a:endParaRPr sz="1800" b="1">
+              <a:solidFill>
+                <a:srgbClr val="2E6E43"/>
+              </a:solidFill>
+              <a:latin typeface="Calibri"/>
+            </a:endParaRPr>
+          </a:p>
+        </p:txBody>
+      </p:sp>
+      <p:sp>
+        <p:nvSpPr>
+          <p:cNvPr id="27" name="TextBox 26"/>
+          <p:cNvSpPr txBox="1"/>
+          <p:nvPr/>
+        </p:nvSpPr>
+        <p:spPr>
+          <a:xfrm>
+            <a:off x="8961120" y="2834640"/>
+            <a:ext cx="2331720" cy="411480"/>
+          </a:xfrm>
+          <a:prstGeom prst="rect">
+            <a:avLst/>
+          </a:prstGeom>
+          <a:noFill/>
+        </p:spPr>
+        <p:txBody>
+          <a:bodyPr wrap="square" lIns="0" tIns="0" rIns="0" bIns="0" anchor="ctr">
+            <a:spAutoFit/>
+          </a:bodyPr>
+          <a:lstStyle/>
+          <a:p>
+            <a:pPr algn="ctr"/>
+            <a:r>
+              <a:rPr sz="1800" b="1">
+                <a:solidFill>
+                  <a:srgbClr val="2E6E43"/>
+                </a:solidFill>
+                <a:latin typeface="Calibri"/>
+              </a:rPr>
+              <a:t>✓</a:t>
+            </a:r>
+            <a:endParaRPr sz="1800" b="1">
+              <a:solidFill>
+                <a:srgbClr val="2E6E43"/>
+              </a:solidFill>
+              <a:latin typeface="Calibri"/>
+            </a:endParaRPr>
+          </a:p>
+        </p:txBody>
+      </p:sp>
+      <p:sp>
+        <p:nvSpPr>
+          <p:cNvPr id="32" name="Rectangle 31"/>
+          <p:cNvSpPr/>
+          <p:nvPr/>
+        </p:nvSpPr>
+        <p:spPr>
+          <a:xfrm>
+            <a:off x="640080" y="3246120"/>
+            <a:ext cx="10652760" cy="411480"/>
+          </a:xfrm>
+          <a:prstGeom prst="rect">
+            <a:avLst/>
+          </a:prstGeom>
+          <a:solidFill>
+            <a:srgbClr val="EEF0EE"/>
+          </a:solidFill>
+          <a:ln>
+            <a:noFill/>
+          </a:ln>
+          <a:effectLst/>
+        </p:spPr>
+        <p:style>
+          <a:lnRef idx="1">
+            <a:schemeClr val="accent1"/>
+          </a:lnRef>
+          <a:fillRef idx="3">
+            <a:schemeClr val="accent1"/>
+          </a:fillRef>
+          <a:effectRef idx="2">
+            <a:schemeClr val="accent1"/>
+          </a:effectRef>
+          <a:fontRef idx="minor">
+            <a:schemeClr val="lt1"/>
+          </a:fontRef>
+        </p:style>
+        <p:txBody>
+          <a:bodyPr rtlCol="0" anchor="ctr"/>
+          <a:lstStyle/>
+          <a:p>
+            <a:pPr algn="ctr"/>
+          </a:p>
+        </p:txBody>
+      </p:sp>
+      <p:sp>
+        <p:nvSpPr>
+          <p:cNvPr id="33" name="TextBox 32"/>
+          <p:cNvSpPr txBox="1"/>
+          <p:nvPr/>
+        </p:nvSpPr>
+        <p:spPr>
+          <a:xfrm>
+            <a:off x="777240" y="3246120"/>
+            <a:ext cx="3657600" cy="411480"/>
+          </a:xfrm>
+          <a:prstGeom prst="rect">
+            <a:avLst/>
+          </a:prstGeom>
+          <a:noFill/>
+        </p:spPr>
+        <p:txBody>
+          <a:bodyPr wrap="square" lIns="0" tIns="0" rIns="0" bIns="0" anchor="ctr">
+            <a:spAutoFit/>
+          </a:bodyPr>
+          <a:lstStyle/>
+          <a:p>
+            <a:pPr algn="l"/>
+            <a:r>
+              <a:rPr sz="1000" b="0">
+                <a:solidFill>
+                  <a:srgbClr val="3A423D"/>
+                </a:solidFill>
+                <a:latin typeface="Calibri"/>
+              </a:rPr>
+              <a:t>Activity reminders &amp; calendar</a:t>
+            </a:r>
+            <a:endParaRPr sz="1000" b="0">
+              <a:solidFill>
+                <a:srgbClr val="3A423D"/>
+              </a:solidFill>
+              <a:latin typeface="Calibri"/>
+            </a:endParaRPr>
+          </a:p>
+        </p:txBody>
+      </p:sp>
+      <p:sp>
+        <p:nvSpPr>
+          <p:cNvPr id="34" name="TextBox 33"/>
+          <p:cNvSpPr txBox="1"/>
+          <p:nvPr/>
+        </p:nvSpPr>
+        <p:spPr>
+          <a:xfrm>
+            <a:off x="4297680" y="3246120"/>
+            <a:ext cx="2331720" cy="411480"/>
+          </a:xfrm>
+          <a:prstGeom prst="rect">
+            <a:avLst/>
+          </a:prstGeom>
+          <a:noFill/>
+        </p:spPr>
+        <p:txBody>
+          <a:bodyPr wrap="square" lIns="0" tIns="0" rIns="0" bIns="0" anchor="ctr">
+            <a:spAutoFit/>
+          </a:bodyPr>
+          <a:lstStyle/>
+          <a:p>
+            <a:pPr algn="ctr"/>
+            <a:r>
+              <a:rPr sz="1800" b="1">
+                <a:solidFill>
+                  <a:srgbClr val="B0382A"/>
+                </a:solidFill>
+                <a:latin typeface="Calibri"/>
+              </a:rPr>
+              <a:t>✗</a:t>
+            </a:r>
+            <a:endParaRPr sz="1800" b="1">
+              <a:solidFill>
+                <a:srgbClr val="B0382A"/>
+              </a:solidFill>
+              <a:latin typeface="Calibri"/>
+            </a:endParaRPr>
+          </a:p>
+        </p:txBody>
+      </p:sp>
+      <p:sp>
+        <p:nvSpPr>
+          <p:cNvPr id="35" name="TextBox 34"/>
+          <p:cNvSpPr txBox="1"/>
+          <p:nvPr/>
+        </p:nvSpPr>
+        <p:spPr>
+          <a:xfrm>
+            <a:off x="6629400" y="3246120"/>
+            <a:ext cx="2331720" cy="411480"/>
+          </a:xfrm>
+          <a:prstGeom prst="rect">
+            <a:avLst/>
+          </a:prstGeom>
+          <a:noFill/>
+        </p:spPr>
+        <p:txBody>
+          <a:bodyPr wrap="square" lIns="0" tIns="0" rIns="0" bIns="0" anchor="ctr">
+            <a:spAutoFit/>
+          </a:bodyPr>
+          <a:lstStyle/>
+          <a:p>
+            <a:pPr algn="ctr"/>
+            <a:r>
+              <a:rPr sz="1800" b="1">
+                <a:solidFill>
+                  <a:srgbClr val="2E6E43"/>
+                </a:solidFill>
+                <a:latin typeface="Calibri"/>
+              </a:rPr>
+              <a:t>✓</a:t>
+            </a:r>
+            <a:endParaRPr sz="1800" b="1">
+              <a:solidFill>
+                <a:srgbClr val="2E6E43"/>
+              </a:solidFill>
+              <a:latin typeface="Calibri"/>
+            </a:endParaRPr>
+          </a:p>
+        </p:txBody>
+      </p:sp>
+      <p:sp>
+        <p:nvSpPr>
+          <p:cNvPr id="36" name="TextBox 35"/>
+          <p:cNvSpPr txBox="1"/>
+          <p:nvPr/>
+        </p:nvSpPr>
+        <p:spPr>
+          <a:xfrm>
+            <a:off x="8961120" y="3246120"/>
+            <a:ext cx="2331720" cy="411480"/>
+          </a:xfrm>
+          <a:prstGeom prst="rect">
+            <a:avLst/>
+          </a:prstGeom>
+          <a:noFill/>
+        </p:spPr>
+        <p:txBody>
+          <a:bodyPr wrap="square" lIns="0" tIns="0" rIns="0" bIns="0" anchor="ctr">
+            <a:spAutoFit/>
+          </a:bodyPr>
+          <a:lstStyle/>
+          <a:p>
+            <a:pPr algn="ctr"/>
+            <a:r>
+              <a:rPr sz="1800" b="1">
+                <a:solidFill>
+                  <a:srgbClr val="2E6E43"/>
+                </a:solidFill>
+                <a:latin typeface="Calibri"/>
+              </a:rPr>
+              <a:t>✓</a:t>
+            </a:r>
+            <a:endParaRPr sz="1800" b="1">
+              <a:solidFill>
+                <a:srgbClr val="2E6E43"/>
+              </a:solidFill>
+              <a:latin typeface="Calibri"/>
+            </a:endParaRPr>
+          </a:p>
+        </p:txBody>
+      </p:sp>
+      <p:sp>
+        <p:nvSpPr>
+          <p:cNvPr id="37" name="TextBox 36"/>
+          <p:cNvSpPr txBox="1"/>
+          <p:nvPr/>
+        </p:nvSpPr>
+        <p:spPr>
+          <a:xfrm>
+            <a:off x="777240" y="3657600"/>
+            <a:ext cx="3657600" cy="411480"/>
+          </a:xfrm>
+          <a:prstGeom prst="rect">
+            <a:avLst/>
+          </a:prstGeom>
+          <a:noFill/>
+        </p:spPr>
+        <p:txBody>
+          <a:bodyPr wrap="square" lIns="0" tIns="0" rIns="0" bIns="0" anchor="ctr">
+            <a:spAutoFit/>
+          </a:bodyPr>
+          <a:lstStyle/>
+          <a:p>
+            <a:pPr algn="l"/>
+            <a:r>
+              <a:rPr sz="1000" b="0">
+                <a:solidFill>
+                  <a:srgbClr val="3A423D"/>
+                </a:solidFill>
+                <a:latin typeface="Calibri"/>
+              </a:rPr>
+              <a:t>Backup &amp; restore</a:t>
+            </a:r>
+            <a:endParaRPr sz="1000" b="0">
+              <a:solidFill>
+                <a:srgbClr val="3A423D"/>
+              </a:solidFill>
+              <a:latin typeface="Calibri"/>
+            </a:endParaRPr>
+          </a:p>
+        </p:txBody>
+      </p:sp>
+      <p:sp>
+        <p:nvSpPr>
+          <p:cNvPr id="38" name="TextBox 37"/>
+          <p:cNvSpPr txBox="1"/>
+          <p:nvPr/>
+        </p:nvSpPr>
+        <p:spPr>
+          <a:xfrm>
+            <a:off x="4297680" y="3657600"/>
+            <a:ext cx="2331720" cy="411480"/>
+          </a:xfrm>
+          <a:prstGeom prst="rect">
+            <a:avLst/>
+          </a:prstGeom>
+          <a:noFill/>
+        </p:spPr>
+        <p:txBody>
+          <a:bodyPr wrap="square" lIns="0" tIns="0" rIns="0" bIns="0" anchor="ctr">
+            <a:spAutoFit/>
+          </a:bodyPr>
+          <a:lstStyle/>
+          <a:p>
+            <a:pPr algn="ctr"/>
+            <a:r>
+              <a:rPr sz="1800" b="1">
+                <a:solidFill>
+                  <a:srgbClr val="B0382A"/>
+                </a:solidFill>
+                <a:latin typeface="Calibri"/>
+              </a:rPr>
+              <a:t>✗</a:t>
+            </a:r>
+            <a:endParaRPr sz="1800" b="1">
+              <a:solidFill>
+                <a:srgbClr val="B0382A"/>
+              </a:solidFill>
+              <a:latin typeface="Calibri"/>
+            </a:endParaRPr>
+          </a:p>
+        </p:txBody>
+      </p:sp>
+      <p:sp>
+        <p:nvSpPr>
+          <p:cNvPr id="39" name="TextBox 38"/>
+          <p:cNvSpPr txBox="1"/>
+          <p:nvPr/>
+        </p:nvSpPr>
+        <p:spPr>
+          <a:xfrm>
+            <a:off x="6629400" y="3657600"/>
+            <a:ext cx="2331720" cy="411480"/>
+          </a:xfrm>
+          <a:prstGeom prst="rect">
+            <a:avLst/>
+          </a:prstGeom>
+          <a:noFill/>
+        </p:spPr>
+        <p:txBody>
+          <a:bodyPr wrap="square" lIns="0" tIns="0" rIns="0" bIns="0" anchor="ctr">
+            <a:spAutoFit/>
+          </a:bodyPr>
+          <a:lstStyle/>
+          <a:p>
+            <a:pPr algn="ctr"/>
+            <a:r>
+              <a:rPr sz="1800" b="1">
+                <a:solidFill>
+                  <a:srgbClr val="2E6E43"/>
+                </a:solidFill>
+                <a:latin typeface="Calibri"/>
+              </a:rPr>
+              <a:t>✓</a:t>
+            </a:r>
+            <a:endParaRPr sz="1800" b="1">
+              <a:solidFill>
+                <a:srgbClr val="2E6E43"/>
+              </a:solidFill>
+              <a:latin typeface="Calibri"/>
+            </a:endParaRPr>
+          </a:p>
+        </p:txBody>
+      </p:sp>
+      <p:sp>
+        <p:nvSpPr>
+          <p:cNvPr id="40" name="TextBox 39"/>
+          <p:cNvSpPr txBox="1"/>
+          <p:nvPr/>
+        </p:nvSpPr>
+        <p:spPr>
+          <a:xfrm>
+            <a:off x="8961120" y="3657600"/>
+            <a:ext cx="2331720" cy="411480"/>
+          </a:xfrm>
+          <a:prstGeom prst="rect">
+            <a:avLst/>
+          </a:prstGeom>
+          <a:noFill/>
+        </p:spPr>
+        <p:txBody>
+          <a:bodyPr wrap="square" lIns="0" tIns="0" rIns="0" bIns="0" anchor="ctr">
+            <a:spAutoFit/>
+          </a:bodyPr>
+          <a:lstStyle/>
+          <a:p>
+            <a:pPr algn="ctr"/>
+            <a:r>
+              <a:rPr sz="1800" b="1">
+                <a:solidFill>
+                  <a:srgbClr val="2E6E43"/>
+                </a:solidFill>
+                <a:latin typeface="Calibri"/>
+              </a:rPr>
+              <a:t>✓</a:t>
+            </a:r>
+            <a:endParaRPr sz="1800" b="1">
+              <a:solidFill>
+                <a:srgbClr val="2E6E43"/>
+              </a:solidFill>
+              <a:latin typeface="Calibri"/>
+            </a:endParaRPr>
+          </a:p>
+        </p:txBody>
+      </p:sp>
+      <p:sp>
+        <p:nvSpPr>
+          <p:cNvPr id="41" name="Rectangle 40"/>
+          <p:cNvSpPr/>
+          <p:nvPr/>
+        </p:nvSpPr>
+        <p:spPr>
+          <a:xfrm>
+            <a:off x="640080" y="4069080"/>
+            <a:ext cx="10652760" cy="411480"/>
+          </a:xfrm>
+          <a:prstGeom prst="rect">
+            <a:avLst/>
+          </a:prstGeom>
+          <a:solidFill>
+            <a:srgbClr val="EEF0EE"/>
+          </a:solidFill>
+          <a:ln>
+            <a:noFill/>
+          </a:ln>
+          <a:effectLst/>
+        </p:spPr>
+        <p:style>
+          <a:lnRef idx="1">
+            <a:schemeClr val="accent1"/>
+          </a:lnRef>
+          <a:fillRef idx="3">
+            <a:schemeClr val="accent1"/>
+          </a:fillRef>
+          <a:effectRef idx="2">
+            <a:schemeClr val="accent1"/>
+          </a:effectRef>
+          <a:fontRef idx="minor">
+            <a:schemeClr val="lt1"/>
+          </a:fontRef>
+        </p:style>
+        <p:txBody>
+          <a:bodyPr rtlCol="0" anchor="ctr"/>
+          <a:lstStyle/>
+          <a:p>
+            <a:pPr algn="ctr"/>
+          </a:p>
+        </p:txBody>
+      </p:sp>
+      <p:sp>
+        <p:nvSpPr>
+          <p:cNvPr id="42" name="TextBox 41"/>
+          <p:cNvSpPr txBox="1"/>
+          <p:nvPr/>
+        </p:nvSpPr>
+        <p:spPr>
+          <a:xfrm>
+            <a:off x="777240" y="4069080"/>
+            <a:ext cx="3657600" cy="411480"/>
+          </a:xfrm>
+          <a:prstGeom prst="rect">
+            <a:avLst/>
+          </a:prstGeom>
+          <a:noFill/>
+        </p:spPr>
+        <p:txBody>
+          <a:bodyPr wrap="square" lIns="0" tIns="0" rIns="0" bIns="0" anchor="ctr">
+            <a:spAutoFit/>
+          </a:bodyPr>
+          <a:lstStyle/>
+          <a:p>
+            <a:pPr algn="l"/>
+            <a:r>
+              <a:rPr sz="1000" b="0">
+                <a:solidFill>
+                  <a:srgbClr val="3A423D"/>
+                </a:solidFill>
+                <a:latin typeface="Calibri"/>
+              </a:rPr>
+              <a:t>Free, no account required</a:t>
+            </a:r>
+            <a:endParaRPr sz="1000" b="0">
+              <a:solidFill>
+                <a:srgbClr val="3A423D"/>
+              </a:solidFill>
+              <a:latin typeface="Calibri"/>
+            </a:endParaRPr>
+          </a:p>
+        </p:txBody>
+      </p:sp>
+      <p:sp>
+        <p:nvSpPr>
+          <p:cNvPr id="43" name="TextBox 42"/>
+          <p:cNvSpPr txBox="1"/>
+          <p:nvPr/>
+        </p:nvSpPr>
+        <p:spPr>
+          <a:xfrm>
+            <a:off x="4297680" y="4069080"/>
+            <a:ext cx="2331720" cy="411480"/>
+          </a:xfrm>
+          <a:prstGeom prst="rect">
+            <a:avLst/>
+          </a:prstGeom>
+          <a:noFill/>
+        </p:spPr>
+        <p:txBody>
+          <a:bodyPr wrap="square" lIns="0" tIns="0" rIns="0" bIns="0" anchor="ctr">
+            <a:spAutoFit/>
+          </a:bodyPr>
+          <a:lstStyle/>
+          <a:p>
+            <a:pPr algn="ctr"/>
+            <a:r>
+              <a:rPr sz="1800" b="1">
+                <a:solidFill>
+                  <a:srgbClr val="2E6E43"/>
+                </a:solidFill>
+                <a:latin typeface="Calibri"/>
+              </a:rPr>
+              <a:t>✓</a:t>
+            </a:r>
+            <a:endParaRPr sz="1800" b="1">
+              <a:solidFill>
+                <a:srgbClr val="2E6E43"/>
+              </a:solidFill>
+              <a:latin typeface="Calibri"/>
+            </a:endParaRPr>
+          </a:p>
+        </p:txBody>
+      </p:sp>
+      <p:sp>
+        <p:nvSpPr>
+          <p:cNvPr id="44" name="TextBox 43"/>
+          <p:cNvSpPr txBox="1"/>
+          <p:nvPr/>
+        </p:nvSpPr>
+        <p:spPr>
+          <a:xfrm>
+            <a:off x="6629400" y="4069080"/>
+            <a:ext cx="2331720" cy="411480"/>
+          </a:xfrm>
+          <a:prstGeom prst="rect">
+            <a:avLst/>
+          </a:prstGeom>
+          <a:noFill/>
+        </p:spPr>
+        <p:txBody>
+          <a:bodyPr wrap="square" lIns="0" tIns="0" rIns="0" bIns="0" anchor="ctr">
+            <a:spAutoFit/>
+          </a:bodyPr>
+          <a:lstStyle/>
+          <a:p>
+            <a:pPr algn="ctr"/>
+            <a:r>
+              <a:rPr sz="1800" b="1">
+                <a:solidFill>
+                  <a:srgbClr val="B0382A"/>
+                </a:solidFill>
+                <a:latin typeface="Calibri"/>
+              </a:rPr>
+              <a:t>✗</a:t>
+            </a:r>
+            <a:endParaRPr sz="1800" b="1">
+              <a:solidFill>
+                <a:srgbClr val="B0382A"/>
+              </a:solidFill>
+              <a:latin typeface="Calibri"/>
+            </a:endParaRPr>
+          </a:p>
+        </p:txBody>
+      </p:sp>
+      <p:sp>
+        <p:nvSpPr>
+          <p:cNvPr id="45" name="TextBox 44"/>
+          <p:cNvSpPr txBox="1"/>
+          <p:nvPr/>
+        </p:nvSpPr>
+        <p:spPr>
+          <a:xfrm>
+            <a:off x="8961120" y="4069080"/>
+            <a:ext cx="2331720" cy="411480"/>
+          </a:xfrm>
+          <a:prstGeom prst="rect">
+            <a:avLst/>
+          </a:prstGeom>
+          <a:noFill/>
+        </p:spPr>
+        <p:txBody>
+          <a:bodyPr wrap="square" lIns="0" tIns="0" rIns="0" bIns="0" anchor="ctr">
+            <a:spAutoFit/>
+          </a:bodyPr>
+          <a:lstStyle/>
+          <a:p>
+            <a:pPr algn="ctr"/>
+            <a:r>
+              <a:rPr sz="1800" b="1">
+                <a:solidFill>
+                  <a:srgbClr val="2E6E43"/>
+                </a:solidFill>
+                <a:latin typeface="Calibri"/>
+              </a:rPr>
+              <a:t>✓</a:t>
+            </a:r>
+            <a:endParaRPr sz="1800" b="1">
+              <a:solidFill>
+                <a:srgbClr val="2E6E43"/>
+              </a:solidFill>
+              <a:latin typeface="Calibri"/>
+            </a:endParaRPr>
+          </a:p>
+        </p:txBody>
+      </p:sp>
+      <p:sp>
+        <p:nvSpPr>
+          <p:cNvPr id="46" name="TextBox 45"/>
+          <p:cNvSpPr txBox="1"/>
+          <p:nvPr/>
+        </p:nvSpPr>
+        <p:spPr>
+          <a:xfrm>
+            <a:off x="777240" y="4480560"/>
+            <a:ext cx="3657600" cy="411480"/>
+          </a:xfrm>
+          <a:prstGeom prst="rect">
+            <a:avLst/>
+          </a:prstGeom>
+          <a:noFill/>
+        </p:spPr>
+        <p:txBody>
+          <a:bodyPr wrap="square" lIns="0" tIns="0" rIns="0" bIns="0" anchor="ctr">
+            <a:spAutoFit/>
+          </a:bodyPr>
+          <a:lstStyle/>
+          <a:p>
+            <a:pPr algn="l"/>
+            <a:r>
+              <a:rPr sz="1000" b="0">
+                <a:solidFill>
+                  <a:srgbClr val="3A423D"/>
+                </a:solidFill>
+                <a:latin typeface="Calibri"/>
+              </a:rPr>
+              <a:t>Designed for Cambodian farmers</a:t>
+            </a:r>
+            <a:endParaRPr sz="1000" b="0">
+              <a:solidFill>
+                <a:srgbClr val="3A423D"/>
+              </a:solidFill>
+              <a:latin typeface="Calibri"/>
+            </a:endParaRPr>
+          </a:p>
+        </p:txBody>
+      </p:sp>
+      <p:sp>
+        <p:nvSpPr>
+          <p:cNvPr id="47" name="TextBox 46"/>
+          <p:cNvSpPr txBox="1"/>
+          <p:nvPr/>
+        </p:nvSpPr>
+        <p:spPr>
+          <a:xfrm>
+            <a:off x="4297680" y="4480560"/>
+            <a:ext cx="2331720" cy="411480"/>
+          </a:xfrm>
+          <a:prstGeom prst="rect">
+            <a:avLst/>
+          </a:prstGeom>
+          <a:noFill/>
+        </p:spPr>
+        <p:txBody>
+          <a:bodyPr wrap="square" lIns="0" tIns="0" rIns="0" bIns="0" anchor="ctr">
+            <a:spAutoFit/>
+          </a:bodyPr>
+          <a:lstStyle/>
+          <a:p>
+            <a:pPr algn="ctr"/>
+            <a:r>
+              <a:rPr sz="1800" b="1">
+                <a:solidFill>
+                  <a:srgbClr val="8B5A2B"/>
+                </a:solidFill>
+                <a:latin typeface="Calibri"/>
+              </a:rPr>
+              <a:t>~</a:t>
+            </a:r>
+            <a:endParaRPr sz="1800" b="1">
+              <a:solidFill>
+                <a:srgbClr val="8B5A2B"/>
+              </a:solidFill>
+              <a:latin typeface="Calibri"/>
+            </a:endParaRPr>
+          </a:p>
+        </p:txBody>
+      </p:sp>
+      <p:sp>
+        <p:nvSpPr>
+          <p:cNvPr id="48" name="TextBox 47"/>
+          <p:cNvSpPr txBox="1"/>
+          <p:nvPr/>
+        </p:nvSpPr>
+        <p:spPr>
+          <a:xfrm>
+            <a:off x="6629400" y="4480560"/>
+            <a:ext cx="2331720" cy="411480"/>
+          </a:xfrm>
+          <a:prstGeom prst="rect">
+            <a:avLst/>
+          </a:prstGeom>
+          <a:noFill/>
+        </p:spPr>
+        <p:txBody>
+          <a:bodyPr wrap="square" lIns="0" tIns="0" rIns="0" bIns="0" anchor="ctr">
+            <a:spAutoFit/>
+          </a:bodyPr>
+          <a:lstStyle/>
+          <a:p>
+            <a:pPr algn="ctr"/>
+            <a:r>
+              <a:rPr sz="1800" b="1">
+                <a:solidFill>
+                  <a:srgbClr val="B0382A"/>
+                </a:solidFill>
+                <a:latin typeface="Calibri"/>
+              </a:rPr>
+              <a:t>✗</a:t>
+            </a:r>
+            <a:endParaRPr sz="1800" b="1">
+              <a:solidFill>
+                <a:srgbClr val="B0382A"/>
+              </a:solidFill>
+              <a:latin typeface="Calibri"/>
+            </a:endParaRPr>
+          </a:p>
+        </p:txBody>
+      </p:sp>
+      <p:sp>
+        <p:nvSpPr>
+          <p:cNvPr id="49" name="TextBox 48"/>
+          <p:cNvSpPr txBox="1"/>
+          <p:nvPr/>
+        </p:nvSpPr>
+        <p:spPr>
+          <a:xfrm>
+            <a:off x="8961120" y="4480560"/>
+            <a:ext cx="2331720" cy="411480"/>
+          </a:xfrm>
+          <a:prstGeom prst="rect">
+            <a:avLst/>
+          </a:prstGeom>
+          <a:noFill/>
+        </p:spPr>
+        <p:txBody>
+          <a:bodyPr wrap="square" lIns="0" tIns="0" rIns="0" bIns="0" anchor="ctr">
+            <a:spAutoFit/>
+          </a:bodyPr>
+          <a:lstStyle/>
+          <a:p>
+            <a:pPr algn="ctr"/>
+            <a:r>
+              <a:rPr sz="1800" b="1">
+                <a:solidFill>
+                  <a:srgbClr val="2E6E43"/>
+                </a:solidFill>
+                <a:latin typeface="Calibri"/>
+              </a:rPr>
+              <a:t>✓</a:t>
+            </a:r>
+            <a:endParaRPr sz="1800" b="1">
+              <a:solidFill>
+                <a:srgbClr val="2E6E43"/>
+              </a:solidFill>
+              <a:latin typeface="Calibri"/>
+            </a:endParaRPr>
+          </a:p>
+        </p:txBody>
+      </p:sp>
+      <p:sp>
+        <p:nvSpPr>
+          <p:cNvPr id="50" name="Rounded Rectangle 49"/>
+          <p:cNvSpPr/>
+          <p:nvPr/>
+        </p:nvSpPr>
+        <p:spPr>
+          <a:xfrm>
+            <a:off x="640080" y="5532120"/>
+            <a:ext cx="10881360" cy="502920"/>
+          </a:xfrm>
+          <a:prstGeom prst="roundRect">
+            <a:avLst/>
+          </a:prstGeom>
+          <a:solidFill>
+            <a:srgbClr val="2E6E43"/>
+          </a:solidFill>
+          <a:ln>
+            <a:noFill/>
+          </a:ln>
+          <a:effectLst/>
+        </p:spPr>
+        <p:style>
+          <a:lnRef idx="1">
+            <a:schemeClr val="accent1"/>
+          </a:lnRef>
+          <a:fillRef idx="3">
+            <a:schemeClr val="accent1"/>
+          </a:fillRef>
+          <a:effectRef idx="2">
+            <a:schemeClr val="accent1"/>
+          </a:effectRef>
+          <a:fontRef idx="minor">
+            <a:schemeClr val="lt1"/>
+          </a:fontRef>
+        </p:style>
+        <p:txBody>
+          <a:bodyPr rtlCol="0" anchor="ctr"/>
+          <a:lstStyle/>
+          <a:p>
+            <a:pPr algn="ctr"/>
+          </a:p>
+        </p:txBody>
+      </p:sp>
+      <p:sp>
+        <p:nvSpPr>
+          <p:cNvPr id="51" name="TextBox 50"/>
+          <p:cNvSpPr txBox="1"/>
+          <p:nvPr/>
+        </p:nvSpPr>
+        <p:spPr>
+          <a:xfrm>
+            <a:off x="640080" y="5577840"/>
+            <a:ext cx="10881360" cy="457200"/>
+          </a:xfrm>
+          <a:prstGeom prst="rect">
+            <a:avLst/>
+          </a:prstGeom>
+          <a:noFill/>
+        </p:spPr>
+        <p:txBody>
+          <a:bodyPr wrap="square" lIns="0" tIns="0" rIns="0" bIns="0" anchor="ctr">
+            <a:spAutoFit/>
+          </a:bodyPr>
+          <a:lstStyle/>
+          <a:p>
+            <a:pPr algn="ctr"/>
+            <a:r>
+              <a:rPr sz="1200" b="1">
+                <a:solidFill>
+                  <a:srgbClr val="FFFFFF"/>
+                </a:solidFill>
+                <a:latin typeface="Calibri"/>
+              </a:rPr>
+              <a:t>SmartFarm is the only offline, Khmer-first option built specifically for rural Cambodian farmers.</a:t>
+            </a:r>
+            <a:endParaRPr sz="1200" b="1">
+              <a:solidFill>
+                <a:srgbClr val="FFFFFF"/>
+              </a:solidFill>
+              <a:latin typeface="Calibri"/>
+            </a:endParaRPr>
+          </a:p>
+        </p:txBody>
+      </p:sp>
+      <p:sp>
+        <p:nvSpPr>
+          <p:cNvPr id="53" name="TextBox 52"/>
+          <p:cNvSpPr txBox="1"/>
+          <p:nvPr/>
+        </p:nvSpPr>
+        <p:spPr>
+          <a:xfrm>
+            <a:off x="10698480" y="6035040"/>
+            <a:ext cx="1005840" cy="274320"/>
           </a:xfrm>
           <a:prstGeom prst="rect">
             <a:avLst/>
@@ -5763,136 +7056,6 @@
           </a:bodyPr>
           <a:lstStyle/>
           <a:p>
-            <a:pPr algn="l"/>
-            <a:r>
-              <a:rPr sz="1200" b="1">
-                <a:solidFill>
-                  <a:srgbClr val="1F4D2E"/>
-                </a:solidFill>
-                <a:latin typeface="Calibri"/>
-              </a:rPr>
-              <a:t>What we have right now</a:t>
-            </a:r>
-            <a:endParaRPr sz="1200" b="1">
-              <a:solidFill>
-                <a:srgbClr val="1F4D2E"/>
-              </a:solidFill>
-              <a:latin typeface="Calibri"/>
-            </a:endParaRPr>
-          </a:p>
-        </p:txBody>
-      </p:sp>
-      <p:sp>
-        <p:nvSpPr>
-          <p:cNvPr id="20" name="TextBox 19"/>
-          <p:cNvSpPr txBox="1"/>
-          <p:nvPr/>
-        </p:nvSpPr>
-        <p:spPr>
-          <a:xfrm>
-            <a:off x="868680" y="4754880"/>
-            <a:ext cx="10515600" cy="1107440"/>
-          </a:xfrm>
-          <a:prstGeom prst="rect">
-            <a:avLst/>
-          </a:prstGeom>
-          <a:noFill/>
-        </p:spPr>
-        <p:txBody>
-          <a:bodyPr wrap="square" lIns="0" tIns="0" rIns="0" bIns="0" anchor="t">
-            <a:spAutoFit/>
-          </a:bodyPr>
-          <a:lstStyle/>
-          <a:p>
-            <a:pPr indent="0" algn="l" fontAlgn="auto">
-              <a:lnSpc>
-                <a:spcPct val="200000"/>
-              </a:lnSpc>
-            </a:pPr>
-            <a:r>
-              <a:rPr sz="1200" b="0">
-                <a:solidFill>
-                  <a:srgbClr val="3A423D"/>
-                </a:solidFill>
-                <a:latin typeface="Calibri"/>
-              </a:rPr>
-              <a:t>•  A working app, not a deck — every feature on the previous slides is built and runs offline today.</a:t>
-            </a:r>
-            <a:endParaRPr sz="1200" b="0">
-              <a:solidFill>
-                <a:srgbClr val="3A423D"/>
-              </a:solidFill>
-              <a:latin typeface="Calibri"/>
-            </a:endParaRPr>
-          </a:p>
-          <a:p>
-            <a:pPr indent="0" algn="l" fontAlgn="auto">
-              <a:lnSpc>
-                <a:spcPct val="200000"/>
-              </a:lnSpc>
-            </a:pPr>
-            <a:r>
-              <a:rPr sz="1200" b="0">
-                <a:solidFill>
-                  <a:srgbClr val="3A423D"/>
-                </a:solidFill>
-                <a:latin typeface="Calibri"/>
-              </a:rPr>
-              <a:t>•  Khmer UX validated against the real domain (categories, activity types, common pests).</a:t>
-            </a:r>
-            <a:endParaRPr sz="1200" b="0">
-              <a:solidFill>
-                <a:srgbClr val="3A423D"/>
-              </a:solidFill>
-              <a:latin typeface="Calibri"/>
-            </a:endParaRPr>
-          </a:p>
-          <a:p>
-            <a:pPr indent="0" algn="l" fontAlgn="auto">
-              <a:lnSpc>
-                <a:spcPct val="200000"/>
-              </a:lnSpc>
-            </a:pPr>
-            <a:r>
-              <a:rPr sz="1200" b="0">
-                <a:solidFill>
-                  <a:srgbClr val="3A423D"/>
-                </a:solidFill>
-                <a:latin typeface="Calibri"/>
-              </a:rPr>
-              <a:t>•  A clear, conservative roadmap to a native iOS app supporting devices farmers actually own.</a:t>
-            </a:r>
-            <a:endParaRPr sz="1200" b="0">
-              <a:solidFill>
-                <a:srgbClr val="3A423D"/>
-              </a:solidFill>
-              <a:latin typeface="Calibri"/>
-            </a:endParaRPr>
-          </a:p>
-        </p:txBody>
-      </p:sp>
-      <p:sp>
-        <p:nvSpPr>
-          <p:cNvPr id="22" name="TextBox 21"/>
-          <p:cNvSpPr txBox="1"/>
-          <p:nvPr/>
-        </p:nvSpPr>
-        <p:spPr>
-          <a:xfrm>
-            <a:off x="10698480" y="6446520"/>
-            <a:ext cx="1005840" cy="274320"/>
-          </a:xfrm>
-          <a:prstGeom prst="rect">
-            <a:avLst/>
-          </a:prstGeom>
-          <a:noFill/>
-        </p:spPr>
-        <p:txBody>
-          <a:bodyPr wrap="square" lIns="0" tIns="0" rIns="0" bIns="0" anchor="t">
-            <a:spAutoFit/>
-          </a:bodyPr>
-          <a:lstStyle/>
-          <a:p>
             <a:pPr algn="r"/>
             <a:r>
               <a:rPr sz="900" b="0">
@@ -5901,7 +7064,7 @@
                 </a:solidFill>
                 <a:latin typeface="Calibri"/>
               </a:rPr>
-              <a:t>11 / 16</a:t>
+              <a:t>11 / 15</a:t>
             </a:r>
             <a:endParaRPr sz="900" b="0">
               <a:solidFill>
@@ -5920,7 +7083,7 @@
         </p:nvSpPr>
         <p:spPr>
           <a:xfrm>
-            <a:off x="548640" y="6582410"/>
+            <a:off x="548640" y="6170930"/>
             <a:ext cx="5486400" cy="138430"/>
           </a:xfrm>
           <a:prstGeom prst="rect">
@@ -6025,2182 +7188,6 @@
         </p:nvSpPr>
         <p:spPr>
           <a:xfrm>
-            <a:off x="548640" y="502920"/>
-            <a:ext cx="164592" cy="411480"/>
-          </a:xfrm>
-          <a:prstGeom prst="rect">
-            <a:avLst/>
-          </a:prstGeom>
-          <a:solidFill>
-            <a:srgbClr val="2E6E43"/>
-          </a:solidFill>
-          <a:ln>
-            <a:noFill/>
-          </a:ln>
-          <a:effectLst/>
-        </p:spPr>
-        <p:style>
-          <a:lnRef idx="1">
-            <a:schemeClr val="accent1"/>
-          </a:lnRef>
-          <a:fillRef idx="3">
-            <a:schemeClr val="accent1"/>
-          </a:fillRef>
-          <a:effectRef idx="2">
-            <a:schemeClr val="accent1"/>
-          </a:effectRef>
-          <a:fontRef idx="minor">
-            <a:schemeClr val="lt1"/>
-          </a:fontRef>
-        </p:style>
-        <p:txBody>
-          <a:bodyPr rtlCol="0" anchor="ctr"/>
-          <a:lstStyle/>
-          <a:p>
-            <a:pPr algn="ctr"/>
-          </a:p>
-        </p:txBody>
-      </p:sp>
-      <p:sp>
-        <p:nvSpPr>
-          <p:cNvPr id="4" name="TextBox 3"/>
-          <p:cNvSpPr txBox="1"/>
-          <p:nvPr/>
-        </p:nvSpPr>
-        <p:spPr>
-          <a:xfrm>
-            <a:off x="822960" y="457200"/>
-            <a:ext cx="7315200" cy="365760"/>
-          </a:xfrm>
-          <a:prstGeom prst="rect">
-            <a:avLst/>
-          </a:prstGeom>
-          <a:noFill/>
-        </p:spPr>
-        <p:txBody>
-          <a:bodyPr wrap="square" lIns="0" tIns="0" rIns="0" bIns="0" anchor="t">
-            <a:spAutoFit/>
-          </a:bodyPr>
-          <a:lstStyle/>
-          <a:p>
-            <a:pPr algn="l"/>
-            <a:r>
-              <a:rPr sz="1100" b="1">
-                <a:solidFill>
-                  <a:srgbClr val="2E6E43"/>
-                </a:solidFill>
-                <a:latin typeface="Calibri"/>
-              </a:rPr>
-              <a:t>COMPETITIVE LANDSCAPE</a:t>
-            </a:r>
-            <a:endParaRPr sz="1100" b="1">
-              <a:solidFill>
-                <a:srgbClr val="2E6E43"/>
-              </a:solidFill>
-              <a:latin typeface="Calibri"/>
-            </a:endParaRPr>
-          </a:p>
-        </p:txBody>
-      </p:sp>
-      <p:sp>
-        <p:nvSpPr>
-          <p:cNvPr id="5" name="TextBox 4"/>
-          <p:cNvSpPr txBox="1"/>
-          <p:nvPr/>
-        </p:nvSpPr>
-        <p:spPr>
-          <a:xfrm>
-            <a:off x="822960" y="777240"/>
-            <a:ext cx="10515600" cy="640080"/>
-          </a:xfrm>
-          <a:prstGeom prst="rect">
-            <a:avLst/>
-          </a:prstGeom>
-          <a:noFill/>
-        </p:spPr>
-        <p:txBody>
-          <a:bodyPr wrap="square" lIns="0" tIns="0" rIns="0" bIns="0" anchor="t">
-            <a:spAutoFit/>
-          </a:bodyPr>
-          <a:lstStyle/>
-          <a:p>
-            <a:pPr algn="l"/>
-            <a:r>
-              <a:rPr sz="2800" b="1">
-                <a:solidFill>
-                  <a:srgbClr val="1A1F1C"/>
-                </a:solidFill>
-                <a:latin typeface="Calibri"/>
-              </a:rPr>
-              <a:t>Why farmers will pick SmartFarm over what they have today</a:t>
-            </a:r>
-            <a:endParaRPr sz="2800" b="1">
-              <a:solidFill>
-                <a:srgbClr val="1A1F1C"/>
-              </a:solidFill>
-              <a:latin typeface="Calibri"/>
-            </a:endParaRPr>
-          </a:p>
-        </p:txBody>
-      </p:sp>
-      <p:sp>
-        <p:nvSpPr>
-          <p:cNvPr id="6" name="TextBox 5"/>
-          <p:cNvSpPr txBox="1"/>
-          <p:nvPr/>
-        </p:nvSpPr>
-        <p:spPr>
-          <a:xfrm>
-            <a:off x="640080" y="1554480"/>
-            <a:ext cx="3657600" cy="411480"/>
-          </a:xfrm>
-          <a:prstGeom prst="rect">
-            <a:avLst/>
-          </a:prstGeom>
-          <a:noFill/>
-        </p:spPr>
-        <p:txBody>
-          <a:bodyPr wrap="square" lIns="0" tIns="0" rIns="0" bIns="0" anchor="ctr">
-            <a:spAutoFit/>
-          </a:bodyPr>
-          <a:lstStyle/>
-          <a:p>
-            <a:pPr algn="l"/>
-            <a:r>
-              <a:rPr sz="1100" b="1">
-                <a:solidFill>
-                  <a:srgbClr val="3A423D"/>
-                </a:solidFill>
-                <a:latin typeface="Calibri"/>
-              </a:rPr>
-              <a:t>Feature</a:t>
-            </a:r>
-            <a:endParaRPr sz="1100" b="1">
-              <a:solidFill>
-                <a:srgbClr val="3A423D"/>
-              </a:solidFill>
-              <a:latin typeface="Calibri"/>
-            </a:endParaRPr>
-          </a:p>
-        </p:txBody>
-      </p:sp>
-      <p:sp>
-        <p:nvSpPr>
-          <p:cNvPr id="7" name="TextBox 6"/>
-          <p:cNvSpPr txBox="1"/>
-          <p:nvPr/>
-        </p:nvSpPr>
-        <p:spPr>
-          <a:xfrm>
-            <a:off x="4297680" y="1591056"/>
-            <a:ext cx="2331720" cy="201168"/>
-          </a:xfrm>
-          <a:prstGeom prst="rect">
-            <a:avLst/>
-          </a:prstGeom>
-          <a:noFill/>
-        </p:spPr>
-        <p:txBody>
-          <a:bodyPr wrap="square" lIns="0" tIns="0" rIns="0" bIns="0" anchor="t">
-            <a:spAutoFit/>
-          </a:bodyPr>
-          <a:lstStyle/>
-          <a:p>
-            <a:pPr algn="ctr"/>
-            <a:r>
-              <a:rPr sz="1100" b="1">
-                <a:solidFill>
-                  <a:srgbClr val="6B6E6A"/>
-                </a:solidFill>
-                <a:latin typeface="Calibri"/>
-              </a:rPr>
-              <a:t>Paper notebook</a:t>
-            </a:r>
-            <a:endParaRPr sz="1100" b="1">
-              <a:solidFill>
-                <a:srgbClr val="6B6E6A"/>
-              </a:solidFill>
-              <a:latin typeface="Calibri"/>
-            </a:endParaRPr>
-          </a:p>
-        </p:txBody>
-      </p:sp>
-      <p:sp>
-        <p:nvSpPr>
-          <p:cNvPr id="8" name="TextBox 7"/>
-          <p:cNvSpPr txBox="1"/>
-          <p:nvPr/>
-        </p:nvSpPr>
-        <p:spPr>
-          <a:xfrm>
-            <a:off x="4297680" y="1773936"/>
-            <a:ext cx="2331720" cy="164592"/>
-          </a:xfrm>
-          <a:prstGeom prst="rect">
-            <a:avLst/>
-          </a:prstGeom>
-          <a:noFill/>
-        </p:spPr>
-        <p:txBody>
-          <a:bodyPr wrap="square" lIns="0" tIns="0" rIns="0" bIns="0" anchor="t">
-            <a:spAutoFit/>
-          </a:bodyPr>
-          <a:lstStyle/>
-          <a:p>
-            <a:pPr algn="ctr"/>
-            <a:r>
-              <a:rPr sz="800" b="0">
-                <a:solidFill>
-                  <a:srgbClr val="B0B4B1"/>
-                </a:solidFill>
-                <a:latin typeface="Calibri"/>
-              </a:rPr>
-              <a:t>(today)</a:t>
-            </a:r>
-            <a:endParaRPr sz="800" b="0">
-              <a:solidFill>
-                <a:srgbClr val="B0B4B1"/>
-              </a:solidFill>
-              <a:latin typeface="Calibri"/>
-            </a:endParaRPr>
-          </a:p>
-        </p:txBody>
-      </p:sp>
-      <p:sp>
-        <p:nvSpPr>
-          <p:cNvPr id="9" name="TextBox 8"/>
-          <p:cNvSpPr txBox="1"/>
-          <p:nvPr/>
-        </p:nvSpPr>
-        <p:spPr>
-          <a:xfrm>
-            <a:off x="6629400" y="1591056"/>
-            <a:ext cx="2331720" cy="201168"/>
-          </a:xfrm>
-          <a:prstGeom prst="rect">
-            <a:avLst/>
-          </a:prstGeom>
-          <a:noFill/>
-        </p:spPr>
-        <p:txBody>
-          <a:bodyPr wrap="square" lIns="0" tIns="0" rIns="0" bIns="0" anchor="t">
-            <a:spAutoFit/>
-          </a:bodyPr>
-          <a:lstStyle/>
-          <a:p>
-            <a:pPr algn="ctr"/>
-            <a:r>
-              <a:rPr sz="1100" b="1">
-                <a:solidFill>
-                  <a:srgbClr val="8B5A2B"/>
-                </a:solidFill>
-                <a:latin typeface="Calibri"/>
-              </a:rPr>
-              <a:t>Cloud farming app</a:t>
-            </a:r>
-            <a:endParaRPr sz="1100" b="1">
-              <a:solidFill>
-                <a:srgbClr val="8B5A2B"/>
-              </a:solidFill>
-              <a:latin typeface="Calibri"/>
-            </a:endParaRPr>
-          </a:p>
-        </p:txBody>
-      </p:sp>
-      <p:sp>
-        <p:nvSpPr>
-          <p:cNvPr id="10" name="TextBox 9"/>
-          <p:cNvSpPr txBox="1"/>
-          <p:nvPr/>
-        </p:nvSpPr>
-        <p:spPr>
-          <a:xfrm>
-            <a:off x="6629400" y="1773936"/>
-            <a:ext cx="2331720" cy="164592"/>
-          </a:xfrm>
-          <a:prstGeom prst="rect">
-            <a:avLst/>
-          </a:prstGeom>
-          <a:noFill/>
-        </p:spPr>
-        <p:txBody>
-          <a:bodyPr wrap="square" lIns="0" tIns="0" rIns="0" bIns="0" anchor="t">
-            <a:spAutoFit/>
-          </a:bodyPr>
-          <a:lstStyle/>
-          <a:p>
-            <a:pPr algn="ctr"/>
-            <a:r>
-              <a:rPr sz="800" b="0">
-                <a:solidFill>
-                  <a:srgbClr val="B0B4B1"/>
-                </a:solidFill>
-                <a:latin typeface="Calibri"/>
-              </a:rPr>
-              <a:t>e.g. Plantix</a:t>
-            </a:r>
-            <a:endParaRPr sz="800" b="0">
-              <a:solidFill>
-                <a:srgbClr val="B0B4B1"/>
-              </a:solidFill>
-              <a:latin typeface="Calibri"/>
-            </a:endParaRPr>
-          </a:p>
-        </p:txBody>
-      </p:sp>
-      <p:sp>
-        <p:nvSpPr>
-          <p:cNvPr id="11" name="Rounded Rectangle 10"/>
-          <p:cNvSpPr/>
-          <p:nvPr/>
-        </p:nvSpPr>
-        <p:spPr>
-          <a:xfrm>
-            <a:off x="8961120" y="1554480"/>
-            <a:ext cx="2331720" cy="411480"/>
-          </a:xfrm>
-          <a:prstGeom prst="roundRect">
-            <a:avLst/>
-          </a:prstGeom>
-          <a:solidFill>
-            <a:srgbClr val="E8F3EB"/>
-          </a:solidFill>
-          <a:ln>
-            <a:noFill/>
-          </a:ln>
-          <a:effectLst/>
-        </p:spPr>
-        <p:style>
-          <a:lnRef idx="1">
-            <a:schemeClr val="accent1"/>
-          </a:lnRef>
-          <a:fillRef idx="3">
-            <a:schemeClr val="accent1"/>
-          </a:fillRef>
-          <a:effectRef idx="2">
-            <a:schemeClr val="accent1"/>
-          </a:effectRef>
-          <a:fontRef idx="minor">
-            <a:schemeClr val="lt1"/>
-          </a:fontRef>
-        </p:style>
-        <p:txBody>
-          <a:bodyPr rtlCol="0" anchor="ctr"/>
-          <a:lstStyle/>
-          <a:p>
-            <a:pPr algn="ctr"/>
-          </a:p>
-        </p:txBody>
-      </p:sp>
-      <p:sp>
-        <p:nvSpPr>
-          <p:cNvPr id="12" name="TextBox 11"/>
-          <p:cNvSpPr txBox="1"/>
-          <p:nvPr/>
-        </p:nvSpPr>
-        <p:spPr>
-          <a:xfrm>
-            <a:off x="8961120" y="1591056"/>
-            <a:ext cx="2331720" cy="201168"/>
-          </a:xfrm>
-          <a:prstGeom prst="rect">
-            <a:avLst/>
-          </a:prstGeom>
-          <a:noFill/>
-        </p:spPr>
-        <p:txBody>
-          <a:bodyPr wrap="square" lIns="0" tIns="0" rIns="0" bIns="0" anchor="t">
-            <a:spAutoFit/>
-          </a:bodyPr>
-          <a:lstStyle/>
-          <a:p>
-            <a:pPr algn="ctr"/>
-            <a:r>
-              <a:rPr sz="1100" b="1">
-                <a:solidFill>
-                  <a:srgbClr val="1F4D2E"/>
-                </a:solidFill>
-                <a:latin typeface="Calibri"/>
-              </a:rPr>
-              <a:t>SmartFarm</a:t>
-            </a:r>
-            <a:endParaRPr sz="1100" b="1">
-              <a:solidFill>
-                <a:srgbClr val="1F4D2E"/>
-              </a:solidFill>
-              <a:latin typeface="Calibri"/>
-            </a:endParaRPr>
-          </a:p>
-        </p:txBody>
-      </p:sp>
-      <p:sp>
-        <p:nvSpPr>
-          <p:cNvPr id="13" name="TextBox 12"/>
-          <p:cNvSpPr txBox="1"/>
-          <p:nvPr/>
-        </p:nvSpPr>
-        <p:spPr>
-          <a:xfrm>
-            <a:off x="8961120" y="1773936"/>
-            <a:ext cx="2331720" cy="164592"/>
-          </a:xfrm>
-          <a:prstGeom prst="rect">
-            <a:avLst/>
-          </a:prstGeom>
-          <a:noFill/>
-        </p:spPr>
-        <p:txBody>
-          <a:bodyPr wrap="square" lIns="0" tIns="0" rIns="0" bIns="0" anchor="t">
-            <a:spAutoFit/>
-          </a:bodyPr>
-          <a:lstStyle/>
-          <a:p>
-            <a:pPr algn="ctr"/>
-            <a:r>
-              <a:rPr sz="800" b="0">
-                <a:solidFill>
-                  <a:srgbClr val="B0B4B1"/>
-                </a:solidFill>
-                <a:latin typeface="Calibri"/>
-              </a:rPr>
-              <a:t>(us)</a:t>
-            </a:r>
-            <a:endParaRPr sz="800" b="0">
-              <a:solidFill>
-                <a:srgbClr val="B0B4B1"/>
-              </a:solidFill>
-              <a:latin typeface="Calibri"/>
-            </a:endParaRPr>
-          </a:p>
-        </p:txBody>
-      </p:sp>
-      <p:sp>
-        <p:nvSpPr>
-          <p:cNvPr id="14" name="Rectangle 13"/>
-          <p:cNvSpPr/>
-          <p:nvPr/>
-        </p:nvSpPr>
-        <p:spPr>
-          <a:xfrm>
-            <a:off x="640080" y="2011680"/>
-            <a:ext cx="10652760" cy="411480"/>
-          </a:xfrm>
-          <a:prstGeom prst="rect">
-            <a:avLst/>
-          </a:prstGeom>
-          <a:solidFill>
-            <a:srgbClr val="EEF0EE"/>
-          </a:solidFill>
-          <a:ln>
-            <a:noFill/>
-          </a:ln>
-          <a:effectLst/>
-        </p:spPr>
-        <p:style>
-          <a:lnRef idx="1">
-            <a:schemeClr val="accent1"/>
-          </a:lnRef>
-          <a:fillRef idx="3">
-            <a:schemeClr val="accent1"/>
-          </a:fillRef>
-          <a:effectRef idx="2">
-            <a:schemeClr val="accent1"/>
-          </a:effectRef>
-          <a:fontRef idx="minor">
-            <a:schemeClr val="lt1"/>
-          </a:fontRef>
-        </p:style>
-        <p:txBody>
-          <a:bodyPr rtlCol="0" anchor="ctr"/>
-          <a:lstStyle/>
-          <a:p>
-            <a:pPr algn="ctr"/>
-          </a:p>
-        </p:txBody>
-      </p:sp>
-      <p:sp>
-        <p:nvSpPr>
-          <p:cNvPr id="15" name="TextBox 14"/>
-          <p:cNvSpPr txBox="1"/>
-          <p:nvPr/>
-        </p:nvSpPr>
-        <p:spPr>
-          <a:xfrm>
-            <a:off x="777240" y="2011680"/>
-            <a:ext cx="3657600" cy="411480"/>
-          </a:xfrm>
-          <a:prstGeom prst="rect">
-            <a:avLst/>
-          </a:prstGeom>
-          <a:noFill/>
-        </p:spPr>
-        <p:txBody>
-          <a:bodyPr wrap="square" lIns="0" tIns="0" rIns="0" bIns="0" anchor="ctr">
-            <a:spAutoFit/>
-          </a:bodyPr>
-          <a:lstStyle/>
-          <a:p>
-            <a:pPr algn="l"/>
-            <a:r>
-              <a:rPr sz="1000" b="0">
-                <a:solidFill>
-                  <a:srgbClr val="3A423D"/>
-                </a:solidFill>
-                <a:latin typeface="Calibri"/>
-              </a:rPr>
-              <a:t>Works fully offline</a:t>
-            </a:r>
-            <a:endParaRPr sz="1000" b="0">
-              <a:solidFill>
-                <a:srgbClr val="3A423D"/>
-              </a:solidFill>
-              <a:latin typeface="Calibri"/>
-            </a:endParaRPr>
-          </a:p>
-        </p:txBody>
-      </p:sp>
-      <p:sp>
-        <p:nvSpPr>
-          <p:cNvPr id="16" name="TextBox 15"/>
-          <p:cNvSpPr txBox="1"/>
-          <p:nvPr/>
-        </p:nvSpPr>
-        <p:spPr>
-          <a:xfrm>
-            <a:off x="4297680" y="2011680"/>
-            <a:ext cx="2331720" cy="411480"/>
-          </a:xfrm>
-          <a:prstGeom prst="rect">
-            <a:avLst/>
-          </a:prstGeom>
-          <a:noFill/>
-        </p:spPr>
-        <p:txBody>
-          <a:bodyPr wrap="square" lIns="0" tIns="0" rIns="0" bIns="0" anchor="ctr">
-            <a:spAutoFit/>
-          </a:bodyPr>
-          <a:lstStyle/>
-          <a:p>
-            <a:pPr algn="ctr"/>
-            <a:r>
-              <a:rPr sz="1800" b="1">
-                <a:solidFill>
-                  <a:srgbClr val="2E6E43"/>
-                </a:solidFill>
-                <a:latin typeface="Calibri"/>
-              </a:rPr>
-              <a:t>✓</a:t>
-            </a:r>
-            <a:endParaRPr sz="1800" b="1">
-              <a:solidFill>
-                <a:srgbClr val="2E6E43"/>
-              </a:solidFill>
-              <a:latin typeface="Calibri"/>
-            </a:endParaRPr>
-          </a:p>
-        </p:txBody>
-      </p:sp>
-      <p:sp>
-        <p:nvSpPr>
-          <p:cNvPr id="17" name="TextBox 16"/>
-          <p:cNvSpPr txBox="1"/>
-          <p:nvPr/>
-        </p:nvSpPr>
-        <p:spPr>
-          <a:xfrm>
-            <a:off x="6629400" y="2011680"/>
-            <a:ext cx="2331720" cy="411480"/>
-          </a:xfrm>
-          <a:prstGeom prst="rect">
-            <a:avLst/>
-          </a:prstGeom>
-          <a:noFill/>
-        </p:spPr>
-        <p:txBody>
-          <a:bodyPr wrap="square" lIns="0" tIns="0" rIns="0" bIns="0" anchor="ctr">
-            <a:spAutoFit/>
-          </a:bodyPr>
-          <a:lstStyle/>
-          <a:p>
-            <a:pPr algn="ctr"/>
-            <a:r>
-              <a:rPr sz="1800" b="1">
-                <a:solidFill>
-                  <a:srgbClr val="B0382A"/>
-                </a:solidFill>
-                <a:latin typeface="Calibri"/>
-              </a:rPr>
-              <a:t>✗</a:t>
-            </a:r>
-            <a:endParaRPr sz="1800" b="1">
-              <a:solidFill>
-                <a:srgbClr val="B0382A"/>
-              </a:solidFill>
-              <a:latin typeface="Calibri"/>
-            </a:endParaRPr>
-          </a:p>
-        </p:txBody>
-      </p:sp>
-      <p:sp>
-        <p:nvSpPr>
-          <p:cNvPr id="18" name="TextBox 17"/>
-          <p:cNvSpPr txBox="1"/>
-          <p:nvPr/>
-        </p:nvSpPr>
-        <p:spPr>
-          <a:xfrm>
-            <a:off x="8961120" y="2011680"/>
-            <a:ext cx="2331720" cy="411480"/>
-          </a:xfrm>
-          <a:prstGeom prst="rect">
-            <a:avLst/>
-          </a:prstGeom>
-          <a:noFill/>
-        </p:spPr>
-        <p:txBody>
-          <a:bodyPr wrap="square" lIns="0" tIns="0" rIns="0" bIns="0" anchor="ctr">
-            <a:spAutoFit/>
-          </a:bodyPr>
-          <a:lstStyle/>
-          <a:p>
-            <a:pPr algn="ctr"/>
-            <a:r>
-              <a:rPr sz="1800" b="1">
-                <a:solidFill>
-                  <a:srgbClr val="2E6E43"/>
-                </a:solidFill>
-                <a:latin typeface="Calibri"/>
-              </a:rPr>
-              <a:t>✓</a:t>
-            </a:r>
-            <a:endParaRPr sz="1800" b="1">
-              <a:solidFill>
-                <a:srgbClr val="2E6E43"/>
-              </a:solidFill>
-              <a:latin typeface="Calibri"/>
-            </a:endParaRPr>
-          </a:p>
-        </p:txBody>
-      </p:sp>
-      <p:sp>
-        <p:nvSpPr>
-          <p:cNvPr id="19" name="TextBox 18"/>
-          <p:cNvSpPr txBox="1"/>
-          <p:nvPr/>
-        </p:nvSpPr>
-        <p:spPr>
-          <a:xfrm>
-            <a:off x="777240" y="2423160"/>
-            <a:ext cx="3657600" cy="411480"/>
-          </a:xfrm>
-          <a:prstGeom prst="rect">
-            <a:avLst/>
-          </a:prstGeom>
-          <a:noFill/>
-        </p:spPr>
-        <p:txBody>
-          <a:bodyPr wrap="square" lIns="0" tIns="0" rIns="0" bIns="0" anchor="ctr">
-            <a:spAutoFit/>
-          </a:bodyPr>
-          <a:lstStyle/>
-          <a:p>
-            <a:pPr algn="l"/>
-            <a:r>
-              <a:rPr sz="1000" b="0">
-                <a:solidFill>
-                  <a:srgbClr val="3A423D"/>
-                </a:solidFill>
-                <a:latin typeface="Calibri"/>
-              </a:rPr>
-              <a:t>Khmer-first interface</a:t>
-            </a:r>
-            <a:endParaRPr sz="1000" b="0">
-              <a:solidFill>
-                <a:srgbClr val="3A423D"/>
-              </a:solidFill>
-              <a:latin typeface="Calibri"/>
-            </a:endParaRPr>
-          </a:p>
-        </p:txBody>
-      </p:sp>
-      <p:sp>
-        <p:nvSpPr>
-          <p:cNvPr id="20" name="TextBox 19"/>
-          <p:cNvSpPr txBox="1"/>
-          <p:nvPr/>
-        </p:nvSpPr>
-        <p:spPr>
-          <a:xfrm>
-            <a:off x="4297680" y="2423160"/>
-            <a:ext cx="2331720" cy="411480"/>
-          </a:xfrm>
-          <a:prstGeom prst="rect">
-            <a:avLst/>
-          </a:prstGeom>
-          <a:noFill/>
-        </p:spPr>
-        <p:txBody>
-          <a:bodyPr wrap="square" lIns="0" tIns="0" rIns="0" bIns="0" anchor="ctr">
-            <a:spAutoFit/>
-          </a:bodyPr>
-          <a:lstStyle/>
-          <a:p>
-            <a:pPr algn="ctr"/>
-            <a:r>
-              <a:rPr sz="1800" b="1">
-                <a:solidFill>
-                  <a:srgbClr val="2E6E43"/>
-                </a:solidFill>
-                <a:latin typeface="Calibri"/>
-              </a:rPr>
-              <a:t>✓</a:t>
-            </a:r>
-            <a:endParaRPr sz="1800" b="1">
-              <a:solidFill>
-                <a:srgbClr val="2E6E43"/>
-              </a:solidFill>
-              <a:latin typeface="Calibri"/>
-            </a:endParaRPr>
-          </a:p>
-        </p:txBody>
-      </p:sp>
-      <p:sp>
-        <p:nvSpPr>
-          <p:cNvPr id="21" name="TextBox 20"/>
-          <p:cNvSpPr txBox="1"/>
-          <p:nvPr/>
-        </p:nvSpPr>
-        <p:spPr>
-          <a:xfrm>
-            <a:off x="6629400" y="2423160"/>
-            <a:ext cx="2331720" cy="411480"/>
-          </a:xfrm>
-          <a:prstGeom prst="rect">
-            <a:avLst/>
-          </a:prstGeom>
-          <a:noFill/>
-        </p:spPr>
-        <p:txBody>
-          <a:bodyPr wrap="square" lIns="0" tIns="0" rIns="0" bIns="0" anchor="ctr">
-            <a:spAutoFit/>
-          </a:bodyPr>
-          <a:lstStyle/>
-          <a:p>
-            <a:pPr algn="ctr"/>
-            <a:r>
-              <a:rPr sz="1800" b="1">
-                <a:solidFill>
-                  <a:srgbClr val="B0382A"/>
-                </a:solidFill>
-                <a:latin typeface="Calibri"/>
-              </a:rPr>
-              <a:t>✗</a:t>
-            </a:r>
-            <a:endParaRPr sz="1800" b="1">
-              <a:solidFill>
-                <a:srgbClr val="B0382A"/>
-              </a:solidFill>
-              <a:latin typeface="Calibri"/>
-            </a:endParaRPr>
-          </a:p>
-        </p:txBody>
-      </p:sp>
-      <p:sp>
-        <p:nvSpPr>
-          <p:cNvPr id="22" name="TextBox 21"/>
-          <p:cNvSpPr txBox="1"/>
-          <p:nvPr/>
-        </p:nvSpPr>
-        <p:spPr>
-          <a:xfrm>
-            <a:off x="8961120" y="2423160"/>
-            <a:ext cx="2331720" cy="411480"/>
-          </a:xfrm>
-          <a:prstGeom prst="rect">
-            <a:avLst/>
-          </a:prstGeom>
-          <a:noFill/>
-        </p:spPr>
-        <p:txBody>
-          <a:bodyPr wrap="square" lIns="0" tIns="0" rIns="0" bIns="0" anchor="ctr">
-            <a:spAutoFit/>
-          </a:bodyPr>
-          <a:lstStyle/>
-          <a:p>
-            <a:pPr algn="ctr"/>
-            <a:r>
-              <a:rPr sz="1800" b="1">
-                <a:solidFill>
-                  <a:srgbClr val="2E6E43"/>
-                </a:solidFill>
-                <a:latin typeface="Calibri"/>
-              </a:rPr>
-              <a:t>✓</a:t>
-            </a:r>
-            <a:endParaRPr sz="1800" b="1">
-              <a:solidFill>
-                <a:srgbClr val="2E6E43"/>
-              </a:solidFill>
-              <a:latin typeface="Calibri"/>
-            </a:endParaRPr>
-          </a:p>
-        </p:txBody>
-      </p:sp>
-      <p:sp>
-        <p:nvSpPr>
-          <p:cNvPr id="23" name="Rectangle 22"/>
-          <p:cNvSpPr/>
-          <p:nvPr/>
-        </p:nvSpPr>
-        <p:spPr>
-          <a:xfrm>
-            <a:off x="640080" y="2834640"/>
-            <a:ext cx="10652760" cy="411480"/>
-          </a:xfrm>
-          <a:prstGeom prst="rect">
-            <a:avLst/>
-          </a:prstGeom>
-          <a:solidFill>
-            <a:srgbClr val="EEF0EE"/>
-          </a:solidFill>
-          <a:ln>
-            <a:noFill/>
-          </a:ln>
-          <a:effectLst/>
-        </p:spPr>
-        <p:style>
-          <a:lnRef idx="1">
-            <a:schemeClr val="accent1"/>
-          </a:lnRef>
-          <a:fillRef idx="3">
-            <a:schemeClr val="accent1"/>
-          </a:fillRef>
-          <a:effectRef idx="2">
-            <a:schemeClr val="accent1"/>
-          </a:effectRef>
-          <a:fontRef idx="minor">
-            <a:schemeClr val="lt1"/>
-          </a:fontRef>
-        </p:style>
-        <p:txBody>
-          <a:bodyPr rtlCol="0" anchor="ctr"/>
-          <a:lstStyle/>
-          <a:p>
-            <a:pPr algn="ctr"/>
-          </a:p>
-        </p:txBody>
-      </p:sp>
-      <p:sp>
-        <p:nvSpPr>
-          <p:cNvPr id="24" name="TextBox 23"/>
-          <p:cNvSpPr txBox="1"/>
-          <p:nvPr/>
-        </p:nvSpPr>
-        <p:spPr>
-          <a:xfrm>
-            <a:off x="777240" y="2834640"/>
-            <a:ext cx="3657600" cy="411480"/>
-          </a:xfrm>
-          <a:prstGeom prst="rect">
-            <a:avLst/>
-          </a:prstGeom>
-          <a:noFill/>
-        </p:spPr>
-        <p:txBody>
-          <a:bodyPr wrap="square" lIns="0" tIns="0" rIns="0" bIns="0" anchor="ctr">
-            <a:spAutoFit/>
-          </a:bodyPr>
-          <a:lstStyle/>
-          <a:p>
-            <a:pPr algn="l"/>
-            <a:r>
-              <a:rPr sz="1000" b="0">
-                <a:solidFill>
-                  <a:srgbClr val="3A423D"/>
-                </a:solidFill>
-                <a:latin typeface="Calibri"/>
-              </a:rPr>
-              <a:t>Searchable records</a:t>
-            </a:r>
-            <a:endParaRPr sz="1000" b="0">
-              <a:solidFill>
-                <a:srgbClr val="3A423D"/>
-              </a:solidFill>
-              <a:latin typeface="Calibri"/>
-            </a:endParaRPr>
-          </a:p>
-        </p:txBody>
-      </p:sp>
-      <p:sp>
-        <p:nvSpPr>
-          <p:cNvPr id="25" name="TextBox 24"/>
-          <p:cNvSpPr txBox="1"/>
-          <p:nvPr/>
-        </p:nvSpPr>
-        <p:spPr>
-          <a:xfrm>
-            <a:off x="4297680" y="2834640"/>
-            <a:ext cx="2331720" cy="411480"/>
-          </a:xfrm>
-          <a:prstGeom prst="rect">
-            <a:avLst/>
-          </a:prstGeom>
-          <a:noFill/>
-        </p:spPr>
-        <p:txBody>
-          <a:bodyPr wrap="square" lIns="0" tIns="0" rIns="0" bIns="0" anchor="ctr">
-            <a:spAutoFit/>
-          </a:bodyPr>
-          <a:lstStyle/>
-          <a:p>
-            <a:pPr algn="ctr"/>
-            <a:r>
-              <a:rPr sz="1800" b="1">
-                <a:solidFill>
-                  <a:srgbClr val="B0382A"/>
-                </a:solidFill>
-                <a:latin typeface="Calibri"/>
-              </a:rPr>
-              <a:t>✗</a:t>
-            </a:r>
-            <a:endParaRPr sz="1800" b="1">
-              <a:solidFill>
-                <a:srgbClr val="B0382A"/>
-              </a:solidFill>
-              <a:latin typeface="Calibri"/>
-            </a:endParaRPr>
-          </a:p>
-        </p:txBody>
-      </p:sp>
-      <p:sp>
-        <p:nvSpPr>
-          <p:cNvPr id="26" name="TextBox 25"/>
-          <p:cNvSpPr txBox="1"/>
-          <p:nvPr/>
-        </p:nvSpPr>
-        <p:spPr>
-          <a:xfrm>
-            <a:off x="6629400" y="2834640"/>
-            <a:ext cx="2331720" cy="411480"/>
-          </a:xfrm>
-          <a:prstGeom prst="rect">
-            <a:avLst/>
-          </a:prstGeom>
-          <a:noFill/>
-        </p:spPr>
-        <p:txBody>
-          <a:bodyPr wrap="square" lIns="0" tIns="0" rIns="0" bIns="0" anchor="ctr">
-            <a:spAutoFit/>
-          </a:bodyPr>
-          <a:lstStyle/>
-          <a:p>
-            <a:pPr algn="ctr"/>
-            <a:r>
-              <a:rPr sz="1800" b="1">
-                <a:solidFill>
-                  <a:srgbClr val="2E6E43"/>
-                </a:solidFill>
-                <a:latin typeface="Calibri"/>
-              </a:rPr>
-              <a:t>✓</a:t>
-            </a:r>
-            <a:endParaRPr sz="1800" b="1">
-              <a:solidFill>
-                <a:srgbClr val="2E6E43"/>
-              </a:solidFill>
-              <a:latin typeface="Calibri"/>
-            </a:endParaRPr>
-          </a:p>
-        </p:txBody>
-      </p:sp>
-      <p:sp>
-        <p:nvSpPr>
-          <p:cNvPr id="27" name="TextBox 26"/>
-          <p:cNvSpPr txBox="1"/>
-          <p:nvPr/>
-        </p:nvSpPr>
-        <p:spPr>
-          <a:xfrm>
-            <a:off x="8961120" y="2834640"/>
-            <a:ext cx="2331720" cy="411480"/>
-          </a:xfrm>
-          <a:prstGeom prst="rect">
-            <a:avLst/>
-          </a:prstGeom>
-          <a:noFill/>
-        </p:spPr>
-        <p:txBody>
-          <a:bodyPr wrap="square" lIns="0" tIns="0" rIns="0" bIns="0" anchor="ctr">
-            <a:spAutoFit/>
-          </a:bodyPr>
-          <a:lstStyle/>
-          <a:p>
-            <a:pPr algn="ctr"/>
-            <a:r>
-              <a:rPr sz="1800" b="1">
-                <a:solidFill>
-                  <a:srgbClr val="2E6E43"/>
-                </a:solidFill>
-                <a:latin typeface="Calibri"/>
-              </a:rPr>
-              <a:t>✓</a:t>
-            </a:r>
-            <a:endParaRPr sz="1800" b="1">
-              <a:solidFill>
-                <a:srgbClr val="2E6E43"/>
-              </a:solidFill>
-              <a:latin typeface="Calibri"/>
-            </a:endParaRPr>
-          </a:p>
-        </p:txBody>
-      </p:sp>
-      <p:sp>
-        <p:nvSpPr>
-          <p:cNvPr id="28" name="TextBox 27"/>
-          <p:cNvSpPr txBox="1"/>
-          <p:nvPr/>
-        </p:nvSpPr>
-        <p:spPr>
-          <a:xfrm>
-            <a:off x="777240" y="3246120"/>
-            <a:ext cx="3657600" cy="411480"/>
-          </a:xfrm>
-          <a:prstGeom prst="rect">
-            <a:avLst/>
-          </a:prstGeom>
-          <a:noFill/>
-        </p:spPr>
-        <p:txBody>
-          <a:bodyPr wrap="square" lIns="0" tIns="0" rIns="0" bIns="0" anchor="ctr">
-            <a:spAutoFit/>
-          </a:bodyPr>
-          <a:lstStyle/>
-          <a:p>
-            <a:pPr algn="l"/>
-            <a:r>
-              <a:rPr sz="1000" b="0">
-                <a:solidFill>
-                  <a:srgbClr val="3A423D"/>
-                </a:solidFill>
-                <a:latin typeface="Calibri"/>
-              </a:rPr>
-              <a:t>Built-in pest &amp; disease library</a:t>
-            </a:r>
-            <a:endParaRPr sz="1000" b="0">
-              <a:solidFill>
-                <a:srgbClr val="3A423D"/>
-              </a:solidFill>
-              <a:latin typeface="Calibri"/>
-            </a:endParaRPr>
-          </a:p>
-        </p:txBody>
-      </p:sp>
-      <p:sp>
-        <p:nvSpPr>
-          <p:cNvPr id="29" name="TextBox 28"/>
-          <p:cNvSpPr txBox="1"/>
-          <p:nvPr/>
-        </p:nvSpPr>
-        <p:spPr>
-          <a:xfrm>
-            <a:off x="4297680" y="3246120"/>
-            <a:ext cx="2331720" cy="411480"/>
-          </a:xfrm>
-          <a:prstGeom prst="rect">
-            <a:avLst/>
-          </a:prstGeom>
-          <a:noFill/>
-        </p:spPr>
-        <p:txBody>
-          <a:bodyPr wrap="square" lIns="0" tIns="0" rIns="0" bIns="0" anchor="ctr">
-            <a:spAutoFit/>
-          </a:bodyPr>
-          <a:lstStyle/>
-          <a:p>
-            <a:pPr algn="ctr"/>
-            <a:r>
-              <a:rPr sz="1800" b="1">
-                <a:solidFill>
-                  <a:srgbClr val="B0382A"/>
-                </a:solidFill>
-                <a:latin typeface="Calibri"/>
-              </a:rPr>
-              <a:t>✗</a:t>
-            </a:r>
-            <a:endParaRPr sz="1800" b="1">
-              <a:solidFill>
-                <a:srgbClr val="B0382A"/>
-              </a:solidFill>
-              <a:latin typeface="Calibri"/>
-            </a:endParaRPr>
-          </a:p>
-        </p:txBody>
-      </p:sp>
-      <p:sp>
-        <p:nvSpPr>
-          <p:cNvPr id="30" name="TextBox 29"/>
-          <p:cNvSpPr txBox="1"/>
-          <p:nvPr/>
-        </p:nvSpPr>
-        <p:spPr>
-          <a:xfrm>
-            <a:off x="6629400" y="3246120"/>
-            <a:ext cx="2331720" cy="411480"/>
-          </a:xfrm>
-          <a:prstGeom prst="rect">
-            <a:avLst/>
-          </a:prstGeom>
-          <a:noFill/>
-        </p:spPr>
-        <p:txBody>
-          <a:bodyPr wrap="square" lIns="0" tIns="0" rIns="0" bIns="0" anchor="ctr">
-            <a:spAutoFit/>
-          </a:bodyPr>
-          <a:lstStyle/>
-          <a:p>
-            <a:pPr algn="ctr"/>
-            <a:r>
-              <a:rPr sz="1800" b="1">
-                <a:solidFill>
-                  <a:srgbClr val="2E6E43"/>
-                </a:solidFill>
-                <a:latin typeface="Calibri"/>
-              </a:rPr>
-              <a:t>✓</a:t>
-            </a:r>
-            <a:endParaRPr sz="1800" b="1">
-              <a:solidFill>
-                <a:srgbClr val="2E6E43"/>
-              </a:solidFill>
-              <a:latin typeface="Calibri"/>
-            </a:endParaRPr>
-          </a:p>
-        </p:txBody>
-      </p:sp>
-      <p:sp>
-        <p:nvSpPr>
-          <p:cNvPr id="31" name="TextBox 30"/>
-          <p:cNvSpPr txBox="1"/>
-          <p:nvPr/>
-        </p:nvSpPr>
-        <p:spPr>
-          <a:xfrm>
-            <a:off x="8961120" y="3246120"/>
-            <a:ext cx="2331720" cy="411480"/>
-          </a:xfrm>
-          <a:prstGeom prst="rect">
-            <a:avLst/>
-          </a:prstGeom>
-          <a:noFill/>
-        </p:spPr>
-        <p:txBody>
-          <a:bodyPr wrap="square" lIns="0" tIns="0" rIns="0" bIns="0" anchor="ctr">
-            <a:spAutoFit/>
-          </a:bodyPr>
-          <a:lstStyle/>
-          <a:p>
-            <a:pPr algn="ctr"/>
-            <a:r>
-              <a:rPr sz="1800" b="1">
-                <a:solidFill>
-                  <a:srgbClr val="2E6E43"/>
-                </a:solidFill>
-                <a:latin typeface="Calibri"/>
-              </a:rPr>
-              <a:t>✓</a:t>
-            </a:r>
-            <a:endParaRPr sz="1800" b="1">
-              <a:solidFill>
-                <a:srgbClr val="2E6E43"/>
-              </a:solidFill>
-              <a:latin typeface="Calibri"/>
-            </a:endParaRPr>
-          </a:p>
-        </p:txBody>
-      </p:sp>
-      <p:sp>
-        <p:nvSpPr>
-          <p:cNvPr id="32" name="Rectangle 31"/>
-          <p:cNvSpPr/>
-          <p:nvPr/>
-        </p:nvSpPr>
-        <p:spPr>
-          <a:xfrm>
-            <a:off x="640080" y="3657600"/>
-            <a:ext cx="10652760" cy="411480"/>
-          </a:xfrm>
-          <a:prstGeom prst="rect">
-            <a:avLst/>
-          </a:prstGeom>
-          <a:solidFill>
-            <a:srgbClr val="EEF0EE"/>
-          </a:solidFill>
-          <a:ln>
-            <a:noFill/>
-          </a:ln>
-          <a:effectLst/>
-        </p:spPr>
-        <p:style>
-          <a:lnRef idx="1">
-            <a:schemeClr val="accent1"/>
-          </a:lnRef>
-          <a:fillRef idx="3">
-            <a:schemeClr val="accent1"/>
-          </a:fillRef>
-          <a:effectRef idx="2">
-            <a:schemeClr val="accent1"/>
-          </a:effectRef>
-          <a:fontRef idx="minor">
-            <a:schemeClr val="lt1"/>
-          </a:fontRef>
-        </p:style>
-        <p:txBody>
-          <a:bodyPr rtlCol="0" anchor="ctr"/>
-          <a:lstStyle/>
-          <a:p>
-            <a:pPr algn="ctr"/>
-          </a:p>
-        </p:txBody>
-      </p:sp>
-      <p:sp>
-        <p:nvSpPr>
-          <p:cNvPr id="33" name="TextBox 32"/>
-          <p:cNvSpPr txBox="1"/>
-          <p:nvPr/>
-        </p:nvSpPr>
-        <p:spPr>
-          <a:xfrm>
-            <a:off x="777240" y="3657600"/>
-            <a:ext cx="3657600" cy="411480"/>
-          </a:xfrm>
-          <a:prstGeom prst="rect">
-            <a:avLst/>
-          </a:prstGeom>
-          <a:noFill/>
-        </p:spPr>
-        <p:txBody>
-          <a:bodyPr wrap="square" lIns="0" tIns="0" rIns="0" bIns="0" anchor="ctr">
-            <a:spAutoFit/>
-          </a:bodyPr>
-          <a:lstStyle/>
-          <a:p>
-            <a:pPr algn="l"/>
-            <a:r>
-              <a:rPr sz="1000" b="0">
-                <a:solidFill>
-                  <a:srgbClr val="3A423D"/>
-                </a:solidFill>
-                <a:latin typeface="Calibri"/>
-              </a:rPr>
-              <a:t>Activity reminders &amp; calendar</a:t>
-            </a:r>
-            <a:endParaRPr sz="1000" b="0">
-              <a:solidFill>
-                <a:srgbClr val="3A423D"/>
-              </a:solidFill>
-              <a:latin typeface="Calibri"/>
-            </a:endParaRPr>
-          </a:p>
-        </p:txBody>
-      </p:sp>
-      <p:sp>
-        <p:nvSpPr>
-          <p:cNvPr id="34" name="TextBox 33"/>
-          <p:cNvSpPr txBox="1"/>
-          <p:nvPr/>
-        </p:nvSpPr>
-        <p:spPr>
-          <a:xfrm>
-            <a:off x="4297680" y="3657600"/>
-            <a:ext cx="2331720" cy="411480"/>
-          </a:xfrm>
-          <a:prstGeom prst="rect">
-            <a:avLst/>
-          </a:prstGeom>
-          <a:noFill/>
-        </p:spPr>
-        <p:txBody>
-          <a:bodyPr wrap="square" lIns="0" tIns="0" rIns="0" bIns="0" anchor="ctr">
-            <a:spAutoFit/>
-          </a:bodyPr>
-          <a:lstStyle/>
-          <a:p>
-            <a:pPr algn="ctr"/>
-            <a:r>
-              <a:rPr sz="1800" b="1">
-                <a:solidFill>
-                  <a:srgbClr val="B0382A"/>
-                </a:solidFill>
-                <a:latin typeface="Calibri"/>
-              </a:rPr>
-              <a:t>✗</a:t>
-            </a:r>
-            <a:endParaRPr sz="1800" b="1">
-              <a:solidFill>
-                <a:srgbClr val="B0382A"/>
-              </a:solidFill>
-              <a:latin typeface="Calibri"/>
-            </a:endParaRPr>
-          </a:p>
-        </p:txBody>
-      </p:sp>
-      <p:sp>
-        <p:nvSpPr>
-          <p:cNvPr id="35" name="TextBox 34"/>
-          <p:cNvSpPr txBox="1"/>
-          <p:nvPr/>
-        </p:nvSpPr>
-        <p:spPr>
-          <a:xfrm>
-            <a:off x="6629400" y="3657600"/>
-            <a:ext cx="2331720" cy="411480"/>
-          </a:xfrm>
-          <a:prstGeom prst="rect">
-            <a:avLst/>
-          </a:prstGeom>
-          <a:noFill/>
-        </p:spPr>
-        <p:txBody>
-          <a:bodyPr wrap="square" lIns="0" tIns="0" rIns="0" bIns="0" anchor="ctr">
-            <a:spAutoFit/>
-          </a:bodyPr>
-          <a:lstStyle/>
-          <a:p>
-            <a:pPr algn="ctr"/>
-            <a:r>
-              <a:rPr sz="1800" b="1">
-                <a:solidFill>
-                  <a:srgbClr val="2E6E43"/>
-                </a:solidFill>
-                <a:latin typeface="Calibri"/>
-              </a:rPr>
-              <a:t>✓</a:t>
-            </a:r>
-            <a:endParaRPr sz="1800" b="1">
-              <a:solidFill>
-                <a:srgbClr val="2E6E43"/>
-              </a:solidFill>
-              <a:latin typeface="Calibri"/>
-            </a:endParaRPr>
-          </a:p>
-        </p:txBody>
-      </p:sp>
-      <p:sp>
-        <p:nvSpPr>
-          <p:cNvPr id="36" name="TextBox 35"/>
-          <p:cNvSpPr txBox="1"/>
-          <p:nvPr/>
-        </p:nvSpPr>
-        <p:spPr>
-          <a:xfrm>
-            <a:off x="8961120" y="3657600"/>
-            <a:ext cx="2331720" cy="411480"/>
-          </a:xfrm>
-          <a:prstGeom prst="rect">
-            <a:avLst/>
-          </a:prstGeom>
-          <a:noFill/>
-        </p:spPr>
-        <p:txBody>
-          <a:bodyPr wrap="square" lIns="0" tIns="0" rIns="0" bIns="0" anchor="ctr">
-            <a:spAutoFit/>
-          </a:bodyPr>
-          <a:lstStyle/>
-          <a:p>
-            <a:pPr algn="ctr"/>
-            <a:r>
-              <a:rPr sz="1800" b="1">
-                <a:solidFill>
-                  <a:srgbClr val="2E6E43"/>
-                </a:solidFill>
-                <a:latin typeface="Calibri"/>
-              </a:rPr>
-              <a:t>✓</a:t>
-            </a:r>
-            <a:endParaRPr sz="1800" b="1">
-              <a:solidFill>
-                <a:srgbClr val="2E6E43"/>
-              </a:solidFill>
-              <a:latin typeface="Calibri"/>
-            </a:endParaRPr>
-          </a:p>
-        </p:txBody>
-      </p:sp>
-      <p:sp>
-        <p:nvSpPr>
-          <p:cNvPr id="37" name="TextBox 36"/>
-          <p:cNvSpPr txBox="1"/>
-          <p:nvPr/>
-        </p:nvSpPr>
-        <p:spPr>
-          <a:xfrm>
-            <a:off x="777240" y="4069080"/>
-            <a:ext cx="3657600" cy="411480"/>
-          </a:xfrm>
-          <a:prstGeom prst="rect">
-            <a:avLst/>
-          </a:prstGeom>
-          <a:noFill/>
-        </p:spPr>
-        <p:txBody>
-          <a:bodyPr wrap="square" lIns="0" tIns="0" rIns="0" bIns="0" anchor="ctr">
-            <a:spAutoFit/>
-          </a:bodyPr>
-          <a:lstStyle/>
-          <a:p>
-            <a:pPr algn="l"/>
-            <a:r>
-              <a:rPr sz="1000" b="0">
-                <a:solidFill>
-                  <a:srgbClr val="3A423D"/>
-                </a:solidFill>
-                <a:latin typeface="Calibri"/>
-              </a:rPr>
-              <a:t>Backup &amp; restore</a:t>
-            </a:r>
-            <a:endParaRPr sz="1000" b="0">
-              <a:solidFill>
-                <a:srgbClr val="3A423D"/>
-              </a:solidFill>
-              <a:latin typeface="Calibri"/>
-            </a:endParaRPr>
-          </a:p>
-        </p:txBody>
-      </p:sp>
-      <p:sp>
-        <p:nvSpPr>
-          <p:cNvPr id="38" name="TextBox 37"/>
-          <p:cNvSpPr txBox="1"/>
-          <p:nvPr/>
-        </p:nvSpPr>
-        <p:spPr>
-          <a:xfrm>
-            <a:off x="4297680" y="4069080"/>
-            <a:ext cx="2331720" cy="411480"/>
-          </a:xfrm>
-          <a:prstGeom prst="rect">
-            <a:avLst/>
-          </a:prstGeom>
-          <a:noFill/>
-        </p:spPr>
-        <p:txBody>
-          <a:bodyPr wrap="square" lIns="0" tIns="0" rIns="0" bIns="0" anchor="ctr">
-            <a:spAutoFit/>
-          </a:bodyPr>
-          <a:lstStyle/>
-          <a:p>
-            <a:pPr algn="ctr"/>
-            <a:r>
-              <a:rPr sz="1800" b="1">
-                <a:solidFill>
-                  <a:srgbClr val="B0382A"/>
-                </a:solidFill>
-                <a:latin typeface="Calibri"/>
-              </a:rPr>
-              <a:t>✗</a:t>
-            </a:r>
-            <a:endParaRPr sz="1800" b="1">
-              <a:solidFill>
-                <a:srgbClr val="B0382A"/>
-              </a:solidFill>
-              <a:latin typeface="Calibri"/>
-            </a:endParaRPr>
-          </a:p>
-        </p:txBody>
-      </p:sp>
-      <p:sp>
-        <p:nvSpPr>
-          <p:cNvPr id="39" name="TextBox 38"/>
-          <p:cNvSpPr txBox="1"/>
-          <p:nvPr/>
-        </p:nvSpPr>
-        <p:spPr>
-          <a:xfrm>
-            <a:off x="6629400" y="4069080"/>
-            <a:ext cx="2331720" cy="411480"/>
-          </a:xfrm>
-          <a:prstGeom prst="rect">
-            <a:avLst/>
-          </a:prstGeom>
-          <a:noFill/>
-        </p:spPr>
-        <p:txBody>
-          <a:bodyPr wrap="square" lIns="0" tIns="0" rIns="0" bIns="0" anchor="ctr">
-            <a:spAutoFit/>
-          </a:bodyPr>
-          <a:lstStyle/>
-          <a:p>
-            <a:pPr algn="ctr"/>
-            <a:r>
-              <a:rPr sz="1800" b="1">
-                <a:solidFill>
-                  <a:srgbClr val="2E6E43"/>
-                </a:solidFill>
-                <a:latin typeface="Calibri"/>
-              </a:rPr>
-              <a:t>✓</a:t>
-            </a:r>
-            <a:endParaRPr sz="1800" b="1">
-              <a:solidFill>
-                <a:srgbClr val="2E6E43"/>
-              </a:solidFill>
-              <a:latin typeface="Calibri"/>
-            </a:endParaRPr>
-          </a:p>
-        </p:txBody>
-      </p:sp>
-      <p:sp>
-        <p:nvSpPr>
-          <p:cNvPr id="40" name="TextBox 39"/>
-          <p:cNvSpPr txBox="1"/>
-          <p:nvPr/>
-        </p:nvSpPr>
-        <p:spPr>
-          <a:xfrm>
-            <a:off x="8961120" y="4069080"/>
-            <a:ext cx="2331720" cy="411480"/>
-          </a:xfrm>
-          <a:prstGeom prst="rect">
-            <a:avLst/>
-          </a:prstGeom>
-          <a:noFill/>
-        </p:spPr>
-        <p:txBody>
-          <a:bodyPr wrap="square" lIns="0" tIns="0" rIns="0" bIns="0" anchor="ctr">
-            <a:spAutoFit/>
-          </a:bodyPr>
-          <a:lstStyle/>
-          <a:p>
-            <a:pPr algn="ctr"/>
-            <a:r>
-              <a:rPr sz="1800" b="1">
-                <a:solidFill>
-                  <a:srgbClr val="2E6E43"/>
-                </a:solidFill>
-                <a:latin typeface="Calibri"/>
-              </a:rPr>
-              <a:t>✓</a:t>
-            </a:r>
-            <a:endParaRPr sz="1800" b="1">
-              <a:solidFill>
-                <a:srgbClr val="2E6E43"/>
-              </a:solidFill>
-              <a:latin typeface="Calibri"/>
-            </a:endParaRPr>
-          </a:p>
-        </p:txBody>
-      </p:sp>
-      <p:sp>
-        <p:nvSpPr>
-          <p:cNvPr id="41" name="Rectangle 40"/>
-          <p:cNvSpPr/>
-          <p:nvPr/>
-        </p:nvSpPr>
-        <p:spPr>
-          <a:xfrm>
-            <a:off x="640080" y="4480560"/>
-            <a:ext cx="10652760" cy="411480"/>
-          </a:xfrm>
-          <a:prstGeom prst="rect">
-            <a:avLst/>
-          </a:prstGeom>
-          <a:solidFill>
-            <a:srgbClr val="EEF0EE"/>
-          </a:solidFill>
-          <a:ln>
-            <a:noFill/>
-          </a:ln>
-          <a:effectLst/>
-        </p:spPr>
-        <p:style>
-          <a:lnRef idx="1">
-            <a:schemeClr val="accent1"/>
-          </a:lnRef>
-          <a:fillRef idx="3">
-            <a:schemeClr val="accent1"/>
-          </a:fillRef>
-          <a:effectRef idx="2">
-            <a:schemeClr val="accent1"/>
-          </a:effectRef>
-          <a:fontRef idx="minor">
-            <a:schemeClr val="lt1"/>
-          </a:fontRef>
-        </p:style>
-        <p:txBody>
-          <a:bodyPr rtlCol="0" anchor="ctr"/>
-          <a:lstStyle/>
-          <a:p>
-            <a:pPr algn="ctr"/>
-          </a:p>
-        </p:txBody>
-      </p:sp>
-      <p:sp>
-        <p:nvSpPr>
-          <p:cNvPr id="42" name="TextBox 41"/>
-          <p:cNvSpPr txBox="1"/>
-          <p:nvPr/>
-        </p:nvSpPr>
-        <p:spPr>
-          <a:xfrm>
-            <a:off x="777240" y="4480560"/>
-            <a:ext cx="3657600" cy="411480"/>
-          </a:xfrm>
-          <a:prstGeom prst="rect">
-            <a:avLst/>
-          </a:prstGeom>
-          <a:noFill/>
-        </p:spPr>
-        <p:txBody>
-          <a:bodyPr wrap="square" lIns="0" tIns="0" rIns="0" bIns="0" anchor="ctr">
-            <a:spAutoFit/>
-          </a:bodyPr>
-          <a:lstStyle/>
-          <a:p>
-            <a:pPr algn="l"/>
-            <a:r>
-              <a:rPr sz="1000" b="0">
-                <a:solidFill>
-                  <a:srgbClr val="3A423D"/>
-                </a:solidFill>
-                <a:latin typeface="Calibri"/>
-              </a:rPr>
-              <a:t>Free, no account required</a:t>
-            </a:r>
-            <a:endParaRPr sz="1000" b="0">
-              <a:solidFill>
-                <a:srgbClr val="3A423D"/>
-              </a:solidFill>
-              <a:latin typeface="Calibri"/>
-            </a:endParaRPr>
-          </a:p>
-        </p:txBody>
-      </p:sp>
-      <p:sp>
-        <p:nvSpPr>
-          <p:cNvPr id="43" name="TextBox 42"/>
-          <p:cNvSpPr txBox="1"/>
-          <p:nvPr/>
-        </p:nvSpPr>
-        <p:spPr>
-          <a:xfrm>
-            <a:off x="4297680" y="4480560"/>
-            <a:ext cx="2331720" cy="411480"/>
-          </a:xfrm>
-          <a:prstGeom prst="rect">
-            <a:avLst/>
-          </a:prstGeom>
-          <a:noFill/>
-        </p:spPr>
-        <p:txBody>
-          <a:bodyPr wrap="square" lIns="0" tIns="0" rIns="0" bIns="0" anchor="ctr">
-            <a:spAutoFit/>
-          </a:bodyPr>
-          <a:lstStyle/>
-          <a:p>
-            <a:pPr algn="ctr"/>
-            <a:r>
-              <a:rPr sz="1800" b="1">
-                <a:solidFill>
-                  <a:srgbClr val="2E6E43"/>
-                </a:solidFill>
-                <a:latin typeface="Calibri"/>
-              </a:rPr>
-              <a:t>✓</a:t>
-            </a:r>
-            <a:endParaRPr sz="1800" b="1">
-              <a:solidFill>
-                <a:srgbClr val="2E6E43"/>
-              </a:solidFill>
-              <a:latin typeface="Calibri"/>
-            </a:endParaRPr>
-          </a:p>
-        </p:txBody>
-      </p:sp>
-      <p:sp>
-        <p:nvSpPr>
-          <p:cNvPr id="44" name="TextBox 43"/>
-          <p:cNvSpPr txBox="1"/>
-          <p:nvPr/>
-        </p:nvSpPr>
-        <p:spPr>
-          <a:xfrm>
-            <a:off x="6629400" y="4480560"/>
-            <a:ext cx="2331720" cy="411480"/>
-          </a:xfrm>
-          <a:prstGeom prst="rect">
-            <a:avLst/>
-          </a:prstGeom>
-          <a:noFill/>
-        </p:spPr>
-        <p:txBody>
-          <a:bodyPr wrap="square" lIns="0" tIns="0" rIns="0" bIns="0" anchor="ctr">
-            <a:spAutoFit/>
-          </a:bodyPr>
-          <a:lstStyle/>
-          <a:p>
-            <a:pPr algn="ctr"/>
-            <a:r>
-              <a:rPr sz="1800" b="1">
-                <a:solidFill>
-                  <a:srgbClr val="B0382A"/>
-                </a:solidFill>
-                <a:latin typeface="Calibri"/>
-              </a:rPr>
-              <a:t>✗</a:t>
-            </a:r>
-            <a:endParaRPr sz="1800" b="1">
-              <a:solidFill>
-                <a:srgbClr val="B0382A"/>
-              </a:solidFill>
-              <a:latin typeface="Calibri"/>
-            </a:endParaRPr>
-          </a:p>
-        </p:txBody>
-      </p:sp>
-      <p:sp>
-        <p:nvSpPr>
-          <p:cNvPr id="45" name="TextBox 44"/>
-          <p:cNvSpPr txBox="1"/>
-          <p:nvPr/>
-        </p:nvSpPr>
-        <p:spPr>
-          <a:xfrm>
-            <a:off x="8961120" y="4480560"/>
-            <a:ext cx="2331720" cy="411480"/>
-          </a:xfrm>
-          <a:prstGeom prst="rect">
-            <a:avLst/>
-          </a:prstGeom>
-          <a:noFill/>
-        </p:spPr>
-        <p:txBody>
-          <a:bodyPr wrap="square" lIns="0" tIns="0" rIns="0" bIns="0" anchor="ctr">
-            <a:spAutoFit/>
-          </a:bodyPr>
-          <a:lstStyle/>
-          <a:p>
-            <a:pPr algn="ctr"/>
-            <a:r>
-              <a:rPr sz="1800" b="1">
-                <a:solidFill>
-                  <a:srgbClr val="2E6E43"/>
-                </a:solidFill>
-                <a:latin typeface="Calibri"/>
-              </a:rPr>
-              <a:t>✓</a:t>
-            </a:r>
-            <a:endParaRPr sz="1800" b="1">
-              <a:solidFill>
-                <a:srgbClr val="2E6E43"/>
-              </a:solidFill>
-              <a:latin typeface="Calibri"/>
-            </a:endParaRPr>
-          </a:p>
-        </p:txBody>
-      </p:sp>
-      <p:sp>
-        <p:nvSpPr>
-          <p:cNvPr id="46" name="TextBox 45"/>
-          <p:cNvSpPr txBox="1"/>
-          <p:nvPr/>
-        </p:nvSpPr>
-        <p:spPr>
-          <a:xfrm>
-            <a:off x="777240" y="4892040"/>
-            <a:ext cx="3657600" cy="411480"/>
-          </a:xfrm>
-          <a:prstGeom prst="rect">
-            <a:avLst/>
-          </a:prstGeom>
-          <a:noFill/>
-        </p:spPr>
-        <p:txBody>
-          <a:bodyPr wrap="square" lIns="0" tIns="0" rIns="0" bIns="0" anchor="ctr">
-            <a:spAutoFit/>
-          </a:bodyPr>
-          <a:lstStyle/>
-          <a:p>
-            <a:pPr algn="l"/>
-            <a:r>
-              <a:rPr sz="1000" b="0">
-                <a:solidFill>
-                  <a:srgbClr val="3A423D"/>
-                </a:solidFill>
-                <a:latin typeface="Calibri"/>
-              </a:rPr>
-              <a:t>Designed for Cambodian farmers</a:t>
-            </a:r>
-            <a:endParaRPr sz="1000" b="0">
-              <a:solidFill>
-                <a:srgbClr val="3A423D"/>
-              </a:solidFill>
-              <a:latin typeface="Calibri"/>
-            </a:endParaRPr>
-          </a:p>
-        </p:txBody>
-      </p:sp>
-      <p:sp>
-        <p:nvSpPr>
-          <p:cNvPr id="47" name="TextBox 46"/>
-          <p:cNvSpPr txBox="1"/>
-          <p:nvPr/>
-        </p:nvSpPr>
-        <p:spPr>
-          <a:xfrm>
-            <a:off x="4297680" y="4892040"/>
-            <a:ext cx="2331720" cy="411480"/>
-          </a:xfrm>
-          <a:prstGeom prst="rect">
-            <a:avLst/>
-          </a:prstGeom>
-          <a:noFill/>
-        </p:spPr>
-        <p:txBody>
-          <a:bodyPr wrap="square" lIns="0" tIns="0" rIns="0" bIns="0" anchor="ctr">
-            <a:spAutoFit/>
-          </a:bodyPr>
-          <a:lstStyle/>
-          <a:p>
-            <a:pPr algn="ctr"/>
-            <a:r>
-              <a:rPr sz="1800" b="1">
-                <a:solidFill>
-                  <a:srgbClr val="8B5A2B"/>
-                </a:solidFill>
-                <a:latin typeface="Calibri"/>
-              </a:rPr>
-              <a:t>~</a:t>
-            </a:r>
-            <a:endParaRPr sz="1800" b="1">
-              <a:solidFill>
-                <a:srgbClr val="8B5A2B"/>
-              </a:solidFill>
-              <a:latin typeface="Calibri"/>
-            </a:endParaRPr>
-          </a:p>
-        </p:txBody>
-      </p:sp>
-      <p:sp>
-        <p:nvSpPr>
-          <p:cNvPr id="48" name="TextBox 47"/>
-          <p:cNvSpPr txBox="1"/>
-          <p:nvPr/>
-        </p:nvSpPr>
-        <p:spPr>
-          <a:xfrm>
-            <a:off x="6629400" y="4892040"/>
-            <a:ext cx="2331720" cy="411480"/>
-          </a:xfrm>
-          <a:prstGeom prst="rect">
-            <a:avLst/>
-          </a:prstGeom>
-          <a:noFill/>
-        </p:spPr>
-        <p:txBody>
-          <a:bodyPr wrap="square" lIns="0" tIns="0" rIns="0" bIns="0" anchor="ctr">
-            <a:spAutoFit/>
-          </a:bodyPr>
-          <a:lstStyle/>
-          <a:p>
-            <a:pPr algn="ctr"/>
-            <a:r>
-              <a:rPr sz="1800" b="1">
-                <a:solidFill>
-                  <a:srgbClr val="B0382A"/>
-                </a:solidFill>
-                <a:latin typeface="Calibri"/>
-              </a:rPr>
-              <a:t>✗</a:t>
-            </a:r>
-            <a:endParaRPr sz="1800" b="1">
-              <a:solidFill>
-                <a:srgbClr val="B0382A"/>
-              </a:solidFill>
-              <a:latin typeface="Calibri"/>
-            </a:endParaRPr>
-          </a:p>
-        </p:txBody>
-      </p:sp>
-      <p:sp>
-        <p:nvSpPr>
-          <p:cNvPr id="49" name="TextBox 48"/>
-          <p:cNvSpPr txBox="1"/>
-          <p:nvPr/>
-        </p:nvSpPr>
-        <p:spPr>
-          <a:xfrm>
-            <a:off x="8961120" y="4892040"/>
-            <a:ext cx="2331720" cy="411480"/>
-          </a:xfrm>
-          <a:prstGeom prst="rect">
-            <a:avLst/>
-          </a:prstGeom>
-          <a:noFill/>
-        </p:spPr>
-        <p:txBody>
-          <a:bodyPr wrap="square" lIns="0" tIns="0" rIns="0" bIns="0" anchor="ctr">
-            <a:spAutoFit/>
-          </a:bodyPr>
-          <a:lstStyle/>
-          <a:p>
-            <a:pPr algn="ctr"/>
-            <a:r>
-              <a:rPr sz="1800" b="1">
-                <a:solidFill>
-                  <a:srgbClr val="2E6E43"/>
-                </a:solidFill>
-                <a:latin typeface="Calibri"/>
-              </a:rPr>
-              <a:t>✓</a:t>
-            </a:r>
-            <a:endParaRPr sz="1800" b="1">
-              <a:solidFill>
-                <a:srgbClr val="2E6E43"/>
-              </a:solidFill>
-              <a:latin typeface="Calibri"/>
-            </a:endParaRPr>
-          </a:p>
-        </p:txBody>
-      </p:sp>
-      <p:sp>
-        <p:nvSpPr>
-          <p:cNvPr id="50" name="Rounded Rectangle 49"/>
-          <p:cNvSpPr/>
-          <p:nvPr/>
-        </p:nvSpPr>
-        <p:spPr>
-          <a:xfrm>
-            <a:off x="640080" y="5943600"/>
-            <a:ext cx="10881360" cy="502920"/>
-          </a:xfrm>
-          <a:prstGeom prst="roundRect">
-            <a:avLst/>
-          </a:prstGeom>
-          <a:solidFill>
-            <a:srgbClr val="2E6E43"/>
-          </a:solidFill>
-          <a:ln>
-            <a:noFill/>
-          </a:ln>
-          <a:effectLst/>
-        </p:spPr>
-        <p:style>
-          <a:lnRef idx="1">
-            <a:schemeClr val="accent1"/>
-          </a:lnRef>
-          <a:fillRef idx="3">
-            <a:schemeClr val="accent1"/>
-          </a:fillRef>
-          <a:effectRef idx="2">
-            <a:schemeClr val="accent1"/>
-          </a:effectRef>
-          <a:fontRef idx="minor">
-            <a:schemeClr val="lt1"/>
-          </a:fontRef>
-        </p:style>
-        <p:txBody>
-          <a:bodyPr rtlCol="0" anchor="ctr"/>
-          <a:lstStyle/>
-          <a:p>
-            <a:pPr algn="ctr"/>
-          </a:p>
-        </p:txBody>
-      </p:sp>
-      <p:sp>
-        <p:nvSpPr>
-          <p:cNvPr id="51" name="TextBox 50"/>
-          <p:cNvSpPr txBox="1"/>
-          <p:nvPr/>
-        </p:nvSpPr>
-        <p:spPr>
-          <a:xfrm>
-            <a:off x="640080" y="5989320"/>
-            <a:ext cx="10881360" cy="457200"/>
-          </a:xfrm>
-          <a:prstGeom prst="rect">
-            <a:avLst/>
-          </a:prstGeom>
-          <a:noFill/>
-        </p:spPr>
-        <p:txBody>
-          <a:bodyPr wrap="square" lIns="0" tIns="0" rIns="0" bIns="0" anchor="ctr">
-            <a:spAutoFit/>
-          </a:bodyPr>
-          <a:lstStyle/>
-          <a:p>
-            <a:pPr algn="ctr"/>
-            <a:r>
-              <a:rPr sz="1200" b="1">
-                <a:solidFill>
-                  <a:srgbClr val="FFFFFF"/>
-                </a:solidFill>
-                <a:latin typeface="Calibri"/>
-              </a:rPr>
-              <a:t>SmartFarm is the only option that wins on every axis rural Cambodian farmers actually care about.</a:t>
-            </a:r>
-            <a:endParaRPr sz="1200" b="1">
-              <a:solidFill>
-                <a:srgbClr val="FFFFFF"/>
-              </a:solidFill>
-              <a:latin typeface="Calibri"/>
-            </a:endParaRPr>
-          </a:p>
-        </p:txBody>
-      </p:sp>
-      <p:sp>
-        <p:nvSpPr>
-          <p:cNvPr id="53" name="TextBox 52"/>
-          <p:cNvSpPr txBox="1"/>
-          <p:nvPr/>
-        </p:nvSpPr>
-        <p:spPr>
-          <a:xfrm>
-            <a:off x="10698480" y="6446520"/>
-            <a:ext cx="1005840" cy="274320"/>
-          </a:xfrm>
-          <a:prstGeom prst="rect">
-            <a:avLst/>
-          </a:prstGeom>
-          <a:noFill/>
-        </p:spPr>
-        <p:txBody>
-          <a:bodyPr wrap="square" lIns="0" tIns="0" rIns="0" bIns="0" anchor="t">
-            <a:spAutoFit/>
-          </a:bodyPr>
-          <a:lstStyle/>
-          <a:p>
-            <a:pPr algn="r"/>
-            <a:r>
-              <a:rPr sz="900" b="0">
-                <a:solidFill>
-                  <a:srgbClr val="6B6E6A"/>
-                </a:solidFill>
-                <a:latin typeface="Calibri"/>
-              </a:rPr>
-              <a:t>12 / 16</a:t>
-            </a:r>
-            <a:endParaRPr sz="900" b="0">
-              <a:solidFill>
-                <a:srgbClr val="6B6E6A"/>
-              </a:solidFill>
-              <a:latin typeface="Calibri"/>
-            </a:endParaRPr>
-          </a:p>
-        </p:txBody>
-      </p:sp>
-      <p:sp>
-        <p:nvSpPr>
-          <p:cNvPr id="52" name="TextBox 19"/>
-          <p:cNvSpPr txBox="1"/>
-          <p:nvPr/>
-        </p:nvSpPr>
-        <p:spPr>
-          <a:xfrm>
-            <a:off x="548640" y="6582410"/>
-            <a:ext cx="5486400" cy="138430"/>
-          </a:xfrm>
-          <a:prstGeom prst="rect">
-            <a:avLst/>
-          </a:prstGeom>
-          <a:noFill/>
-        </p:spPr>
-        <p:txBody>
-          <a:bodyPr wrap="square" lIns="0" tIns="0" rIns="0" bIns="0" anchor="t">
-            <a:spAutoFit/>
-          </a:bodyPr>
-          <a:lstStyle/>
-          <a:p>
-            <a:pPr algn="l"/>
-            <a:r>
-              <a:rPr sz="900" b="0">
-                <a:solidFill>
-                  <a:srgbClr val="6B6E6A"/>
-                </a:solidFill>
-                <a:latin typeface="Khmer OS Siemreap" panose="02000500000000020004" charset="0"/>
-                <a:cs typeface="Khmer OS Siemreap" panose="02000500000000020004" charset="0"/>
-              </a:rPr>
-              <a:t>SmartFarm — កសិកម្មឆ្លាតវៃ ងាយស្រួល</a:t>
-            </a:r>
-            <a:endParaRPr sz="900" b="0">
-              <a:solidFill>
-                <a:srgbClr val="6B6E6A"/>
-              </a:solidFill>
-              <a:latin typeface="Khmer OS Siemreap" panose="02000500000000020004" charset="0"/>
-              <a:cs typeface="Khmer OS Siemreap" panose="02000500000000020004" charset="0"/>
-            </a:endParaRPr>
-          </a:p>
-        </p:txBody>
-      </p:sp>
-    </p:spTree>
-  </p:cSld>
-  <p:clrMapOvr>
-    <a:masterClrMapping/>
-  </p:clrMapOvr>
-</p:sld>
-</file>
-
-<file path=ppt/slides/slide13.xml><?xml version="1.0" encoding="utf-8"?>
-<p:sld xmlns:a="http://schemas.openxmlformats.org/drawingml/2006/main" xmlns:r="http://schemas.openxmlformats.org/officeDocument/2006/relationships" xmlns:p="http://schemas.openxmlformats.org/presentationml/2006/main">
-  <p:cSld>
-    <p:spTree>
-      <p:nvGrpSpPr>
-        <p:cNvPr id="1" name=""/>
-        <p:cNvGrpSpPr/>
-        <p:nvPr/>
-      </p:nvGrpSpPr>
-      <p:grpSpPr/>
-      <p:sp>
-        <p:nvSpPr>
-          <p:cNvPr id="2" name="Rectangle 1"/>
-          <p:cNvSpPr/>
-          <p:nvPr/>
-        </p:nvSpPr>
-        <p:spPr>
-          <a:xfrm>
-            <a:off x="0" y="0"/>
-            <a:ext cx="12191695" cy="6858000"/>
-          </a:xfrm>
-          <a:prstGeom prst="rect">
-            <a:avLst/>
-          </a:prstGeom>
-          <a:solidFill>
-            <a:srgbClr val="F5F6F5"/>
-          </a:solidFill>
-          <a:ln>
-            <a:noFill/>
-          </a:ln>
-          <a:effectLst/>
-        </p:spPr>
-        <p:style>
-          <a:lnRef idx="1">
-            <a:schemeClr val="accent1"/>
-          </a:lnRef>
-          <a:fillRef idx="3">
-            <a:schemeClr val="accent1"/>
-          </a:fillRef>
-          <a:effectRef idx="2">
-            <a:schemeClr val="accent1"/>
-          </a:effectRef>
-          <a:fontRef idx="minor">
-            <a:schemeClr val="lt1"/>
-          </a:fontRef>
-        </p:style>
-        <p:txBody>
-          <a:bodyPr rtlCol="0" anchor="ctr"/>
-          <a:lstStyle/>
-          <a:p>
-            <a:pPr algn="ctr"/>
-          </a:p>
-        </p:txBody>
-      </p:sp>
-      <p:sp>
-        <p:nvSpPr>
-          <p:cNvPr id="3" name="Rectangle 2"/>
-          <p:cNvSpPr/>
-          <p:nvPr/>
-        </p:nvSpPr>
-        <p:spPr>
-          <a:xfrm>
             <a:off x="0" y="0"/>
             <a:ext cx="12191695" cy="6858000"/>
           </a:xfrm>
@@ -9189,147 +8176,6 @@
       </p:sp>
       <p:sp>
         <p:nvSpPr>
-          <p:cNvPr id="18" name="TextBox 17"/>
-          <p:cNvSpPr txBox="1"/>
-          <p:nvPr/>
-        </p:nvSpPr>
-        <p:spPr>
-          <a:xfrm>
-            <a:off x="1274445" y="4173220"/>
-            <a:ext cx="621665" cy="410845"/>
-          </a:xfrm>
-          <a:prstGeom prst="rect">
-            <a:avLst/>
-          </a:prstGeom>
-          <a:noFill/>
-        </p:spPr>
-        <p:txBody>
-          <a:bodyPr wrap="square" lIns="0" tIns="0" rIns="0" bIns="0" anchor="t">
-            <a:noAutofit/>
-          </a:bodyPr>
-          <a:lstStyle/>
-          <a:p>
-            <a:pPr algn="l"/>
-            <a:r>
-              <a:rPr lang="zh-CN" altLang="en-US" sz="2000" b="1">
-                <a:solidFill>
-                  <a:srgbClr val="2E6E43"/>
-                </a:solidFill>
-                <a:latin typeface="Calibri"/>
-              </a:rPr>
-              <a:t>📖</a:t>
-            </a:r>
-            <a:endParaRPr sz="2000" b="1">
-              <a:solidFill>
-                <a:srgbClr val="2E6E43"/>
-              </a:solidFill>
-              <a:latin typeface="Calibri"/>
-            </a:endParaRPr>
-          </a:p>
-        </p:txBody>
-      </p:sp>
-      <p:sp>
-        <p:nvSpPr>
-          <p:cNvPr id="19" name="TextBox 18"/>
-          <p:cNvSpPr txBox="1"/>
-          <p:nvPr/>
-        </p:nvSpPr>
-        <p:spPr>
-          <a:xfrm>
-            <a:off x="1828800" y="4114800"/>
-            <a:ext cx="4023360" cy="457200"/>
-          </a:xfrm>
-          <a:prstGeom prst="rect">
-            <a:avLst/>
-          </a:prstGeom>
-          <a:noFill/>
-        </p:spPr>
-        <p:txBody>
-          <a:bodyPr wrap="square" lIns="0" tIns="0" rIns="0" bIns="0" anchor="t">
-            <a:spAutoFit/>
-          </a:bodyPr>
-          <a:lstStyle/>
-          <a:p>
-            <a:pPr algn="l"/>
-            <a:r>
-              <a:rPr sz="1600" b="1">
-                <a:solidFill>
-                  <a:srgbClr val="1A1F1C"/>
-                </a:solidFill>
-                <a:latin typeface="Calibri"/>
-              </a:rPr>
-              <a:t>Unknown pests &amp; disease</a:t>
-            </a:r>
-            <a:endParaRPr sz="1600" b="1">
-              <a:solidFill>
-                <a:srgbClr val="1A1F1C"/>
-              </a:solidFill>
-              <a:latin typeface="Calibri"/>
-            </a:endParaRPr>
-          </a:p>
-        </p:txBody>
-      </p:sp>
-      <p:sp>
-        <p:nvSpPr>
-          <p:cNvPr id="20" name="TextBox 19"/>
-          <p:cNvSpPr txBox="1"/>
-          <p:nvPr/>
-        </p:nvSpPr>
-        <p:spPr>
-          <a:xfrm>
-            <a:off x="1828800" y="4663440"/>
-            <a:ext cx="3840480" cy="1280160"/>
-          </a:xfrm>
-          <a:prstGeom prst="rect">
-            <a:avLst/>
-          </a:prstGeom>
-          <a:noFill/>
-        </p:spPr>
-        <p:txBody>
-          <a:bodyPr wrap="square" lIns="0" tIns="0" rIns="0" bIns="0" anchor="t">
-            <a:spAutoFit/>
-          </a:bodyPr>
-          <a:lstStyle/>
-          <a:p>
-            <a:pPr algn="l"/>
-            <a:r>
-              <a:rPr sz="1100" b="0">
-                <a:solidFill>
-                  <a:srgbClr val="6B6E6A"/>
-                </a:solidFill>
-                <a:latin typeface="Calibri"/>
-              </a:rPr>
-              <a:t>By the time damage is visible, the right treatment</a:t>
-            </a:r>
-            <a:endParaRPr sz="1100" b="0">
-              <a:solidFill>
-                <a:srgbClr val="6B6E6A"/>
-              </a:solidFill>
-              <a:latin typeface="Calibri"/>
-            </a:endParaRPr>
-          </a:p>
-          <a:p>
-            <a:pPr algn="l"/>
-            <a:r>
-              <a:rPr sz="1100" b="0">
-                <a:solidFill>
-                  <a:srgbClr val="6B6E6A"/>
-                </a:solidFill>
-                <a:latin typeface="Calibri"/>
-              </a:rPr>
-              <a:t>is often guessed at or asked from neighbors.</a:t>
-            </a:r>
-            <a:endParaRPr sz="1100" b="0">
-              <a:solidFill>
-                <a:srgbClr val="6B6E6A"/>
-              </a:solidFill>
-              <a:latin typeface="Calibri"/>
-            </a:endParaRPr>
-          </a:p>
-        </p:txBody>
-      </p:sp>
-      <p:sp>
-        <p:nvSpPr>
           <p:cNvPr id="21" name="Rounded Rectangle 20"/>
           <p:cNvSpPr/>
           <p:nvPr/>
@@ -9548,7 +8394,7 @@
                 </a:solidFill>
                 <a:latin typeface="Calibri"/>
               </a:rPr>
-              <a:t>2 / 16</a:t>
+              <a:t>2 / 15</a:t>
             </a:r>
             <a:endParaRPr sz="900" b="0">
               <a:solidFill>
@@ -9801,7 +8647,7 @@
                 </a:solidFill>
                 <a:latin typeface="Calibri"/>
               </a:rPr>
-              <a:t>One offline app, four tools farmers already need</a:t>
+              <a:t>One offline app, three tools farmers already need</a:t>
             </a:r>
             <a:endParaRPr sz="2800" b="1">
               <a:solidFill>
@@ -10403,166 +9249,6 @@
       </p:sp>
       <p:sp>
         <p:nvSpPr>
-          <p:cNvPr id="18" name="TextBox 17"/>
-          <p:cNvSpPr txBox="1"/>
-          <p:nvPr/>
-        </p:nvSpPr>
-        <p:spPr>
-          <a:xfrm>
-            <a:off x="6309360" y="1737360"/>
-            <a:ext cx="2697480" cy="430530"/>
-          </a:xfrm>
-          <a:prstGeom prst="rect">
-            <a:avLst/>
-          </a:prstGeom>
-          <a:noFill/>
-        </p:spPr>
-        <p:txBody>
-          <a:bodyPr wrap="square" lIns="0" tIns="0" rIns="0" bIns="0" anchor="t">
-            <a:spAutoFit/>
-          </a:bodyPr>
-          <a:lstStyle/>
-          <a:p>
-            <a:pPr algn="ctr"/>
-            <a:r>
-              <a:rPr lang="zh-CN" altLang="en-US" sz="2800" b="1">
-                <a:solidFill>
-                  <a:srgbClr val="2E6E43"/>
-                </a:solidFill>
-                <a:latin typeface="Calibri"/>
-                <a:sym typeface="+mn-ea"/>
-              </a:rPr>
-              <a:t>📖</a:t>
-            </a:r>
-            <a:endParaRPr sz="2800" b="1">
-              <a:solidFill>
-                <a:srgbClr val="2E6E43"/>
-              </a:solidFill>
-              <a:latin typeface="Calibri"/>
-            </a:endParaRPr>
-          </a:p>
-        </p:txBody>
-      </p:sp>
-      <p:sp>
-        <p:nvSpPr>
-          <p:cNvPr id="19" name="TextBox 18"/>
-          <p:cNvSpPr txBox="1"/>
-          <p:nvPr/>
-        </p:nvSpPr>
-        <p:spPr>
-          <a:xfrm>
-            <a:off x="6309360" y="2606040"/>
-            <a:ext cx="2697480" cy="365760"/>
-          </a:xfrm>
-          <a:prstGeom prst="rect">
-            <a:avLst/>
-          </a:prstGeom>
-          <a:noFill/>
-        </p:spPr>
-        <p:txBody>
-          <a:bodyPr wrap="square" lIns="0" tIns="0" rIns="0" bIns="0" anchor="t">
-            <a:spAutoFit/>
-          </a:bodyPr>
-          <a:lstStyle/>
-          <a:p>
-            <a:pPr algn="ctr"/>
-            <a:r>
-              <a:rPr sz="1400" b="1">
-                <a:solidFill>
-                  <a:srgbClr val="1A1F1C"/>
-                </a:solidFill>
-                <a:latin typeface="Calibri"/>
-              </a:rPr>
-              <a:t>Pest &amp; Disease Guide</a:t>
-            </a:r>
-            <a:endParaRPr sz="1400" b="1">
-              <a:solidFill>
-                <a:srgbClr val="1A1F1C"/>
-              </a:solidFill>
-              <a:latin typeface="Calibri"/>
-            </a:endParaRPr>
-          </a:p>
-        </p:txBody>
-      </p:sp>
-      <p:sp>
-        <p:nvSpPr>
-          <p:cNvPr id="20" name="TextBox 19"/>
-          <p:cNvSpPr txBox="1"/>
-          <p:nvPr/>
-        </p:nvSpPr>
-        <p:spPr>
-          <a:xfrm>
-            <a:off x="6537960" y="3063240"/>
-            <a:ext cx="2240280" cy="2011680"/>
-          </a:xfrm>
-          <a:prstGeom prst="rect">
-            <a:avLst/>
-          </a:prstGeom>
-          <a:noFill/>
-        </p:spPr>
-        <p:txBody>
-          <a:bodyPr wrap="square" lIns="0" tIns="0" rIns="0" bIns="0" anchor="t">
-            <a:spAutoFit/>
-          </a:bodyPr>
-          <a:lstStyle/>
-          <a:p>
-            <a:pPr algn="ctr"/>
-            <a:r>
-              <a:rPr sz="1000" b="0">
-                <a:solidFill>
-                  <a:srgbClr val="6B6E6A"/>
-                </a:solidFill>
-                <a:latin typeface="Calibri"/>
-              </a:rPr>
-              <a:t>Bundled offline library.</a:t>
-            </a:r>
-            <a:endParaRPr sz="1000" b="0">
-              <a:solidFill>
-                <a:srgbClr val="6B6E6A"/>
-              </a:solidFill>
-              <a:latin typeface="Calibri"/>
-            </a:endParaRPr>
-          </a:p>
-          <a:p>
-            <a:pPr algn="ctr"/>
-            <a:r>
-              <a:rPr sz="1000" b="0">
-                <a:solidFill>
-                  <a:srgbClr val="6B6E6A"/>
-                </a:solidFill>
-                <a:latin typeface="Calibri"/>
-              </a:rPr>
-              <a:t>Search + category filters.</a:t>
-            </a:r>
-            <a:endParaRPr sz="1000" b="0">
-              <a:solidFill>
-                <a:srgbClr val="6B6E6A"/>
-              </a:solidFill>
-              <a:latin typeface="Calibri"/>
-            </a:endParaRPr>
-          </a:p>
-          <a:p>
-            <a:pPr algn="ctr"/>
-            <a:r>
-              <a:rPr sz="1000" b="0">
-                <a:solidFill>
-                  <a:srgbClr val="6B6E6A"/>
-                </a:solidFill>
-                <a:latin typeface="Calibri"/>
-              </a:rPr>
-              <a:t>Symptoms, treatment, prevention.</a:t>
-            </a:r>
-            <a:endParaRPr sz="1000" b="0">
-              <a:solidFill>
-                <a:srgbClr val="6B6E6A"/>
-              </a:solidFill>
-              <a:latin typeface="Calibri"/>
-            </a:endParaRPr>
-          </a:p>
-        </p:txBody>
-      </p:sp>
-      <p:sp>
-        <p:nvSpPr>
           <p:cNvPr id="21" name="Rounded Rectangle 20"/>
           <p:cNvSpPr/>
           <p:nvPr/>
@@ -10925,7 +9611,7 @@
                 </a:solidFill>
                 <a:latin typeface="Calibri"/>
               </a:rPr>
-              <a:t>3 / 16</a:t>
+              <a:t>3 / 15</a:t>
             </a:r>
             <a:endParaRPr sz="900" b="0">
               <a:solidFill>
@@ -11638,7 +10324,7 @@
                 </a:solidFill>
                 <a:latin typeface="Calibri"/>
               </a:rPr>
-              <a:t>4 modules</a:t>
+              <a:t>3 modules</a:t>
             </a:r>
             <a:endParaRPr sz="1200" b="0">
               <a:solidFill>
@@ -11828,7 +10514,7 @@
                 </a:solidFill>
                 <a:latin typeface="Calibri"/>
               </a:rPr>
-              <a:t>Look up pest · Backup</a:t>
+              <a:t>Backup</a:t>
             </a:r>
             <a:endParaRPr sz="1200" b="0">
               <a:solidFill>
@@ -11951,7 +10637,7 @@
                 </a:solidFill>
                 <a:latin typeface="Calibri"/>
               </a:rPr>
-              <a:t>4 / 16</a:t>
+              <a:t>4 / 15</a:t>
             </a:r>
             <a:endParaRPr sz="900" b="0">
               <a:solidFill>
@@ -12141,7 +10827,7 @@
                 </a:solidFill>
                 <a:latin typeface="Calibri"/>
               </a:rPr>
-              <a:t>FEATURE 1 / 4</a:t>
+              <a:t>FEATURE 1 / 3</a:t>
             </a:r>
             <a:endParaRPr sz="1100" b="1">
               <a:solidFill>
@@ -12785,7 +11471,7 @@
                 </a:solidFill>
                 <a:latin typeface="Calibri"/>
               </a:rPr>
-              <a:t>5 / 16</a:t>
+              <a:t>5 / 15</a:t>
             </a:r>
             <a:endParaRPr sz="900" b="0">
               <a:solidFill>
@@ -12999,7 +11685,7 @@
                 </a:solidFill>
                 <a:latin typeface="Calibri"/>
               </a:rPr>
-              <a:t>FEATURE 2 / 4</a:t>
+              <a:t>FEATURE 2 / 3</a:t>
             </a:r>
             <a:endParaRPr sz="1100" b="1">
               <a:solidFill>
@@ -13624,7 +12310,7 @@
                 </a:solidFill>
                 <a:latin typeface="Calibri"/>
               </a:rPr>
-              <a:t>6 / 16</a:t>
+              <a:t>6 / 15</a:t>
             </a:r>
             <a:endParaRPr sz="900" b="0">
               <a:solidFill>
@@ -13728,7 +12414,7 @@
         </p:nvSpPr>
         <p:spPr>
           <a:xfrm>
-            <a:off x="-635" y="0"/>
+            <a:off x="0" y="0"/>
             <a:ext cx="12191695" cy="6858000"/>
           </a:xfrm>
           <a:prstGeom prst="rect">
@@ -13838,7 +12524,7 @@
                 </a:solidFill>
                 <a:latin typeface="Calibri"/>
               </a:rPr>
-              <a:t>FEATURE 3 / 4</a:t>
+              <a:t>FEATURE 3 / 3</a:t>
             </a:r>
             <a:endParaRPr sz="1100" b="1">
               <a:solidFill>
@@ -13879,7 +12565,7 @@
                 </a:solidFill>
                 <a:latin typeface="Calibri"/>
               </a:rPr>
-              <a:t>Pest &amp; Disease Guide — answers without internet</a:t>
+              <a:t>Settings &amp; Backup — own your data</a:t>
             </a:r>
             <a:endParaRPr sz="2800" b="1">
               <a:solidFill>
@@ -13892,7 +12578,183 @@
       </p:sp>
       <p:sp>
         <p:nvSpPr>
-          <p:cNvPr id="45" name="TextBox 44"/>
+          <p:cNvPr id="12" name="Rectangle 11"/>
+          <p:cNvSpPr/>
+          <p:nvPr/>
+        </p:nvSpPr>
+        <p:spPr>
+          <a:xfrm>
+            <a:off x="713232" y="1913890"/>
+            <a:ext cx="2414016" cy="6350"/>
+          </a:xfrm>
+          <a:prstGeom prst="rect">
+            <a:avLst/>
+          </a:prstGeom>
+          <a:solidFill>
+            <a:srgbClr val="D8DBD9"/>
+          </a:solidFill>
+          <a:ln>
+            <a:noFill/>
+          </a:ln>
+          <a:effectLst/>
+        </p:spPr>
+        <p:style>
+          <a:lnRef idx="1">
+            <a:schemeClr val="accent1"/>
+          </a:lnRef>
+          <a:fillRef idx="3">
+            <a:schemeClr val="accent1"/>
+          </a:fillRef>
+          <a:effectRef idx="2">
+            <a:schemeClr val="accent1"/>
+          </a:effectRef>
+          <a:fontRef idx="minor">
+            <a:schemeClr val="lt1"/>
+          </a:fontRef>
+        </p:style>
+        <p:txBody>
+          <a:bodyPr rtlCol="0" anchor="ctr"/>
+          <a:lstStyle/>
+          <a:p>
+            <a:pPr algn="ctr"/>
+          </a:p>
+        </p:txBody>
+      </p:sp>
+      <p:sp>
+        <p:nvSpPr>
+          <p:cNvPr id="14" name="Rectangle 13"/>
+          <p:cNvSpPr/>
+          <p:nvPr/>
+        </p:nvSpPr>
+        <p:spPr>
+          <a:xfrm>
+            <a:off x="713232" y="6138418"/>
+            <a:ext cx="2414016" cy="6350"/>
+          </a:xfrm>
+          <a:prstGeom prst="rect">
+            <a:avLst/>
+          </a:prstGeom>
+          <a:solidFill>
+            <a:srgbClr val="D8DBD9"/>
+          </a:solidFill>
+          <a:ln>
+            <a:noFill/>
+          </a:ln>
+          <a:effectLst/>
+        </p:spPr>
+        <p:style>
+          <a:lnRef idx="1">
+            <a:schemeClr val="accent1"/>
+          </a:lnRef>
+          <a:fillRef idx="3">
+            <a:schemeClr val="accent1"/>
+          </a:fillRef>
+          <a:effectRef idx="2">
+            <a:schemeClr val="accent1"/>
+          </a:effectRef>
+          <a:fontRef idx="minor">
+            <a:schemeClr val="lt1"/>
+          </a:fontRef>
+        </p:style>
+        <p:txBody>
+          <a:bodyPr rtlCol="0" anchor="ctr"/>
+          <a:lstStyle/>
+          <a:p>
+            <a:pPr algn="ctr"/>
+          </a:p>
+        </p:txBody>
+      </p:sp>
+      <p:sp>
+        <p:nvSpPr>
+          <p:cNvPr id="31" name="Rounded Rectangle 30"/>
+          <p:cNvSpPr/>
+          <p:nvPr/>
+        </p:nvSpPr>
+        <p:spPr>
+          <a:xfrm>
+            <a:off x="914400" y="3246120"/>
+            <a:ext cx="960120" cy="365760"/>
+          </a:xfrm>
+          <a:prstGeom prst="roundRect">
+            <a:avLst/>
+          </a:prstGeom>
+          <a:solidFill>
+            <a:srgbClr val="F5F6F5"/>
+          </a:solidFill>
+          <a:ln>
+            <a:noFill/>
+          </a:ln>
+          <a:effectLst/>
+        </p:spPr>
+        <p:style>
+          <a:lnRef idx="1">
+            <a:schemeClr val="accent1"/>
+          </a:lnRef>
+          <a:fillRef idx="3">
+            <a:schemeClr val="accent1"/>
+          </a:fillRef>
+          <a:effectRef idx="2">
+            <a:schemeClr val="accent1"/>
+          </a:effectRef>
+          <a:fontRef idx="minor">
+            <a:schemeClr val="lt1"/>
+          </a:fontRef>
+        </p:style>
+        <p:txBody>
+          <a:bodyPr rtlCol="0" anchor="ctr"/>
+          <a:lstStyle/>
+          <a:p>
+            <a:pPr algn="ctr"/>
+          </a:p>
+        </p:txBody>
+      </p:sp>
+      <p:sp>
+        <p:nvSpPr>
+          <p:cNvPr id="34" name="Rounded Rectangle 33"/>
+          <p:cNvSpPr/>
+          <p:nvPr/>
+        </p:nvSpPr>
+        <p:spPr>
+          <a:xfrm>
+            <a:off x="1965960" y="3246120"/>
+            <a:ext cx="960120" cy="365760"/>
+          </a:xfrm>
+          <a:prstGeom prst="roundRect">
+            <a:avLst/>
+          </a:prstGeom>
+          <a:solidFill>
+            <a:srgbClr val="F5F6F5"/>
+          </a:solidFill>
+          <a:ln>
+            <a:noFill/>
+          </a:ln>
+          <a:effectLst/>
+        </p:spPr>
+        <p:style>
+          <a:lnRef idx="1">
+            <a:schemeClr val="accent1"/>
+          </a:lnRef>
+          <a:fillRef idx="3">
+            <a:schemeClr val="accent1"/>
+          </a:fillRef>
+          <a:effectRef idx="2">
+            <a:schemeClr val="accent1"/>
+          </a:effectRef>
+          <a:fontRef idx="minor">
+            <a:schemeClr val="lt1"/>
+          </a:fontRef>
+        </p:style>
+        <p:txBody>
+          <a:bodyPr rtlCol="0" anchor="ctr"/>
+          <a:lstStyle/>
+          <a:p>
+            <a:pPr algn="ctr"/>
+          </a:p>
+        </p:txBody>
+      </p:sp>
+      <p:sp>
+        <p:nvSpPr>
+          <p:cNvPr id="47" name="TextBox 46"/>
           <p:cNvSpPr txBox="1"/>
           <p:nvPr/>
         </p:nvSpPr>
@@ -13933,7 +12795,7 @@
       </p:sp>
       <p:sp>
         <p:nvSpPr>
-          <p:cNvPr id="46" name="TextBox 45"/>
+          <p:cNvPr id="48" name="TextBox 47"/>
           <p:cNvSpPr txBox="1"/>
           <p:nvPr/>
         </p:nvSpPr>
@@ -13961,7 +12823,7 @@
                 </a:solidFill>
                 <a:latin typeface="Calibri"/>
               </a:rPr>
-              <a:t>When a pest appears, decisions are minutes — not days.</a:t>
+              <a:t>Phones break. Phones get sold. Phones get reset.</a:t>
             </a:r>
             <a:endParaRPr sz="1400" b="0">
               <a:solidFill>
@@ -13979,7 +12841,7 @@
                 </a:solidFill>
                 <a:latin typeface="Calibri"/>
               </a:rPr>
-              <a:t>Online services aren't an option in the field.</a:t>
+              <a:t>Two seasons of records vanish in one moment without backup.</a:t>
             </a:r>
             <a:endParaRPr sz="1400" b="0">
               <a:solidFill>
@@ -13992,7 +12854,7 @@
       </p:sp>
       <p:sp>
         <p:nvSpPr>
-          <p:cNvPr id="47" name="TextBox 46"/>
+          <p:cNvPr id="49" name="TextBox 48"/>
           <p:cNvSpPr txBox="1"/>
           <p:nvPr/>
         </p:nvSpPr>
@@ -14033,14 +12895,14 @@
       </p:sp>
       <p:sp>
         <p:nvSpPr>
-          <p:cNvPr id="48" name="TextBox 47"/>
+          <p:cNvPr id="50" name="TextBox 49"/>
           <p:cNvSpPr txBox="1"/>
           <p:nvPr/>
         </p:nvSpPr>
         <p:spPr>
           <a:xfrm>
             <a:off x="3840480" y="3657600"/>
-            <a:ext cx="7772400" cy="1661795"/>
+            <a:ext cx="7772400" cy="1792605"/>
           </a:xfrm>
           <a:prstGeom prst="rect">
             <a:avLst/>
@@ -14049,7 +12911,7 @@
         </p:spPr>
         <p:txBody>
           <a:bodyPr wrap="square" lIns="0" tIns="0" rIns="0" bIns="0" anchor="t">
-            <a:spAutoFit/>
+            <a:noAutofit/>
           </a:bodyPr>
           <a:lstStyle/>
           <a:p>
@@ -14065,7 +12927,7 @@
                 </a:solidFill>
                 <a:latin typeface="Calibri"/>
               </a:rPr>
-              <a:t>•  Bundled offline library — no network call ever</a:t>
+              <a:t>•  Light / dark theme — usable in bright sun and at night</a:t>
             </a:r>
             <a:endParaRPr sz="1200" b="0">
               <a:solidFill>
@@ -14087,7 +12949,7 @@
                 </a:solidFill>
                 <a:latin typeface="Calibri"/>
               </a:rPr>
-              <a:t>•  Search by Khmer name</a:t>
+              <a:t>•  Data stats — see counts at a glance</a:t>
             </a:r>
             <a:endParaRPr sz="1200" b="0">
               <a:solidFill>
@@ -14109,24 +12971,13 @@
                 </a:solidFill>
                 <a:latin typeface="Calibri"/>
               </a:rPr>
-              <a:t>•  Category filter: </a:t>
-            </a:r>
-            <a:r>
-              <a:rPr sz="1200" b="0">
-                <a:solidFill>
-                  <a:srgbClr val="3A423D"/>
-                </a:solidFill>
-                <a:latin typeface="Khmer OS Siemreap" panose="02000500000000020004" charset="0"/>
-                <a:cs typeface="Khmer OS Siemreap" panose="02000500000000020004" charset="0"/>
-              </a:rPr>
-              <a:t>សត្វល្អិត (Insects), ផ្សិត (Fungal), បាក់តេរី (Bacterial)</a:t>
+              <a:t>•  CSV export — share with cooperatives, MFIs, tax officers</a:t>
             </a:r>
             <a:endParaRPr sz="1200" b="0">
               <a:solidFill>
                 <a:srgbClr val="3A423D"/>
               </a:solidFill>
-              <a:latin typeface="Khmer OS Siemreap" panose="02000500000000020004" charset="0"/>
-              <a:cs typeface="Khmer OS Siemreap" panose="02000500000000020004" charset="0"/>
+              <a:latin typeface="Calibri"/>
             </a:endParaRPr>
           </a:p>
           <a:p>
@@ -14142,7 +12993,7 @@
                 </a:solidFill>
                 <a:latin typeface="Calibri"/>
               </a:rPr>
-              <a:t>•  Detail view with expandable sections:</a:t>
+              <a:t>•  Full JSON backup — one tap, save to Files / share / cloud</a:t>
             </a:r>
             <a:endParaRPr sz="1200" b="0">
               <a:solidFill>
@@ -14164,24 +13015,13 @@
                 </a:solidFill>
                 <a:latin typeface="Calibri"/>
               </a:rPr>
-              <a:t>      </a:t>
-            </a:r>
-            <a:r>
-              <a:rPr sz="1200" b="0">
-                <a:solidFill>
-                  <a:srgbClr val="3A423D"/>
-                </a:solidFill>
-                <a:latin typeface="Khmer OS Siemreap" panose="02000500000000020004" charset="0"/>
-                <a:cs typeface="Khmer OS Siemreap" panose="02000500000000020004" charset="0"/>
-              </a:rPr>
-              <a:t>រោគសញ្ញា (Symptoms) · វិធីព្យាបាល (Treatment) · វិធីការពារ (Prevention)</a:t>
+              <a:t>•  Restore — load a backup file, replace current data</a:t>
             </a:r>
             <a:endParaRPr sz="1200" b="0">
               <a:solidFill>
                 <a:srgbClr val="3A423D"/>
               </a:solidFill>
-              <a:latin typeface="Khmer OS Siemreap" panose="02000500000000020004" charset="0"/>
-              <a:cs typeface="Khmer OS Siemreap" panose="02000500000000020004" charset="0"/>
+              <a:latin typeface="Calibri"/>
             </a:endParaRPr>
           </a:p>
           <a:p>
@@ -14197,7 +13037,7 @@
                 </a:solidFill>
                 <a:latin typeface="Calibri"/>
               </a:rPr>
-              <a:t>•  Designed to scale to 30–50 entries with photos</a:t>
+              <a:t>•  Clear all — fresh start, with a confirmation guard</a:t>
             </a:r>
             <a:endParaRPr sz="1200" b="0">
               <a:solidFill>
@@ -14210,7 +13050,7 @@
       </p:sp>
       <p:sp>
         <p:nvSpPr>
-          <p:cNvPr id="49" name="Rounded Rectangle 48"/>
+          <p:cNvPr id="51" name="Rounded Rectangle 50"/>
           <p:cNvSpPr/>
           <p:nvPr/>
         </p:nvSpPr>
@@ -14254,7 +13094,7 @@
       </p:sp>
       <p:sp>
         <p:nvSpPr>
-          <p:cNvPr id="50" name="TextBox 49"/>
+          <p:cNvPr id="52" name="TextBox 51"/>
           <p:cNvSpPr txBox="1"/>
           <p:nvPr/>
         </p:nvSpPr>
@@ -14282,7 +13122,7 @@
                 </a:solidFill>
                 <a:latin typeface="Calibri"/>
               </a:rPr>
-              <a:t>Lookup Flow</a:t>
+              <a:t>Backup &amp; Restore Flow</a:t>
             </a:r>
             <a:endParaRPr sz="1000" b="1">
               <a:solidFill>
@@ -14295,7 +13135,7 @@
       </p:sp>
       <p:sp>
         <p:nvSpPr>
-          <p:cNvPr id="51" name="TextBox 50"/>
+          <p:cNvPr id="53" name="TextBox 52"/>
           <p:cNvSpPr txBox="1"/>
           <p:nvPr/>
         </p:nvSpPr>
@@ -14323,7 +13163,7 @@
                 </a:solidFill>
                 <a:latin typeface="Calibri"/>
               </a:rPr>
-              <a:t>Search or Filter  →  Tap pest  →  Expand sections  →  Apply treatment</a:t>
+              <a:t>Settings  →  Backup all (JSON)  →  Save file  →  (later) Restore from file  →  Confirm</a:t>
             </a:r>
             <a:endParaRPr sz="1100" b="0">
               <a:solidFill>
@@ -14336,7 +13176,7 @@
       </p:sp>
       <p:sp>
         <p:nvSpPr>
-          <p:cNvPr id="53" name="TextBox 52"/>
+          <p:cNvPr id="55" name="TextBox 54"/>
           <p:cNvSpPr txBox="1"/>
           <p:nvPr/>
         </p:nvSpPr>
@@ -14364,7 +13204,7 @@
                 </a:solidFill>
                 <a:latin typeface="Calibri"/>
               </a:rPr>
-              <a:t>7 / 16</a:t>
+              <a:t>7 / 15</a:t>
             </a:r>
             <a:endParaRPr sz="900" b="0">
               <a:solidFill>
@@ -14377,7 +13217,7 @@
       </p:sp>
       <p:pic>
         <p:nvPicPr>
-          <p:cNvPr id="54" name="Picture 53"/>
+          <p:cNvPr id="56" name="Picture 55"/>
           <p:cNvPicPr>
             <a:picLocks noChangeAspect="1"/>
           </p:cNvPicPr>
@@ -14391,8 +13231,8 @@
         </p:blipFill>
         <p:spPr>
           <a:xfrm>
-            <a:off x="594360" y="1304925"/>
-            <a:ext cx="2336800" cy="4885690"/>
+            <a:off x="629920" y="1363980"/>
+            <a:ext cx="2308860" cy="4895215"/>
           </a:xfrm>
           <a:prstGeom prst="roundRect">
             <a:avLst/>
@@ -14401,7 +13241,7 @@
       </p:pic>
       <p:sp>
         <p:nvSpPr>
-          <p:cNvPr id="52" name="TextBox 19"/>
+          <p:cNvPr id="6" name="TextBox 19"/>
           <p:cNvSpPr txBox="1"/>
           <p:nvPr/>
         </p:nvSpPr>
@@ -14578,7 +13418,7 @@
                 </a:solidFill>
                 <a:latin typeface="Calibri"/>
               </a:rPr>
-              <a:t>FEATURE 4 / 4</a:t>
+              <a:t>WHY NOW &amp; WHY US</a:t>
             </a:r>
             <a:endParaRPr sz="1100" b="1">
               <a:solidFill>
@@ -14619,7 +13459,7 @@
                 </a:solidFill>
                 <a:latin typeface="Calibri"/>
               </a:rPr>
-              <a:t>Settings &amp; Backup — own your data</a:t>
+              <a:t>Four reasons SmartFarm is different</a:t>
             </a:r>
             <a:endParaRPr sz="2800" b="1">
               <a:solidFill>
@@ -14632,20 +13472,66 @@
       </p:sp>
       <p:sp>
         <p:nvSpPr>
-          <p:cNvPr id="12" name="Rectangle 11"/>
+          <p:cNvPr id="6" name="Rounded Rectangle 5"/>
           <p:cNvSpPr/>
           <p:nvPr/>
         </p:nvSpPr>
         <p:spPr>
           <a:xfrm>
-            <a:off x="713232" y="1913890"/>
-            <a:ext cx="2414016" cy="6350"/>
-          </a:xfrm>
-          <a:prstGeom prst="rect">
+            <a:off x="640080" y="1554480"/>
+            <a:ext cx="5440680" cy="2286000"/>
+          </a:xfrm>
+          <a:prstGeom prst="roundRect">
             <a:avLst/>
           </a:prstGeom>
           <a:solidFill>
-            <a:srgbClr val="D8DBD9"/>
+            <a:srgbClr val="FFFFFF"/>
+          </a:solidFill>
+          <a:ln w="9525">
+            <a:solidFill>
+              <a:srgbClr val="D8DBD9"/>
+            </a:solidFill>
+          </a:ln>
+          <a:effectLst/>
+        </p:spPr>
+        <p:style>
+          <a:lnRef idx="1">
+            <a:schemeClr val="accent1"/>
+          </a:lnRef>
+          <a:fillRef idx="3">
+            <a:schemeClr val="accent1"/>
+          </a:fillRef>
+          <a:effectRef idx="2">
+            <a:schemeClr val="accent1"/>
+          </a:effectRef>
+          <a:fontRef idx="minor">
+            <a:schemeClr val="lt1"/>
+          </a:fontRef>
+        </p:style>
+        <p:txBody>
+          <a:bodyPr rtlCol="0" anchor="ctr"/>
+          <a:lstStyle/>
+          <a:p>
+            <a:pPr algn="ctr"/>
+          </a:p>
+        </p:txBody>
+      </p:sp>
+      <p:sp>
+        <p:nvSpPr>
+          <p:cNvPr id="7" name="Rectangle 6"/>
+          <p:cNvSpPr/>
+          <p:nvPr/>
+        </p:nvSpPr>
+        <p:spPr>
+          <a:xfrm>
+            <a:off x="640080" y="1554480"/>
+            <a:ext cx="164592" cy="2286000"/>
+          </a:xfrm>
+          <a:prstGeom prst="rect">
+            <a:avLst/>
+          </a:prstGeom>
+          <a:solidFill>
+            <a:srgbClr val="2E6E43"/>
           </a:solidFill>
           <a:ln>
             <a:noFill/>
@@ -14676,20 +13562,225 @@
       </p:sp>
       <p:sp>
         <p:nvSpPr>
-          <p:cNvPr id="14" name="Rectangle 13"/>
+          <p:cNvPr id="8" name="TextBox 7"/>
+          <p:cNvSpPr txBox="1"/>
+          <p:nvPr/>
+        </p:nvSpPr>
+        <p:spPr>
+          <a:xfrm>
+            <a:off x="1005840" y="1737360"/>
+            <a:ext cx="1463040" cy="457200"/>
+          </a:xfrm>
+          <a:prstGeom prst="rect">
+            <a:avLst/>
+          </a:prstGeom>
+          <a:noFill/>
+        </p:spPr>
+        <p:txBody>
+          <a:bodyPr wrap="square" lIns="0" tIns="0" rIns="0" bIns="0" anchor="t">
+            <a:spAutoFit/>
+          </a:bodyPr>
+          <a:lstStyle/>
+          <a:p>
+            <a:pPr algn="l"/>
+            <a:r>
+              <a:rPr sz="1800" b="1">
+                <a:solidFill>
+                  <a:srgbClr val="2E6E43"/>
+                </a:solidFill>
+                <a:latin typeface="Calibri"/>
+              </a:rPr>
+              <a:t>[OFF]</a:t>
+            </a:r>
+            <a:endParaRPr sz="1800" b="1">
+              <a:solidFill>
+                <a:srgbClr val="2E6E43"/>
+              </a:solidFill>
+              <a:latin typeface="Calibri"/>
+            </a:endParaRPr>
+          </a:p>
+        </p:txBody>
+      </p:sp>
+      <p:sp>
+        <p:nvSpPr>
+          <p:cNvPr id="9" name="TextBox 8"/>
+          <p:cNvSpPr txBox="1"/>
+          <p:nvPr/>
+        </p:nvSpPr>
+        <p:spPr>
+          <a:xfrm>
+            <a:off x="2468880" y="1783080"/>
+            <a:ext cx="3429000" cy="457200"/>
+          </a:xfrm>
+          <a:prstGeom prst="rect">
+            <a:avLst/>
+          </a:prstGeom>
+          <a:noFill/>
+        </p:spPr>
+        <p:txBody>
+          <a:bodyPr wrap="square" lIns="0" tIns="0" rIns="0" bIns="0" anchor="t">
+            <a:spAutoFit/>
+          </a:bodyPr>
+          <a:lstStyle/>
+          <a:p>
+            <a:pPr algn="l"/>
+            <a:r>
+              <a:rPr sz="1600" b="1">
+                <a:solidFill>
+                  <a:srgbClr val="1A1F1C"/>
+                </a:solidFill>
+                <a:latin typeface="Calibri"/>
+              </a:rPr>
+              <a:t>Truly offline</a:t>
+            </a:r>
+            <a:endParaRPr sz="1600" b="1">
+              <a:solidFill>
+                <a:srgbClr val="1A1F1C"/>
+              </a:solidFill>
+              <a:latin typeface="Calibri"/>
+            </a:endParaRPr>
+          </a:p>
+        </p:txBody>
+      </p:sp>
+      <p:sp>
+        <p:nvSpPr>
+          <p:cNvPr id="10" name="TextBox 9"/>
+          <p:cNvSpPr txBox="1"/>
+          <p:nvPr/>
+        </p:nvSpPr>
+        <p:spPr>
+          <a:xfrm>
+            <a:off x="2468880" y="2331720"/>
+            <a:ext cx="3337560" cy="1371600"/>
+          </a:xfrm>
+          <a:prstGeom prst="rect">
+            <a:avLst/>
+          </a:prstGeom>
+          <a:noFill/>
+        </p:spPr>
+        <p:txBody>
+          <a:bodyPr wrap="square" lIns="0" tIns="0" rIns="0" bIns="0" anchor="t">
+            <a:spAutoFit/>
+          </a:bodyPr>
+          <a:lstStyle/>
+          <a:p>
+            <a:pPr algn="l"/>
+            <a:r>
+              <a:rPr sz="1100" b="0">
+                <a:solidFill>
+                  <a:srgbClr val="6B6E6A"/>
+                </a:solidFill>
+                <a:latin typeface="Calibri"/>
+              </a:rPr>
+              <a:t>Every feature works with airplane mode on.</a:t>
+            </a:r>
+            <a:endParaRPr sz="1100" b="0">
+              <a:solidFill>
+                <a:srgbClr val="6B6E6A"/>
+              </a:solidFill>
+              <a:latin typeface="Calibri"/>
+            </a:endParaRPr>
+          </a:p>
+          <a:p>
+            <a:pPr algn="l"/>
+            <a:r>
+              <a:rPr sz="1100" b="0">
+                <a:solidFill>
+                  <a:srgbClr val="6B6E6A"/>
+                </a:solidFill>
+                <a:latin typeface="Calibri"/>
+              </a:rPr>
+              <a:t>Reference data is bundled. Storage is local.</a:t>
+            </a:r>
+            <a:endParaRPr sz="1100" b="0">
+              <a:solidFill>
+                <a:srgbClr val="6B6E6A"/>
+              </a:solidFill>
+              <a:latin typeface="Calibri"/>
+            </a:endParaRPr>
+          </a:p>
+          <a:p>
+            <a:pPr algn="l"/>
+            <a:r>
+              <a:rPr sz="1100" b="0">
+                <a:solidFill>
+                  <a:srgbClr val="6B6E6A"/>
+                </a:solidFill>
+                <a:latin typeface="Calibri"/>
+              </a:rPr>
+              <a:t>Cloud-first competitors fail in rural Cambodia.</a:t>
+            </a:r>
+            <a:endParaRPr sz="1100" b="0">
+              <a:solidFill>
+                <a:srgbClr val="6B6E6A"/>
+              </a:solidFill>
+              <a:latin typeface="Calibri"/>
+            </a:endParaRPr>
+          </a:p>
+        </p:txBody>
+      </p:sp>
+      <p:sp>
+        <p:nvSpPr>
+          <p:cNvPr id="11" name="Rounded Rectangle 10"/>
           <p:cNvSpPr/>
           <p:nvPr/>
         </p:nvSpPr>
         <p:spPr>
           <a:xfrm>
-            <a:off x="713232" y="6138418"/>
-            <a:ext cx="2414016" cy="6350"/>
-          </a:xfrm>
-          <a:prstGeom prst="rect">
+            <a:off x="6263640" y="1554480"/>
+            <a:ext cx="5440680" cy="2286000"/>
+          </a:xfrm>
+          <a:prstGeom prst="roundRect">
             <a:avLst/>
           </a:prstGeom>
           <a:solidFill>
-            <a:srgbClr val="D8DBD9"/>
+            <a:srgbClr val="FFFFFF"/>
+          </a:solidFill>
+          <a:ln w="9525">
+            <a:solidFill>
+              <a:srgbClr val="D8DBD9"/>
+            </a:solidFill>
+          </a:ln>
+          <a:effectLst/>
+        </p:spPr>
+        <p:style>
+          <a:lnRef idx="1">
+            <a:schemeClr val="accent1"/>
+          </a:lnRef>
+          <a:fillRef idx="3">
+            <a:schemeClr val="accent1"/>
+          </a:fillRef>
+          <a:effectRef idx="2">
+            <a:schemeClr val="accent1"/>
+          </a:effectRef>
+          <a:fontRef idx="minor">
+            <a:schemeClr val="lt1"/>
+          </a:fontRef>
+        </p:style>
+        <p:txBody>
+          <a:bodyPr rtlCol="0" anchor="ctr"/>
+          <a:lstStyle/>
+          <a:p>
+            <a:pPr algn="ctr"/>
+          </a:p>
+        </p:txBody>
+      </p:sp>
+      <p:sp>
+        <p:nvSpPr>
+          <p:cNvPr id="12" name="Rectangle 11"/>
+          <p:cNvSpPr/>
+          <p:nvPr/>
+        </p:nvSpPr>
+        <p:spPr>
+          <a:xfrm>
+            <a:off x="6263640" y="1554480"/>
+            <a:ext cx="164592" cy="2286000"/>
+          </a:xfrm>
+          <a:prstGeom prst="rect">
+            <a:avLst/>
+          </a:prstGeom>
+          <a:solidFill>
+            <a:srgbClr val="2E6E43"/>
           </a:solidFill>
           <a:ln>
             <a:noFill/>
@@ -14720,20 +13811,207 @@
       </p:sp>
       <p:sp>
         <p:nvSpPr>
-          <p:cNvPr id="31" name="Rounded Rectangle 30"/>
+          <p:cNvPr id="13" name="TextBox 12"/>
+          <p:cNvSpPr txBox="1"/>
+          <p:nvPr/>
+        </p:nvSpPr>
+        <p:spPr>
+          <a:xfrm>
+            <a:off x="6629400" y="1737360"/>
+            <a:ext cx="1463040" cy="457200"/>
+          </a:xfrm>
+          <a:prstGeom prst="rect">
+            <a:avLst/>
+          </a:prstGeom>
+          <a:noFill/>
+        </p:spPr>
+        <p:txBody>
+          <a:bodyPr wrap="square" lIns="0" tIns="0" rIns="0" bIns="0" anchor="t">
+            <a:spAutoFit/>
+          </a:bodyPr>
+          <a:lstStyle/>
+          <a:p>
+            <a:pPr algn="l"/>
+            <a:r>
+              <a:rPr sz="1800" b="1">
+                <a:solidFill>
+                  <a:srgbClr val="2E6E43"/>
+                </a:solidFill>
+                <a:latin typeface="Calibri"/>
+              </a:rPr>
+              <a:t>[KH]</a:t>
+            </a:r>
+            <a:endParaRPr sz="1800" b="1">
+              <a:solidFill>
+                <a:srgbClr val="2E6E43"/>
+              </a:solidFill>
+              <a:latin typeface="Calibri"/>
+            </a:endParaRPr>
+          </a:p>
+        </p:txBody>
+      </p:sp>
+      <p:sp>
+        <p:nvSpPr>
+          <p:cNvPr id="14" name="TextBox 13"/>
+          <p:cNvSpPr txBox="1"/>
+          <p:nvPr/>
+        </p:nvSpPr>
+        <p:spPr>
+          <a:xfrm>
+            <a:off x="8092440" y="1783080"/>
+            <a:ext cx="3429000" cy="457200"/>
+          </a:xfrm>
+          <a:prstGeom prst="rect">
+            <a:avLst/>
+          </a:prstGeom>
+          <a:noFill/>
+        </p:spPr>
+        <p:txBody>
+          <a:bodyPr wrap="square" lIns="0" tIns="0" rIns="0" bIns="0" anchor="t">
+            <a:spAutoFit/>
+          </a:bodyPr>
+          <a:lstStyle/>
+          <a:p>
+            <a:pPr algn="l"/>
+            <a:r>
+              <a:rPr sz="1600" b="1">
+                <a:solidFill>
+                  <a:srgbClr val="1A1F1C"/>
+                </a:solidFill>
+                <a:latin typeface="Calibri"/>
+              </a:rPr>
+              <a:t>Khmer-first by design</a:t>
+            </a:r>
+            <a:endParaRPr sz="1600" b="1">
+              <a:solidFill>
+                <a:srgbClr val="1A1F1C"/>
+              </a:solidFill>
+              <a:latin typeface="Calibri"/>
+            </a:endParaRPr>
+          </a:p>
+        </p:txBody>
+      </p:sp>
+      <p:sp>
+        <p:nvSpPr>
+          <p:cNvPr id="15" name="TextBox 14"/>
+          <p:cNvSpPr txBox="1"/>
+          <p:nvPr/>
+        </p:nvSpPr>
+        <p:spPr>
+          <a:xfrm>
+            <a:off x="8092440" y="2331720"/>
+            <a:ext cx="3337560" cy="1371600"/>
+          </a:xfrm>
+          <a:prstGeom prst="rect">
+            <a:avLst/>
+          </a:prstGeom>
+          <a:noFill/>
+        </p:spPr>
+        <p:txBody>
+          <a:bodyPr wrap="square" lIns="0" tIns="0" rIns="0" bIns="0" anchor="t">
+            <a:spAutoFit/>
+          </a:bodyPr>
+          <a:lstStyle/>
+          <a:p>
+            <a:pPr algn="l"/>
+            <a:r>
+              <a:rPr sz="1100" b="0">
+                <a:solidFill>
+                  <a:srgbClr val="6B6E6A"/>
+                </a:solidFill>
+                <a:latin typeface="Calibri"/>
+              </a:rPr>
+              <a:t>Every label, every category —</a:t>
+            </a:r>
+            <a:endParaRPr sz="1100" b="0">
+              <a:solidFill>
+                <a:srgbClr val="6B6E6A"/>
+              </a:solidFill>
+              <a:latin typeface="Calibri"/>
+            </a:endParaRPr>
+          </a:p>
+          <a:p>
+            <a:pPr algn="l"/>
+            <a:r>
+              <a:rPr sz="1100" b="0">
+                <a:solidFill>
+                  <a:srgbClr val="6B6E6A"/>
+                </a:solidFill>
+                <a:latin typeface="Calibri"/>
+              </a:rPr>
+              <a:t>in Khmer. Not a translation layer.</a:t>
+            </a:r>
+            <a:endParaRPr sz="1100" b="0">
+              <a:solidFill>
+                <a:srgbClr val="6B6E6A"/>
+              </a:solidFill>
+              <a:latin typeface="Calibri"/>
+            </a:endParaRPr>
+          </a:p>
+        </p:txBody>
+      </p:sp>
+      <p:sp>
+        <p:nvSpPr>
+          <p:cNvPr id="16" name="Rounded Rectangle 15"/>
           <p:cNvSpPr/>
           <p:nvPr/>
         </p:nvSpPr>
         <p:spPr>
           <a:xfrm>
-            <a:off x="914400" y="3246120"/>
-            <a:ext cx="960120" cy="365760"/>
+            <a:off x="640080" y="3977640"/>
+            <a:ext cx="5440680" cy="2286000"/>
           </a:xfrm>
           <a:prstGeom prst="roundRect">
             <a:avLst/>
           </a:prstGeom>
           <a:solidFill>
-            <a:srgbClr val="F5F6F5"/>
+            <a:srgbClr val="FFFFFF"/>
+          </a:solidFill>
+          <a:ln w="9525">
+            <a:solidFill>
+              <a:srgbClr val="D8DBD9"/>
+            </a:solidFill>
+          </a:ln>
+          <a:effectLst/>
+        </p:spPr>
+        <p:style>
+          <a:lnRef idx="1">
+            <a:schemeClr val="accent1"/>
+          </a:lnRef>
+          <a:fillRef idx="3">
+            <a:schemeClr val="accent1"/>
+          </a:fillRef>
+          <a:effectRef idx="2">
+            <a:schemeClr val="accent1"/>
+          </a:effectRef>
+          <a:fontRef idx="minor">
+            <a:schemeClr val="lt1"/>
+          </a:fontRef>
+        </p:style>
+        <p:txBody>
+          <a:bodyPr rtlCol="0" anchor="ctr"/>
+          <a:lstStyle/>
+          <a:p>
+            <a:pPr algn="ctr"/>
+          </a:p>
+        </p:txBody>
+      </p:sp>
+      <p:sp>
+        <p:nvSpPr>
+          <p:cNvPr id="17" name="Rectangle 16"/>
+          <p:cNvSpPr/>
+          <p:nvPr/>
+        </p:nvSpPr>
+        <p:spPr>
+          <a:xfrm>
+            <a:off x="640080" y="3977640"/>
+            <a:ext cx="164592" cy="2286000"/>
+          </a:xfrm>
+          <a:prstGeom prst="rect">
+            <a:avLst/>
+          </a:prstGeom>
+          <a:solidFill>
+            <a:srgbClr val="2E6E43"/>
           </a:solidFill>
           <a:ln>
             <a:noFill/>
@@ -14764,20 +14042,207 @@
       </p:sp>
       <p:sp>
         <p:nvSpPr>
-          <p:cNvPr id="34" name="Rounded Rectangle 33"/>
+          <p:cNvPr id="18" name="TextBox 17"/>
+          <p:cNvSpPr txBox="1"/>
+          <p:nvPr/>
+        </p:nvSpPr>
+        <p:spPr>
+          <a:xfrm>
+            <a:off x="1005840" y="4160520"/>
+            <a:ext cx="1463040" cy="457200"/>
+          </a:xfrm>
+          <a:prstGeom prst="rect">
+            <a:avLst/>
+          </a:prstGeom>
+          <a:noFill/>
+        </p:spPr>
+        <p:txBody>
+          <a:bodyPr wrap="square" lIns="0" tIns="0" rIns="0" bIns="0" anchor="t">
+            <a:spAutoFit/>
+          </a:bodyPr>
+          <a:lstStyle/>
+          <a:p>
+            <a:pPr algn="l"/>
+            <a:r>
+              <a:rPr sz="1800" b="1">
+                <a:solidFill>
+                  <a:srgbClr val="2E6E43"/>
+                </a:solidFill>
+                <a:latin typeface="Calibri"/>
+              </a:rPr>
+              <a:t>[$$]</a:t>
+            </a:r>
+            <a:endParaRPr sz="1800" b="1">
+              <a:solidFill>
+                <a:srgbClr val="2E6E43"/>
+              </a:solidFill>
+              <a:latin typeface="Calibri"/>
+            </a:endParaRPr>
+          </a:p>
+        </p:txBody>
+      </p:sp>
+      <p:sp>
+        <p:nvSpPr>
+          <p:cNvPr id="19" name="TextBox 18"/>
+          <p:cNvSpPr txBox="1"/>
+          <p:nvPr/>
+        </p:nvSpPr>
+        <p:spPr>
+          <a:xfrm>
+            <a:off x="2468880" y="4206240"/>
+            <a:ext cx="3429000" cy="457200"/>
+          </a:xfrm>
+          <a:prstGeom prst="rect">
+            <a:avLst/>
+          </a:prstGeom>
+          <a:noFill/>
+        </p:spPr>
+        <p:txBody>
+          <a:bodyPr wrap="square" lIns="0" tIns="0" rIns="0" bIns="0" anchor="t">
+            <a:spAutoFit/>
+          </a:bodyPr>
+          <a:lstStyle/>
+          <a:p>
+            <a:pPr algn="l"/>
+            <a:r>
+              <a:rPr sz="1600" b="1">
+                <a:solidFill>
+                  <a:srgbClr val="1A1F1C"/>
+                </a:solidFill>
+                <a:latin typeface="Calibri"/>
+              </a:rPr>
+              <a:t>Dual currency native</a:t>
+            </a:r>
+            <a:endParaRPr sz="1600" b="1">
+              <a:solidFill>
+                <a:srgbClr val="1A1F1C"/>
+              </a:solidFill>
+              <a:latin typeface="Calibri"/>
+            </a:endParaRPr>
+          </a:p>
+        </p:txBody>
+      </p:sp>
+      <p:sp>
+        <p:nvSpPr>
+          <p:cNvPr id="20" name="TextBox 19"/>
+          <p:cNvSpPr txBox="1"/>
+          <p:nvPr/>
+        </p:nvSpPr>
+        <p:spPr>
+          <a:xfrm>
+            <a:off x="2468880" y="4754880"/>
+            <a:ext cx="3337560" cy="1371600"/>
+          </a:xfrm>
+          <a:prstGeom prst="rect">
+            <a:avLst/>
+          </a:prstGeom>
+          <a:noFill/>
+        </p:spPr>
+        <p:txBody>
+          <a:bodyPr wrap="square" lIns="0" tIns="0" rIns="0" bIns="0" anchor="t">
+            <a:spAutoFit/>
+          </a:bodyPr>
+          <a:lstStyle/>
+          <a:p>
+            <a:pPr algn="l"/>
+            <a:r>
+              <a:rPr sz="1100" b="0">
+                <a:solidFill>
+                  <a:srgbClr val="6B6E6A"/>
+                </a:solidFill>
+                <a:latin typeface="Calibri"/>
+              </a:rPr>
+              <a:t>KHR and USD both first-class.</a:t>
+            </a:r>
+            <a:endParaRPr sz="1100" b="0">
+              <a:solidFill>
+                <a:srgbClr val="6B6E6A"/>
+              </a:solidFill>
+              <a:latin typeface="Calibri"/>
+            </a:endParaRPr>
+          </a:p>
+          <a:p>
+            <a:pPr algn="l"/>
+            <a:r>
+              <a:rPr sz="1100" b="0">
+                <a:solidFill>
+                  <a:srgbClr val="6B6E6A"/>
+                </a:solidFill>
+                <a:latin typeface="Calibri"/>
+              </a:rPr>
+              <a:t>Reflects how Cambodian commerce actually works.</a:t>
+            </a:r>
+            <a:endParaRPr sz="1100" b="0">
+              <a:solidFill>
+                <a:srgbClr val="6B6E6A"/>
+              </a:solidFill>
+              <a:latin typeface="Calibri"/>
+            </a:endParaRPr>
+          </a:p>
+        </p:txBody>
+      </p:sp>
+      <p:sp>
+        <p:nvSpPr>
+          <p:cNvPr id="21" name="Rounded Rectangle 20"/>
           <p:cNvSpPr/>
           <p:nvPr/>
         </p:nvSpPr>
         <p:spPr>
           <a:xfrm>
-            <a:off x="1965960" y="3246120"/>
-            <a:ext cx="960120" cy="365760"/>
+            <a:off x="6263640" y="3977640"/>
+            <a:ext cx="5440680" cy="2286000"/>
           </a:xfrm>
           <a:prstGeom prst="roundRect">
             <a:avLst/>
           </a:prstGeom>
           <a:solidFill>
-            <a:srgbClr val="F5F6F5"/>
+            <a:srgbClr val="FFFFFF"/>
+          </a:solidFill>
+          <a:ln w="9525">
+            <a:solidFill>
+              <a:srgbClr val="D8DBD9"/>
+            </a:solidFill>
+          </a:ln>
+          <a:effectLst/>
+        </p:spPr>
+        <p:style>
+          <a:lnRef idx="1">
+            <a:schemeClr val="accent1"/>
+          </a:lnRef>
+          <a:fillRef idx="3">
+            <a:schemeClr val="accent1"/>
+          </a:fillRef>
+          <a:effectRef idx="2">
+            <a:schemeClr val="accent1"/>
+          </a:effectRef>
+          <a:fontRef idx="minor">
+            <a:schemeClr val="lt1"/>
+          </a:fontRef>
+        </p:style>
+        <p:txBody>
+          <a:bodyPr rtlCol="0" anchor="ctr"/>
+          <a:lstStyle/>
+          <a:p>
+            <a:pPr algn="ctr"/>
+          </a:p>
+        </p:txBody>
+      </p:sp>
+      <p:sp>
+        <p:nvSpPr>
+          <p:cNvPr id="22" name="Rectangle 21"/>
+          <p:cNvSpPr/>
+          <p:nvPr/>
+        </p:nvSpPr>
+        <p:spPr>
+          <a:xfrm>
+            <a:off x="6263640" y="3977640"/>
+            <a:ext cx="164592" cy="2286000"/>
+          </a:xfrm>
+          <a:prstGeom prst="rect">
+            <a:avLst/>
+          </a:prstGeom>
+          <a:solidFill>
+            <a:srgbClr val="2E6E43"/>
           </a:solidFill>
           <a:ln>
             <a:noFill/>
@@ -14808,14 +14273,14 @@
       </p:sp>
       <p:sp>
         <p:nvSpPr>
-          <p:cNvPr id="47" name="TextBox 46"/>
+          <p:cNvPr id="23" name="TextBox 22"/>
           <p:cNvSpPr txBox="1"/>
           <p:nvPr/>
         </p:nvSpPr>
         <p:spPr>
           <a:xfrm>
-            <a:off x="3840480" y="1554480"/>
-            <a:ext cx="7315200" cy="365760"/>
+            <a:off x="6629400" y="4160520"/>
+            <a:ext cx="1463040" cy="457200"/>
           </a:xfrm>
           <a:prstGeom prst="rect">
             <a:avLst/>
@@ -14830,15 +14295,15 @@
           <a:p>
             <a:pPr algn="l"/>
             <a:r>
-              <a:rPr sz="1300" b="1">
+              <a:rPr sz="1800" b="1">
                 <a:solidFill>
                   <a:srgbClr val="2E6E43"/>
                 </a:solidFill>
                 <a:latin typeface="Calibri"/>
               </a:rPr>
-              <a:t>Why farmers care</a:t>
-            </a:r>
-            <a:endParaRPr sz="1300" b="1">
+              <a:t>[--]</a:t>
+            </a:r>
+            <a:endParaRPr sz="1800" b="1">
               <a:solidFill>
                 <a:srgbClr val="2E6E43"/>
               </a:solidFill>
@@ -14849,14 +14314,14 @@
       </p:sp>
       <p:sp>
         <p:nvSpPr>
-          <p:cNvPr id="48" name="TextBox 47"/>
+          <p:cNvPr id="24" name="TextBox 23"/>
           <p:cNvSpPr txBox="1"/>
           <p:nvPr/>
         </p:nvSpPr>
         <p:spPr>
           <a:xfrm>
-            <a:off x="3840480" y="1965960"/>
-            <a:ext cx="7772400" cy="1097280"/>
+            <a:off x="8092440" y="4206240"/>
+            <a:ext cx="3429000" cy="457200"/>
           </a:xfrm>
           <a:prstGeom prst="rect">
             <a:avLst/>
@@ -14871,51 +14336,33 @@
           <a:p>
             <a:pPr algn="l"/>
             <a:r>
-              <a:rPr sz="1400" b="0">
-                <a:solidFill>
-                  <a:srgbClr val="3A423D"/>
-                </a:solidFill>
-                <a:latin typeface="Calibri"/>
-              </a:rPr>
-              <a:t>Phones break. Phones get sold. Phones get reset.</a:t>
-            </a:r>
-            <a:endParaRPr sz="1400" b="0">
-              <a:solidFill>
-                <a:srgbClr val="3A423D"/>
-              </a:solidFill>
-              <a:latin typeface="Calibri"/>
-            </a:endParaRPr>
-          </a:p>
-          <a:p>
-            <a:pPr algn="l"/>
-            <a:r>
-              <a:rPr sz="1400" b="0">
-                <a:solidFill>
-                  <a:srgbClr val="3A423D"/>
-                </a:solidFill>
-                <a:latin typeface="Calibri"/>
-              </a:rPr>
-              <a:t>Two seasons of records vanish in one moment without backup.</a:t>
-            </a:r>
-            <a:endParaRPr sz="1400" b="0">
-              <a:solidFill>
-                <a:srgbClr val="3A423D"/>
-              </a:solidFill>
-              <a:latin typeface="Calibri"/>
-            </a:endParaRPr>
-          </a:p>
-        </p:txBody>
-      </p:sp>
-      <p:sp>
-        <p:nvSpPr>
-          <p:cNvPr id="49" name="TextBox 48"/>
+              <a:rPr sz="1600" b="1">
+                <a:solidFill>
+                  <a:srgbClr val="1A1F1C"/>
+                </a:solidFill>
+                <a:latin typeface="Calibri"/>
+              </a:rPr>
+              <a:t>No account, no friction</a:t>
+            </a:r>
+            <a:endParaRPr sz="1600" b="1">
+              <a:solidFill>
+                <a:srgbClr val="1A1F1C"/>
+              </a:solidFill>
+              <a:latin typeface="Calibri"/>
+            </a:endParaRPr>
+          </a:p>
+        </p:txBody>
+      </p:sp>
+      <p:sp>
+        <p:nvSpPr>
+          <p:cNvPr id="25" name="TextBox 24"/>
           <p:cNvSpPr txBox="1"/>
           <p:nvPr/>
         </p:nvSpPr>
         <p:spPr>
           <a:xfrm>
-            <a:off x="3840480" y="3246120"/>
-            <a:ext cx="7315200" cy="365760"/>
+            <a:off x="8092440" y="4754880"/>
+            <a:ext cx="3337560" cy="1371600"/>
           </a:xfrm>
           <a:prstGeom prst="rect">
             <a:avLst/>
@@ -14930,232 +14377,51 @@
           <a:p>
             <a:pPr algn="l"/>
             <a:r>
-              <a:rPr sz="1300" b="1">
-                <a:solidFill>
-                  <a:srgbClr val="2E6E43"/>
-                </a:solidFill>
-                <a:latin typeface="Calibri"/>
-              </a:rPr>
-              <a:t>What it does</a:t>
-            </a:r>
-            <a:endParaRPr sz="1300" b="1">
-              <a:solidFill>
-                <a:srgbClr val="2E6E43"/>
-              </a:solidFill>
-              <a:latin typeface="Calibri"/>
-            </a:endParaRPr>
-          </a:p>
-        </p:txBody>
-      </p:sp>
-      <p:sp>
-        <p:nvSpPr>
-          <p:cNvPr id="50" name="TextBox 49"/>
+              <a:rPr sz="1100" b="0">
+                <a:solidFill>
+                  <a:srgbClr val="6B6E6A"/>
+                </a:solidFill>
+                <a:latin typeface="Calibri"/>
+              </a:rPr>
+              <a:t>Open the app. Use it.</a:t>
+            </a:r>
+            <a:endParaRPr sz="1100" b="0">
+              <a:solidFill>
+                <a:srgbClr val="6B6E6A"/>
+              </a:solidFill>
+              <a:latin typeface="Calibri"/>
+            </a:endParaRPr>
+          </a:p>
+          <a:p>
+            <a:pPr algn="l"/>
+            <a:r>
+              <a:rPr sz="1100" b="0">
+                <a:solidFill>
+                  <a:srgbClr val="6B6E6A"/>
+                </a:solidFill>
+                <a:latin typeface="Calibri"/>
+              </a:rPr>
+              <a:t>No login, no email, no data leaves the phone.</a:t>
+            </a:r>
+            <a:endParaRPr sz="1100" b="0">
+              <a:solidFill>
+                <a:srgbClr val="6B6E6A"/>
+              </a:solidFill>
+              <a:latin typeface="Calibri"/>
+            </a:endParaRPr>
+          </a:p>
+        </p:txBody>
+      </p:sp>
+      <p:sp>
+        <p:nvSpPr>
+          <p:cNvPr id="27" name="TextBox 26"/>
           <p:cNvSpPr txBox="1"/>
           <p:nvPr/>
         </p:nvSpPr>
         <p:spPr>
           <a:xfrm>
-            <a:off x="3840480" y="3657600"/>
-            <a:ext cx="7772400" cy="1792605"/>
-          </a:xfrm>
-          <a:prstGeom prst="rect">
-            <a:avLst/>
-          </a:prstGeom>
-          <a:noFill/>
-        </p:spPr>
-        <p:txBody>
-          <a:bodyPr wrap="square" lIns="0" tIns="0" rIns="0" bIns="0" anchor="t">
-            <a:noAutofit/>
-          </a:bodyPr>
-          <a:lstStyle/>
-          <a:p>
-            <a:pPr indent="0" algn="l" fontAlgn="auto">
-              <a:lnSpc>
-                <a:spcPct val="150000"/>
-              </a:lnSpc>
-            </a:pPr>
-            <a:r>
-              <a:rPr sz="1200" b="0">
-                <a:solidFill>
-                  <a:srgbClr val="3A423D"/>
-                </a:solidFill>
-                <a:latin typeface="Calibri"/>
-              </a:rPr>
-              <a:t>•  Light / dark theme — usable in bright sun and at night</a:t>
-            </a:r>
-            <a:endParaRPr sz="1200" b="0">
-              <a:solidFill>
-                <a:srgbClr val="3A423D"/>
-              </a:solidFill>
-              <a:latin typeface="Calibri"/>
-            </a:endParaRPr>
-          </a:p>
-          <a:p>
-            <a:pPr indent="0" algn="l" fontAlgn="auto">
-              <a:lnSpc>
-                <a:spcPct val="150000"/>
-              </a:lnSpc>
-            </a:pPr>
-            <a:r>
-              <a:rPr sz="1200" b="0">
-                <a:solidFill>
-                  <a:srgbClr val="3A423D"/>
-                </a:solidFill>
-                <a:latin typeface="Calibri"/>
-              </a:rPr>
-              <a:t>•  Data stats — see counts at a glance</a:t>
-            </a:r>
-            <a:endParaRPr sz="1200" b="0">
-              <a:solidFill>
-                <a:srgbClr val="3A423D"/>
-              </a:solidFill>
-              <a:latin typeface="Calibri"/>
-            </a:endParaRPr>
-          </a:p>
-          <a:p>
-            <a:pPr indent="0" algn="l" fontAlgn="auto">
-              <a:lnSpc>
-                <a:spcPct val="150000"/>
-              </a:lnSpc>
-            </a:pPr>
-            <a:r>
-              <a:rPr sz="1200" b="0">
-                <a:solidFill>
-                  <a:srgbClr val="3A423D"/>
-                </a:solidFill>
-                <a:latin typeface="Calibri"/>
-              </a:rPr>
-              <a:t>•  CSV export — share with cooperatives, MFIs, tax officers</a:t>
-            </a:r>
-            <a:endParaRPr sz="1200" b="0">
-              <a:solidFill>
-                <a:srgbClr val="3A423D"/>
-              </a:solidFill>
-              <a:latin typeface="Calibri"/>
-            </a:endParaRPr>
-          </a:p>
-          <a:p>
-            <a:pPr indent="0" algn="l" fontAlgn="auto">
-              <a:lnSpc>
-                <a:spcPct val="150000"/>
-              </a:lnSpc>
-            </a:pPr>
-            <a:r>
-              <a:rPr sz="1200" b="0">
-                <a:solidFill>
-                  <a:srgbClr val="3A423D"/>
-                </a:solidFill>
-                <a:latin typeface="Calibri"/>
-              </a:rPr>
-              <a:t>•  Full JSON backup — one tap, save to Files / share / cloud</a:t>
-            </a:r>
-            <a:endParaRPr sz="1200" b="0">
-              <a:solidFill>
-                <a:srgbClr val="3A423D"/>
-              </a:solidFill>
-              <a:latin typeface="Calibri"/>
-            </a:endParaRPr>
-          </a:p>
-          <a:p>
-            <a:pPr indent="0" algn="l" fontAlgn="auto">
-              <a:lnSpc>
-                <a:spcPct val="150000"/>
-              </a:lnSpc>
-            </a:pPr>
-            <a:r>
-              <a:rPr sz="1200" b="0">
-                <a:solidFill>
-                  <a:srgbClr val="3A423D"/>
-                </a:solidFill>
-                <a:latin typeface="Calibri"/>
-              </a:rPr>
-              <a:t>•  Restore — load a backup file, replace current data</a:t>
-            </a:r>
-            <a:endParaRPr sz="1200" b="0">
-              <a:solidFill>
-                <a:srgbClr val="3A423D"/>
-              </a:solidFill>
-              <a:latin typeface="Calibri"/>
-            </a:endParaRPr>
-          </a:p>
-          <a:p>
-            <a:pPr indent="0" algn="l" fontAlgn="auto">
-              <a:lnSpc>
-                <a:spcPct val="150000"/>
-              </a:lnSpc>
-            </a:pPr>
-            <a:r>
-              <a:rPr sz="1200" b="0">
-                <a:solidFill>
-                  <a:srgbClr val="3A423D"/>
-                </a:solidFill>
-                <a:latin typeface="Calibri"/>
-              </a:rPr>
-              <a:t>•  Clear all — fresh start, with a confirmation guard</a:t>
-            </a:r>
-            <a:endParaRPr sz="1200" b="0">
-              <a:solidFill>
-                <a:srgbClr val="3A423D"/>
-              </a:solidFill>
-              <a:latin typeface="Calibri"/>
-            </a:endParaRPr>
-          </a:p>
-        </p:txBody>
-      </p:sp>
-      <p:sp>
-        <p:nvSpPr>
-          <p:cNvPr id="51" name="Rounded Rectangle 50"/>
-          <p:cNvSpPr/>
-          <p:nvPr/>
-        </p:nvSpPr>
-        <p:spPr>
-          <a:xfrm>
-            <a:off x="3840480" y="5486400"/>
-            <a:ext cx="7772400" cy="731520"/>
-          </a:xfrm>
-          <a:prstGeom prst="roundRect">
-            <a:avLst/>
-          </a:prstGeom>
-          <a:solidFill>
-            <a:srgbClr val="E8F3EB"/>
-          </a:solidFill>
-          <a:ln>
-            <a:noFill/>
-          </a:ln>
-          <a:effectLst/>
-        </p:spPr>
-        <p:style>
-          <a:lnRef idx="1">
-            <a:schemeClr val="accent1"/>
-          </a:lnRef>
-          <a:fillRef idx="3">
-            <a:schemeClr val="accent1"/>
-          </a:fillRef>
-          <a:effectRef idx="2">
-            <a:schemeClr val="accent1"/>
-          </a:effectRef>
-          <a:fontRef idx="minor">
-            <a:schemeClr val="lt1"/>
-          </a:fontRef>
-        </p:style>
-        <p:txBody>
-          <a:bodyPr rtlCol="0" anchor="ctr"/>
-          <a:lstStyle/>
-          <a:p>
-            <a:pPr algn="ctr"/>
-          </a:p>
-        </p:txBody>
-      </p:sp>
-      <p:sp>
-        <p:nvSpPr>
-          <p:cNvPr id="52" name="TextBox 51"/>
-          <p:cNvSpPr txBox="1"/>
-          <p:nvPr/>
-        </p:nvSpPr>
-        <p:spPr>
-          <a:xfrm>
-            <a:off x="4023360" y="5532120"/>
-            <a:ext cx="7315200" cy="274320"/>
+            <a:off x="10698480" y="6446520"/>
+            <a:ext cx="1005840" cy="274320"/>
           </a:xfrm>
           <a:prstGeom prst="rect">
             <a:avLst/>
@@ -15168,88 +14434,6 @@
           </a:bodyPr>
           <a:lstStyle/>
           <a:p>
-            <a:pPr algn="l"/>
-            <a:r>
-              <a:rPr sz="1000" b="1">
-                <a:solidFill>
-                  <a:srgbClr val="1F4D2E"/>
-                </a:solidFill>
-                <a:latin typeface="Calibri"/>
-              </a:rPr>
-              <a:t>Backup &amp; Restore Flow</a:t>
-            </a:r>
-            <a:endParaRPr sz="1000" b="1">
-              <a:solidFill>
-                <a:srgbClr val="1F4D2E"/>
-              </a:solidFill>
-              <a:latin typeface="Calibri"/>
-            </a:endParaRPr>
-          </a:p>
-        </p:txBody>
-      </p:sp>
-      <p:sp>
-        <p:nvSpPr>
-          <p:cNvPr id="53" name="TextBox 52"/>
-          <p:cNvSpPr txBox="1"/>
-          <p:nvPr/>
-        </p:nvSpPr>
-        <p:spPr>
-          <a:xfrm>
-            <a:off x="4023360" y="5779008"/>
-            <a:ext cx="7315200" cy="411480"/>
-          </a:xfrm>
-          <a:prstGeom prst="rect">
-            <a:avLst/>
-          </a:prstGeom>
-          <a:noFill/>
-        </p:spPr>
-        <p:txBody>
-          <a:bodyPr wrap="square" lIns="0" tIns="0" rIns="0" bIns="0" anchor="t">
-            <a:spAutoFit/>
-          </a:bodyPr>
-          <a:lstStyle/>
-          <a:p>
-            <a:pPr algn="l"/>
-            <a:r>
-              <a:rPr sz="1100" b="0">
-                <a:solidFill>
-                  <a:srgbClr val="3A423D"/>
-                </a:solidFill>
-                <a:latin typeface="Calibri"/>
-              </a:rPr>
-              <a:t>Settings  →  Backup all (JSON)  →  Save file  →  (later) Restore from file  →  Confirm</a:t>
-            </a:r>
-            <a:endParaRPr sz="1100" b="0">
-              <a:solidFill>
-                <a:srgbClr val="3A423D"/>
-              </a:solidFill>
-              <a:latin typeface="Calibri"/>
-            </a:endParaRPr>
-          </a:p>
-        </p:txBody>
-      </p:sp>
-      <p:sp>
-        <p:nvSpPr>
-          <p:cNvPr id="55" name="TextBox 54"/>
-          <p:cNvSpPr txBox="1"/>
-          <p:nvPr/>
-        </p:nvSpPr>
-        <p:spPr>
-          <a:xfrm>
-            <a:off x="10698480" y="6446520"/>
-            <a:ext cx="1005840" cy="274320"/>
-          </a:xfrm>
-          <a:prstGeom prst="rect">
-            <a:avLst/>
-          </a:prstGeom>
-          <a:noFill/>
-        </p:spPr>
-        <p:txBody>
-          <a:bodyPr wrap="square" lIns="0" tIns="0" rIns="0" bIns="0" anchor="t">
-            <a:spAutoFit/>
-          </a:bodyPr>
-          <a:lstStyle/>
-          <a:p>
             <a:pPr algn="r"/>
             <a:r>
               <a:rPr sz="900" b="0">
@@ -15258,7 +14442,7 @@
                 </a:solidFill>
                 <a:latin typeface="Calibri"/>
               </a:rPr>
-              <a:t>8 / 16</a:t>
+              <a:t>8 / 15</a:t>
             </a:r>
             <a:endParaRPr sz="900" b="0">
               <a:solidFill>
@@ -15269,33 +14453,9 @@
           </a:p>
         </p:txBody>
       </p:sp>
-      <p:pic>
-        <p:nvPicPr>
-          <p:cNvPr id="56" name="Picture 55"/>
-          <p:cNvPicPr>
-            <a:picLocks noChangeAspect="1"/>
-          </p:cNvPicPr>
-          <p:nvPr/>
-        </p:nvPicPr>
-        <p:blipFill>
-          <a:blip r:embed="rId1"/>
-          <a:stretch>
-            <a:fillRect/>
-          </a:stretch>
-        </p:blipFill>
-        <p:spPr>
-          <a:xfrm>
-            <a:off x="629920" y="1363980"/>
-            <a:ext cx="2308860" cy="4895215"/>
-          </a:xfrm>
-          <a:prstGeom prst="roundRect">
-            <a:avLst/>
-          </a:prstGeom>
-        </p:spPr>
-      </p:pic>
-      <p:sp>
-        <p:nvSpPr>
-          <p:cNvPr id="6" name="TextBox 19"/>
+      <p:sp>
+        <p:nvSpPr>
+          <p:cNvPr id="52" name="TextBox 19"/>
           <p:cNvSpPr txBox="1"/>
           <p:nvPr/>
         </p:nvSpPr>
@@ -15362,7 +14522,7 @@
         </p:nvSpPr>
         <p:spPr>
           <a:xfrm>
-            <a:off x="0" y="0"/>
+            <a:off x="-670560" y="0"/>
             <a:ext cx="12191695" cy="6858000"/>
           </a:xfrm>
           <a:prstGeom prst="rect">
@@ -15472,7 +14632,7 @@
                 </a:solidFill>
                 <a:latin typeface="Calibri"/>
               </a:rPr>
-              <a:t>WHY NOW &amp; WHY US</a:t>
+              <a:t>STATUS &amp; TECH STACK</a:t>
             </a:r>
             <a:endParaRPr sz="1100" b="1">
               <a:solidFill>
@@ -15513,7 +14673,7 @@
                 </a:solidFill>
                 <a:latin typeface="Calibri"/>
               </a:rPr>
-              <a:t>Four reasons SmartFarm is different</a:t>
+              <a:t>Working demo today, native iOS tomorrow</a:t>
             </a:r>
             <a:endParaRPr sz="2800" b="1">
               <a:solidFill>
@@ -15532,8 +14692,8 @@
         </p:nvSpPr>
         <p:spPr>
           <a:xfrm>
-            <a:off x="640080" y="1554480"/>
-            <a:ext cx="5440680" cy="2286000"/>
+            <a:off x="1907540" y="1390015"/>
+            <a:ext cx="3611880" cy="4206240"/>
           </a:xfrm>
           <a:prstGeom prst="roundRect">
             <a:avLst/>
@@ -15578,8 +14738,8 @@
         </p:nvSpPr>
         <p:spPr>
           <a:xfrm>
-            <a:off x="640080" y="1554480"/>
-            <a:ext cx="164592" cy="2286000"/>
+            <a:off x="1907540" y="1390015"/>
+            <a:ext cx="3611880" cy="502920"/>
           </a:xfrm>
           <a:prstGeom prst="rect">
             <a:avLst/>
@@ -15622,8 +14782,8 @@
         </p:nvSpPr>
         <p:spPr>
           <a:xfrm>
-            <a:off x="1005840" y="1737360"/>
-            <a:ext cx="1463040" cy="457200"/>
+            <a:off x="1907540" y="1499743"/>
+            <a:ext cx="3611880" cy="365760"/>
           </a:xfrm>
           <a:prstGeom prst="rect">
             <a:avLst/>
@@ -15636,19 +14796,19 @@
           </a:bodyPr>
           <a:lstStyle/>
           <a:p>
-            <a:pPr algn="l"/>
-            <a:r>
-              <a:rPr sz="1800" b="1">
-                <a:solidFill>
-                  <a:srgbClr val="2E6E43"/>
-                </a:solidFill>
-                <a:latin typeface="Calibri"/>
-              </a:rPr>
-              <a:t>[OFF]</a:t>
-            </a:r>
-            <a:endParaRPr sz="1800" b="1">
-              <a:solidFill>
-                <a:srgbClr val="2E6E43"/>
+            <a:pPr algn="ctr"/>
+            <a:r>
+              <a:rPr sz="1400" b="1">
+                <a:solidFill>
+                  <a:srgbClr val="FFFFFF"/>
+                </a:solidFill>
+                <a:latin typeface="Calibri"/>
+              </a:rPr>
+              <a:t>Today</a:t>
+            </a:r>
+            <a:endParaRPr sz="1400" b="1">
+              <a:solidFill>
+                <a:srgbClr val="FFFFFF"/>
               </a:solidFill>
               <a:latin typeface="Calibri"/>
             </a:endParaRPr>
@@ -15663,8 +14823,8 @@
         </p:nvSpPr>
         <p:spPr>
           <a:xfrm>
-            <a:off x="2468880" y="1783080"/>
-            <a:ext cx="3429000" cy="457200"/>
+            <a:off x="2181860" y="2167255"/>
+            <a:ext cx="3154680" cy="3291840"/>
           </a:xfrm>
           <a:prstGeom prst="rect">
             <a:avLst/>
@@ -15679,58 +14839,35 @@
           <a:p>
             <a:pPr algn="l"/>
             <a:r>
-              <a:rPr sz="1600" b="1">
-                <a:solidFill>
-                  <a:srgbClr val="1A1F1C"/>
-                </a:solidFill>
-                <a:latin typeface="Calibri"/>
-              </a:rPr>
-              <a:t>Truly offline</a:t>
-            </a:r>
-            <a:endParaRPr sz="1600" b="1">
-              <a:solidFill>
-                <a:srgbClr val="1A1F1C"/>
-              </a:solidFill>
-              <a:latin typeface="Calibri"/>
-            </a:endParaRPr>
-          </a:p>
-        </p:txBody>
-      </p:sp>
-      <p:sp>
-        <p:nvSpPr>
-          <p:cNvPr id="10" name="TextBox 9"/>
-          <p:cNvSpPr txBox="1"/>
-          <p:nvPr/>
-        </p:nvSpPr>
-        <p:spPr>
-          <a:xfrm>
-            <a:off x="2468880" y="2331720"/>
-            <a:ext cx="3337560" cy="1371600"/>
-          </a:xfrm>
-          <a:prstGeom prst="rect">
-            <a:avLst/>
-          </a:prstGeom>
-          <a:noFill/>
-        </p:spPr>
-        <p:txBody>
-          <a:bodyPr wrap="square" lIns="0" tIns="0" rIns="0" bIns="0" anchor="t">
-            <a:spAutoFit/>
-          </a:bodyPr>
-          <a:lstStyle/>
+              <a:rPr sz="1100" b="0">
+                <a:solidFill>
+                  <a:srgbClr val="3A423D"/>
+                </a:solidFill>
+                <a:latin typeface="Calibri"/>
+              </a:rPr>
+              <a:t>•  Working React + Vite demo</a:t>
+            </a:r>
+            <a:endParaRPr sz="1100" b="0">
+              <a:solidFill>
+                <a:srgbClr val="3A423D"/>
+              </a:solidFill>
+              <a:latin typeface="Calibri"/>
+            </a:endParaRPr>
+          </a:p>
           <a:p>
             <a:pPr algn="l"/>
             <a:r>
               <a:rPr sz="1100" b="0">
                 <a:solidFill>
-                  <a:srgbClr val="6B6E6A"/>
-                </a:solidFill>
-                <a:latin typeface="Calibri"/>
-              </a:rPr>
-              <a:t>Every feature works with airplane mode on.</a:t>
+                  <a:srgbClr val="3A423D"/>
+                </a:solidFill>
+                <a:latin typeface="Calibri"/>
+              </a:rPr>
+              <a:t>•  Khmer UI, KHR/USD, theme toggle</a:t>
             </a:r>
             <a:endParaRPr sz="1100" b="0">
               <a:solidFill>
-                <a:srgbClr val="6B6E6A"/>
+                <a:srgbClr val="3A423D"/>
               </a:solidFill>
               <a:latin typeface="Calibri"/>
             </a:endParaRPr>
@@ -15740,15 +14877,15 @@
             <a:r>
               <a:rPr sz="1100" b="0">
                 <a:solidFill>
-                  <a:srgbClr val="6B6E6A"/>
-                </a:solidFill>
-                <a:latin typeface="Calibri"/>
-              </a:rPr>
-              <a:t>Reference data is bundled. Storage is local.</a:t>
+                  <a:srgbClr val="3A423D"/>
+                </a:solidFill>
+                <a:latin typeface="Calibri"/>
+              </a:rPr>
+              <a:t>•  All three modules functional</a:t>
             </a:r>
             <a:endParaRPr sz="1100" b="0">
               <a:solidFill>
-                <a:srgbClr val="6B6E6A"/>
+                <a:srgbClr val="3A423D"/>
               </a:solidFill>
               <a:latin typeface="Calibri"/>
             </a:endParaRPr>
@@ -15758,31 +14895,31 @@
             <a:r>
               <a:rPr sz="1100" b="0">
                 <a:solidFill>
-                  <a:srgbClr val="6B6E6A"/>
-                </a:solidFill>
-                <a:latin typeface="Calibri"/>
-              </a:rPr>
-              <a:t>Cloud-first competitors fail in rural Cambodia.</a:t>
+                  <a:srgbClr val="3A423D"/>
+                </a:solidFill>
+                <a:latin typeface="Calibri"/>
+              </a:rPr>
+              <a:t>•  CSV export + JSON backup live</a:t>
             </a:r>
             <a:endParaRPr sz="1100" b="0">
               <a:solidFill>
-                <a:srgbClr val="6B6E6A"/>
-              </a:solidFill>
-              <a:latin typeface="Calibri"/>
-            </a:endParaRPr>
-          </a:p>
-        </p:txBody>
-      </p:sp>
-      <p:sp>
-        <p:nvSpPr>
-          <p:cNvPr id="11" name="Rounded Rectangle 10"/>
+                <a:srgbClr val="3A423D"/>
+              </a:solidFill>
+              <a:latin typeface="Calibri"/>
+            </a:endParaRPr>
+          </a:p>
+        </p:txBody>
+      </p:sp>
+      <p:sp>
+        <p:nvSpPr>
+          <p:cNvPr id="10" name="Rounded Rectangle 9"/>
           <p:cNvSpPr/>
           <p:nvPr/>
         </p:nvSpPr>
         <p:spPr>
           <a:xfrm>
-            <a:off x="6263640" y="1554480"/>
-            <a:ext cx="5440680" cy="2286000"/>
+            <a:off x="6738620" y="1412875"/>
+            <a:ext cx="3611880" cy="4206240"/>
           </a:xfrm>
           <a:prstGeom prst="roundRect">
             <a:avLst/>
@@ -15821,20 +14958,20 @@
       </p:sp>
       <p:sp>
         <p:nvSpPr>
-          <p:cNvPr id="12" name="Rectangle 11"/>
+          <p:cNvPr id="11" name="Rectangle 10"/>
           <p:cNvSpPr/>
           <p:nvPr/>
         </p:nvSpPr>
         <p:spPr>
           <a:xfrm>
-            <a:off x="6263640" y="1554480"/>
-            <a:ext cx="164592" cy="2286000"/>
+            <a:off x="6738620" y="1390015"/>
+            <a:ext cx="3611880" cy="502920"/>
           </a:xfrm>
           <a:prstGeom prst="rect">
             <a:avLst/>
           </a:prstGeom>
           <a:solidFill>
-            <a:srgbClr val="2E6E43"/>
+            <a:srgbClr val="8B5A2B"/>
           </a:solidFill>
           <a:ln>
             <a:noFill/>
@@ -15865,14 +15002,55 @@
       </p:sp>
       <p:sp>
         <p:nvSpPr>
+          <p:cNvPr id="12" name="TextBox 11"/>
+          <p:cNvSpPr txBox="1"/>
+          <p:nvPr/>
+        </p:nvSpPr>
+        <p:spPr>
+          <a:xfrm>
+            <a:off x="6738620" y="1499743"/>
+            <a:ext cx="3611880" cy="365760"/>
+          </a:xfrm>
+          <a:prstGeom prst="rect">
+            <a:avLst/>
+          </a:prstGeom>
+          <a:noFill/>
+        </p:spPr>
+        <p:txBody>
+          <a:bodyPr wrap="square" lIns="0" tIns="0" rIns="0" bIns="0" anchor="t">
+            <a:spAutoFit/>
+          </a:bodyPr>
+          <a:lstStyle/>
+          <a:p>
+            <a:pPr algn="ctr"/>
+            <a:r>
+              <a:rPr sz="1400" b="1">
+                <a:solidFill>
+                  <a:srgbClr val="FFFFFF"/>
+                </a:solidFill>
+                <a:latin typeface="Calibri"/>
+              </a:rPr>
+              <a:t>Next 3 months</a:t>
+            </a:r>
+            <a:endParaRPr sz="1400" b="1">
+              <a:solidFill>
+                <a:srgbClr val="FFFFFF"/>
+              </a:solidFill>
+              <a:latin typeface="Calibri"/>
+            </a:endParaRPr>
+          </a:p>
+        </p:txBody>
+      </p:sp>
+      <p:sp>
+        <p:nvSpPr>
           <p:cNvPr id="13" name="TextBox 12"/>
           <p:cNvSpPr txBox="1"/>
           <p:nvPr/>
         </p:nvSpPr>
         <p:spPr>
           <a:xfrm>
-            <a:off x="6629400" y="1737360"/>
-            <a:ext cx="1463040" cy="457200"/>
+            <a:off x="7012940" y="2167255"/>
+            <a:ext cx="3154680" cy="845820"/>
           </a:xfrm>
           <a:prstGeom prst="rect">
             <a:avLst/>
@@ -15887,99 +15065,53 @@
           <a:p>
             <a:pPr algn="l"/>
             <a:r>
-              <a:rPr sz="1800" b="1">
-                <a:solidFill>
-                  <a:srgbClr val="2E6E43"/>
-                </a:solidFill>
-                <a:latin typeface="Calibri"/>
-              </a:rPr>
-              <a:t>[KH]</a:t>
-            </a:r>
-            <a:endParaRPr sz="1800" b="1">
-              <a:solidFill>
-                <a:srgbClr val="2E6E43"/>
-              </a:solidFill>
-              <a:latin typeface="Calibri"/>
-            </a:endParaRPr>
-          </a:p>
-        </p:txBody>
-      </p:sp>
-      <p:sp>
-        <p:nvSpPr>
-          <p:cNvPr id="14" name="TextBox 13"/>
-          <p:cNvSpPr txBox="1"/>
-          <p:nvPr/>
-        </p:nvSpPr>
-        <p:spPr>
-          <a:xfrm>
-            <a:off x="8092440" y="1783080"/>
-            <a:ext cx="3429000" cy="457200"/>
-          </a:xfrm>
-          <a:prstGeom prst="rect">
-            <a:avLst/>
-          </a:prstGeom>
-          <a:noFill/>
-        </p:spPr>
-        <p:txBody>
-          <a:bodyPr wrap="square" lIns="0" tIns="0" rIns="0" bIns="0" anchor="t">
-            <a:spAutoFit/>
-          </a:bodyPr>
-          <a:lstStyle/>
+              <a:rPr sz="1100" b="0">
+                <a:solidFill>
+                  <a:srgbClr val="3A423D"/>
+                </a:solidFill>
+                <a:latin typeface="Calibri"/>
+              </a:rPr>
+              <a:t>•  Native iOS port (Swift / SwiftUI)</a:t>
+            </a:r>
+            <a:endParaRPr sz="1100" b="0">
+              <a:solidFill>
+                <a:srgbClr val="3A423D"/>
+              </a:solidFill>
+              <a:latin typeface="Calibri"/>
+            </a:endParaRPr>
+          </a:p>
           <a:p>
             <a:pPr algn="l"/>
             <a:r>
-              <a:rPr sz="1600" b="1">
-                <a:solidFill>
-                  <a:srgbClr val="1A1F1C"/>
-                </a:solidFill>
-                <a:latin typeface="Calibri"/>
-              </a:rPr>
-              <a:t>Khmer-first by design</a:t>
-            </a:r>
-            <a:endParaRPr sz="1600" b="1">
-              <a:solidFill>
-                <a:srgbClr val="1A1F1C"/>
-              </a:solidFill>
-              <a:latin typeface="Calibri"/>
-            </a:endParaRPr>
-          </a:p>
-        </p:txBody>
-      </p:sp>
-      <p:sp>
-        <p:nvSpPr>
-          <p:cNvPr id="15" name="TextBox 14"/>
-          <p:cNvSpPr txBox="1"/>
-          <p:nvPr/>
-        </p:nvSpPr>
-        <p:spPr>
-          <a:xfrm>
-            <a:off x="8092440" y="2331720"/>
-            <a:ext cx="3337560" cy="1371600"/>
-          </a:xfrm>
-          <a:prstGeom prst="rect">
-            <a:avLst/>
-          </a:prstGeom>
-          <a:noFill/>
-        </p:spPr>
-        <p:txBody>
-          <a:bodyPr wrap="square" lIns="0" tIns="0" rIns="0" bIns="0" anchor="t">
-            <a:spAutoFit/>
-          </a:bodyPr>
-          <a:lstStyle/>
+              <a:rPr sz="1100" b="0">
+                <a:solidFill>
+                  <a:srgbClr val="3A423D"/>
+                </a:solidFill>
+                <a:latin typeface="Calibri"/>
+              </a:rPr>
+              <a:t>•  iOS 13+ deployment target</a:t>
+            </a:r>
+            <a:endParaRPr sz="1100" b="0">
+              <a:solidFill>
+                <a:srgbClr val="3A423D"/>
+              </a:solidFill>
+              <a:latin typeface="Calibri"/>
+            </a:endParaRPr>
+          </a:p>
           <a:p>
             <a:pPr algn="l"/>
             <a:r>
               <a:rPr sz="1100" b="0">
                 <a:solidFill>
-                  <a:srgbClr val="6B6E6A"/>
-                </a:solidFill>
-                <a:latin typeface="Calibri"/>
-              </a:rPr>
-              <a:t>Every label, every category, every pest name —</a:t>
+                  <a:srgbClr val="3A423D"/>
+                </a:solidFill>
+                <a:latin typeface="Calibri"/>
+              </a:rPr>
+              <a:t>•  CoreData persistence</a:t>
             </a:r>
             <a:endParaRPr sz="1100" b="0">
               <a:solidFill>
-                <a:srgbClr val="6B6E6A"/>
+                <a:srgbClr val="3A423D"/>
               </a:solidFill>
               <a:latin typeface="Calibri"/>
             </a:endParaRPr>
@@ -15989,42 +15121,40 @@
             <a:r>
               <a:rPr sz="1100" b="0">
                 <a:solidFill>
-                  <a:srgbClr val="6B6E6A"/>
-                </a:solidFill>
-                <a:latin typeface="Calibri"/>
-              </a:rPr>
-              <a:t>in Khmer. Not a translation layer.</a:t>
+                  <a:srgbClr val="3A423D"/>
+                </a:solidFill>
+                <a:latin typeface="Calibri"/>
+              </a:rPr>
+              <a:t>•  Local notifications for activities</a:t>
             </a:r>
             <a:endParaRPr sz="1100" b="0">
               <a:solidFill>
-                <a:srgbClr val="6B6E6A"/>
-              </a:solidFill>
-              <a:latin typeface="Calibri"/>
-            </a:endParaRPr>
-          </a:p>
-        </p:txBody>
-      </p:sp>
-      <p:sp>
-        <p:nvSpPr>
-          <p:cNvPr id="16" name="Rounded Rectangle 15"/>
+                <a:srgbClr val="3A423D"/>
+              </a:solidFill>
+              <a:latin typeface="Calibri"/>
+            </a:endParaRPr>
+          </a:p>
+        </p:txBody>
+      </p:sp>
+      <p:sp>
+        <p:nvSpPr>
+          <p:cNvPr id="18" name="Rounded Rectangle 17"/>
           <p:cNvSpPr/>
           <p:nvPr/>
         </p:nvSpPr>
         <p:spPr>
           <a:xfrm>
-            <a:off x="640080" y="3977640"/>
-            <a:ext cx="5440680" cy="2286000"/>
+            <a:off x="640080" y="5943600"/>
+            <a:ext cx="10881360" cy="457200"/>
           </a:xfrm>
           <a:prstGeom prst="roundRect">
             <a:avLst/>
           </a:prstGeom>
           <a:solidFill>
-            <a:srgbClr val="FFFFFF"/>
+            <a:srgbClr val="EEF0EE"/>
           </a:solidFill>
-          <a:ln w="9525">
-            <a:solidFill>
-              <a:srgbClr val="D8DBD9"/>
-            </a:solidFill>
+          <a:ln>
+            <a:noFill/>
           </a:ln>
           <a:effectLst/>
         </p:spPr>
@@ -16052,58 +15182,14 @@
       </p:sp>
       <p:sp>
         <p:nvSpPr>
-          <p:cNvPr id="17" name="Rectangle 16"/>
-          <p:cNvSpPr/>
-          <p:nvPr/>
-        </p:nvSpPr>
-        <p:spPr>
-          <a:xfrm>
-            <a:off x="640080" y="3977640"/>
-            <a:ext cx="164592" cy="2286000"/>
-          </a:xfrm>
-          <a:prstGeom prst="rect">
-            <a:avLst/>
-          </a:prstGeom>
-          <a:solidFill>
-            <a:srgbClr val="2E6E43"/>
-          </a:solidFill>
-          <a:ln>
-            <a:noFill/>
-          </a:ln>
-          <a:effectLst/>
-        </p:spPr>
-        <p:style>
-          <a:lnRef idx="1">
-            <a:schemeClr val="accent1"/>
-          </a:lnRef>
-          <a:fillRef idx="3">
-            <a:schemeClr val="accent1"/>
-          </a:fillRef>
-          <a:effectRef idx="2">
-            <a:schemeClr val="accent1"/>
-          </a:effectRef>
-          <a:fontRef idx="minor">
-            <a:schemeClr val="lt1"/>
-          </a:fontRef>
-        </p:style>
-        <p:txBody>
-          <a:bodyPr rtlCol="0" anchor="ctr"/>
-          <a:lstStyle/>
-          <a:p>
-            <a:pPr algn="ctr"/>
-          </a:p>
-        </p:txBody>
-      </p:sp>
-      <p:sp>
-        <p:nvSpPr>
-          <p:cNvPr id="18" name="TextBox 17"/>
+          <p:cNvPr id="19" name="TextBox 18"/>
           <p:cNvSpPr txBox="1"/>
           <p:nvPr/>
         </p:nvSpPr>
         <p:spPr>
           <a:xfrm>
-            <a:off x="1005840" y="4160520"/>
-            <a:ext cx="1463040" cy="457200"/>
+            <a:off x="640080" y="5989320"/>
+            <a:ext cx="10881360" cy="365760"/>
           </a:xfrm>
           <a:prstGeom prst="rect">
             <a:avLst/>
@@ -16116,35 +15202,35 @@
           </a:bodyPr>
           <a:lstStyle/>
           <a:p>
-            <a:pPr algn="l"/>
-            <a:r>
-              <a:rPr sz="1800" b="1">
-                <a:solidFill>
-                  <a:srgbClr val="2E6E43"/>
-                </a:solidFill>
-                <a:latin typeface="Calibri"/>
-              </a:rPr>
-              <a:t>[$$]</a:t>
-            </a:r>
-            <a:endParaRPr sz="1800" b="1">
-              <a:solidFill>
-                <a:srgbClr val="2E6E43"/>
-              </a:solidFill>
-              <a:latin typeface="Calibri"/>
-            </a:endParaRPr>
-          </a:p>
-        </p:txBody>
-      </p:sp>
-      <p:sp>
-        <p:nvSpPr>
-          <p:cNvPr id="19" name="TextBox 18"/>
+            <a:pPr algn="ctr"/>
+            <a:r>
+              <a:rPr sz="1100" b="1">
+                <a:solidFill>
+                  <a:srgbClr val="3A423D"/>
+                </a:solidFill>
+                <a:latin typeface="Calibri"/>
+              </a:rPr>
+              <a:t>Stack:  React 18  ·  Vite  ·  localStorage   →   SwiftUI  ·  CoreData  ·  iOS 13+</a:t>
+            </a:r>
+            <a:endParaRPr sz="1100" b="1">
+              <a:solidFill>
+                <a:srgbClr val="3A423D"/>
+              </a:solidFill>
+              <a:latin typeface="Calibri"/>
+            </a:endParaRPr>
+          </a:p>
+        </p:txBody>
+      </p:sp>
+      <p:sp>
+        <p:nvSpPr>
+          <p:cNvPr id="20" name="TextBox 19"/>
           <p:cNvSpPr txBox="1"/>
           <p:nvPr/>
         </p:nvSpPr>
         <p:spPr>
           <a:xfrm>
-            <a:off x="2468880" y="4206240"/>
-            <a:ext cx="3429000" cy="457200"/>
+            <a:off x="548640" y="6446520"/>
+            <a:ext cx="5486400" cy="138430"/>
           </a:xfrm>
           <a:prstGeom prst="rect">
             <a:avLst/>
@@ -16159,33 +15245,35 @@
           <a:p>
             <a:pPr algn="l"/>
             <a:r>
-              <a:rPr sz="1600" b="1">
-                <a:solidFill>
-                  <a:srgbClr val="1A1F1C"/>
-                </a:solidFill>
-                <a:latin typeface="Calibri"/>
-              </a:rPr>
-              <a:t>Dual currency native</a:t>
-            </a:r>
-            <a:endParaRPr sz="1600" b="1">
-              <a:solidFill>
-                <a:srgbClr val="1A1F1C"/>
-              </a:solidFill>
-              <a:latin typeface="Calibri"/>
-            </a:endParaRPr>
-          </a:p>
-        </p:txBody>
-      </p:sp>
-      <p:sp>
-        <p:nvSpPr>
-          <p:cNvPr id="20" name="TextBox 19"/>
+              <a:rPr sz="900" b="0">
+                <a:solidFill>
+                  <a:srgbClr val="6B6E6A"/>
+                </a:solidFill>
+                <a:latin typeface="Khmer OS Siemreap" panose="02000500000000020004" charset="0"/>
+                <a:cs typeface="Khmer OS Siemreap" panose="02000500000000020004" charset="0"/>
+              </a:rPr>
+              <a:t>SmartFarm — កសិកម្មឆ្លាតវៃ ងាយស្រួល</a:t>
+            </a:r>
+            <a:endParaRPr sz="900" b="0">
+              <a:solidFill>
+                <a:srgbClr val="6B6E6A"/>
+              </a:solidFill>
+              <a:latin typeface="Khmer OS Siemreap" panose="02000500000000020004" charset="0"/>
+              <a:cs typeface="Khmer OS Siemreap" panose="02000500000000020004" charset="0"/>
+            </a:endParaRPr>
+          </a:p>
+        </p:txBody>
+      </p:sp>
+      <p:sp>
+        <p:nvSpPr>
+          <p:cNvPr id="21" name="TextBox 20"/>
           <p:cNvSpPr txBox="1"/>
           <p:nvPr/>
         </p:nvSpPr>
         <p:spPr>
           <a:xfrm>
-            <a:off x="2468880" y="4754880"/>
-            <a:ext cx="3337560" cy="1371600"/>
+            <a:off x="10698480" y="6446520"/>
+            <a:ext cx="1005840" cy="274320"/>
           </a:xfrm>
           <a:prstGeom prst="rect">
             <a:avLst/>
@@ -16198,354 +15286,21 @@
           </a:bodyPr>
           <a:lstStyle/>
           <a:p>
-            <a:pPr algn="l"/>
-            <a:r>
-              <a:rPr sz="1100" b="0">
+            <a:pPr algn="r"/>
+            <a:r>
+              <a:rPr sz="900" b="0">
                 <a:solidFill>
                   <a:srgbClr val="6B6E6A"/>
                 </a:solidFill>
                 <a:latin typeface="Calibri"/>
               </a:rPr>
-              <a:t>KHR and USD both first-class.</a:t>
-            </a:r>
-            <a:endParaRPr sz="1100" b="0">
+              <a:t>9 / 15</a:t>
+            </a:r>
+            <a:endParaRPr sz="900" b="0">
               <a:solidFill>
                 <a:srgbClr val="6B6E6A"/>
               </a:solidFill>
               <a:latin typeface="Calibri"/>
-            </a:endParaRPr>
-          </a:p>
-          <a:p>
-            <a:pPr algn="l"/>
-            <a:r>
-              <a:rPr sz="1100" b="0">
-                <a:solidFill>
-                  <a:srgbClr val="6B6E6A"/>
-                </a:solidFill>
-                <a:latin typeface="Calibri"/>
-              </a:rPr>
-              <a:t>Reflects how Cambodian commerce actually works.</a:t>
-            </a:r>
-            <a:endParaRPr sz="1100" b="0">
-              <a:solidFill>
-                <a:srgbClr val="6B6E6A"/>
-              </a:solidFill>
-              <a:latin typeface="Calibri"/>
-            </a:endParaRPr>
-          </a:p>
-        </p:txBody>
-      </p:sp>
-      <p:sp>
-        <p:nvSpPr>
-          <p:cNvPr id="21" name="Rounded Rectangle 20"/>
-          <p:cNvSpPr/>
-          <p:nvPr/>
-        </p:nvSpPr>
-        <p:spPr>
-          <a:xfrm>
-            <a:off x="6263640" y="3977640"/>
-            <a:ext cx="5440680" cy="2286000"/>
-          </a:xfrm>
-          <a:prstGeom prst="roundRect">
-            <a:avLst/>
-          </a:prstGeom>
-          <a:solidFill>
-            <a:srgbClr val="FFFFFF"/>
-          </a:solidFill>
-          <a:ln w="9525">
-            <a:solidFill>
-              <a:srgbClr val="D8DBD9"/>
-            </a:solidFill>
-          </a:ln>
-          <a:effectLst/>
-        </p:spPr>
-        <p:style>
-          <a:lnRef idx="1">
-            <a:schemeClr val="accent1"/>
-          </a:lnRef>
-          <a:fillRef idx="3">
-            <a:schemeClr val="accent1"/>
-          </a:fillRef>
-          <a:effectRef idx="2">
-            <a:schemeClr val="accent1"/>
-          </a:effectRef>
-          <a:fontRef idx="minor">
-            <a:schemeClr val="lt1"/>
-          </a:fontRef>
-        </p:style>
-        <p:txBody>
-          <a:bodyPr rtlCol="0" anchor="ctr"/>
-          <a:lstStyle/>
-          <a:p>
-            <a:pPr algn="ctr"/>
-          </a:p>
-        </p:txBody>
-      </p:sp>
-      <p:sp>
-        <p:nvSpPr>
-          <p:cNvPr id="22" name="Rectangle 21"/>
-          <p:cNvSpPr/>
-          <p:nvPr/>
-        </p:nvSpPr>
-        <p:spPr>
-          <a:xfrm>
-            <a:off x="6263640" y="3977640"/>
-            <a:ext cx="164592" cy="2286000"/>
-          </a:xfrm>
-          <a:prstGeom prst="rect">
-            <a:avLst/>
-          </a:prstGeom>
-          <a:solidFill>
-            <a:srgbClr val="2E6E43"/>
-          </a:solidFill>
-          <a:ln>
-            <a:noFill/>
-          </a:ln>
-          <a:effectLst/>
-        </p:spPr>
-        <p:style>
-          <a:lnRef idx="1">
-            <a:schemeClr val="accent1"/>
-          </a:lnRef>
-          <a:fillRef idx="3">
-            <a:schemeClr val="accent1"/>
-          </a:fillRef>
-          <a:effectRef idx="2">
-            <a:schemeClr val="accent1"/>
-          </a:effectRef>
-          <a:fontRef idx="minor">
-            <a:schemeClr val="lt1"/>
-          </a:fontRef>
-        </p:style>
-        <p:txBody>
-          <a:bodyPr rtlCol="0" anchor="ctr"/>
-          <a:lstStyle/>
-          <a:p>
-            <a:pPr algn="ctr"/>
-          </a:p>
-        </p:txBody>
-      </p:sp>
-      <p:sp>
-        <p:nvSpPr>
-          <p:cNvPr id="23" name="TextBox 22"/>
-          <p:cNvSpPr txBox="1"/>
-          <p:nvPr/>
-        </p:nvSpPr>
-        <p:spPr>
-          <a:xfrm>
-            <a:off x="6629400" y="4160520"/>
-            <a:ext cx="1463040" cy="457200"/>
-          </a:xfrm>
-          <a:prstGeom prst="rect">
-            <a:avLst/>
-          </a:prstGeom>
-          <a:noFill/>
-        </p:spPr>
-        <p:txBody>
-          <a:bodyPr wrap="square" lIns="0" tIns="0" rIns="0" bIns="0" anchor="t">
-            <a:spAutoFit/>
-          </a:bodyPr>
-          <a:lstStyle/>
-          <a:p>
-            <a:pPr algn="l"/>
-            <a:r>
-              <a:rPr sz="1800" b="1">
-                <a:solidFill>
-                  <a:srgbClr val="2E6E43"/>
-                </a:solidFill>
-                <a:latin typeface="Calibri"/>
-              </a:rPr>
-              <a:t>[--]</a:t>
-            </a:r>
-            <a:endParaRPr sz="1800" b="1">
-              <a:solidFill>
-                <a:srgbClr val="2E6E43"/>
-              </a:solidFill>
-              <a:latin typeface="Calibri"/>
-            </a:endParaRPr>
-          </a:p>
-        </p:txBody>
-      </p:sp>
-      <p:sp>
-        <p:nvSpPr>
-          <p:cNvPr id="24" name="TextBox 23"/>
-          <p:cNvSpPr txBox="1"/>
-          <p:nvPr/>
-        </p:nvSpPr>
-        <p:spPr>
-          <a:xfrm>
-            <a:off x="8092440" y="4206240"/>
-            <a:ext cx="3429000" cy="457200"/>
-          </a:xfrm>
-          <a:prstGeom prst="rect">
-            <a:avLst/>
-          </a:prstGeom>
-          <a:noFill/>
-        </p:spPr>
-        <p:txBody>
-          <a:bodyPr wrap="square" lIns="0" tIns="0" rIns="0" bIns="0" anchor="t">
-            <a:spAutoFit/>
-          </a:bodyPr>
-          <a:lstStyle/>
-          <a:p>
-            <a:pPr algn="l"/>
-            <a:r>
-              <a:rPr sz="1600" b="1">
-                <a:solidFill>
-                  <a:srgbClr val="1A1F1C"/>
-                </a:solidFill>
-                <a:latin typeface="Calibri"/>
-              </a:rPr>
-              <a:t>No account, no friction</a:t>
-            </a:r>
-            <a:endParaRPr sz="1600" b="1">
-              <a:solidFill>
-                <a:srgbClr val="1A1F1C"/>
-              </a:solidFill>
-              <a:latin typeface="Calibri"/>
-            </a:endParaRPr>
-          </a:p>
-        </p:txBody>
-      </p:sp>
-      <p:sp>
-        <p:nvSpPr>
-          <p:cNvPr id="25" name="TextBox 24"/>
-          <p:cNvSpPr txBox="1"/>
-          <p:nvPr/>
-        </p:nvSpPr>
-        <p:spPr>
-          <a:xfrm>
-            <a:off x="8092440" y="4754880"/>
-            <a:ext cx="3337560" cy="1371600"/>
-          </a:xfrm>
-          <a:prstGeom prst="rect">
-            <a:avLst/>
-          </a:prstGeom>
-          <a:noFill/>
-        </p:spPr>
-        <p:txBody>
-          <a:bodyPr wrap="square" lIns="0" tIns="0" rIns="0" bIns="0" anchor="t">
-            <a:spAutoFit/>
-          </a:bodyPr>
-          <a:lstStyle/>
-          <a:p>
-            <a:pPr algn="l"/>
-            <a:r>
-              <a:rPr sz="1100" b="0">
-                <a:solidFill>
-                  <a:srgbClr val="6B6E6A"/>
-                </a:solidFill>
-                <a:latin typeface="Calibri"/>
-              </a:rPr>
-              <a:t>Open the app. Use it.</a:t>
-            </a:r>
-            <a:endParaRPr sz="1100" b="0">
-              <a:solidFill>
-                <a:srgbClr val="6B6E6A"/>
-              </a:solidFill>
-              <a:latin typeface="Calibri"/>
-            </a:endParaRPr>
-          </a:p>
-          <a:p>
-            <a:pPr algn="l"/>
-            <a:r>
-              <a:rPr sz="1100" b="0">
-                <a:solidFill>
-                  <a:srgbClr val="6B6E6A"/>
-                </a:solidFill>
-                <a:latin typeface="Calibri"/>
-              </a:rPr>
-              <a:t>No login, no email, no data leaves the phone.</a:t>
-            </a:r>
-            <a:endParaRPr sz="1100" b="0">
-              <a:solidFill>
-                <a:srgbClr val="6B6E6A"/>
-              </a:solidFill>
-              <a:latin typeface="Calibri"/>
-            </a:endParaRPr>
-          </a:p>
-        </p:txBody>
-      </p:sp>
-      <p:sp>
-        <p:nvSpPr>
-          <p:cNvPr id="27" name="TextBox 26"/>
-          <p:cNvSpPr txBox="1"/>
-          <p:nvPr/>
-        </p:nvSpPr>
-        <p:spPr>
-          <a:xfrm>
-            <a:off x="10698480" y="6446520"/>
-            <a:ext cx="1005840" cy="274320"/>
-          </a:xfrm>
-          <a:prstGeom prst="rect">
-            <a:avLst/>
-          </a:prstGeom>
-          <a:noFill/>
-        </p:spPr>
-        <p:txBody>
-          <a:bodyPr wrap="square" lIns="0" tIns="0" rIns="0" bIns="0" anchor="t">
-            <a:spAutoFit/>
-          </a:bodyPr>
-          <a:lstStyle/>
-          <a:p>
-            <a:pPr algn="r"/>
-            <a:r>
-              <a:rPr sz="900" b="0">
-                <a:solidFill>
-                  <a:srgbClr val="6B6E6A"/>
-                </a:solidFill>
-                <a:latin typeface="Calibri"/>
-              </a:rPr>
-              <a:t>9 / 16</a:t>
-            </a:r>
-            <a:endParaRPr sz="900" b="0">
-              <a:solidFill>
-                <a:srgbClr val="6B6E6A"/>
-              </a:solidFill>
-              <a:latin typeface="Calibri"/>
-            </a:endParaRPr>
-          </a:p>
-        </p:txBody>
-      </p:sp>
-      <p:sp>
-        <p:nvSpPr>
-          <p:cNvPr id="52" name="TextBox 19"/>
-          <p:cNvSpPr txBox="1"/>
-          <p:nvPr/>
-        </p:nvSpPr>
-        <p:spPr>
-          <a:xfrm>
-            <a:off x="548640" y="6582410"/>
-            <a:ext cx="5486400" cy="138430"/>
-          </a:xfrm>
-          <a:prstGeom prst="rect">
-            <a:avLst/>
-          </a:prstGeom>
-          <a:noFill/>
-        </p:spPr>
-        <p:txBody>
-          <a:bodyPr wrap="square" lIns="0" tIns="0" rIns="0" bIns="0" anchor="t">
-            <a:spAutoFit/>
-          </a:bodyPr>
-          <a:lstStyle/>
-          <a:p>
-            <a:pPr algn="l"/>
-            <a:r>
-              <a:rPr sz="900" b="0">
-                <a:solidFill>
-                  <a:srgbClr val="6B6E6A"/>
-                </a:solidFill>
-                <a:latin typeface="Khmer OS Siemreap" panose="02000500000000020004" charset="0"/>
-                <a:cs typeface="Khmer OS Siemreap" panose="02000500000000020004" charset="0"/>
-              </a:rPr>
-              <a:t>SmartFarm — កសិកម្មឆ្លាតវៃ ងាយស្រួល</a:t>
-            </a:r>
-            <a:endParaRPr sz="900" b="0">
-              <a:solidFill>
-                <a:srgbClr val="6B6E6A"/>
-              </a:solidFill>
-              <a:latin typeface="Khmer OS Siemreap" panose="02000500000000020004" charset="0"/>
-              <a:cs typeface="Khmer OS Siemreap" panose="02000500000000020004" charset="0"/>
             </a:endParaRPr>
           </a:p>
         </p:txBody>
